--- a/docs/TimeBaiBai_サービス紹介資料.pptx
+++ b/docs/TimeBaiBai_サービス紹介資料.pptx
@@ -30,6 +30,9 @@
     <p:sldId id="278" r:id="rId29"/>
     <p:sldId id="279" r:id="rId30"/>
     <p:sldId id="280" r:id="rId31"/>
+    <p:sldId id="281" r:id="rId32"/>
+    <p:sldId id="282" r:id="rId33"/>
+    <p:sldId id="283" r:id="rId34"/>
   </p:sldIdLst>
   <p:sldSz cx="12188952" cy="6858000" type="screen4x3"/>
   <p:notesSz cx="6858000" cy="9144000"/>
@@ -5158,7 +5161,7 @@
               </a:defRPr>
             </a:pPr>
             <a:r>
-              <a:t>  ✓  日別・週別・月別の売上推移をグラフで表示</a:t>
+              <a:t>  ✓  日別・週別・月別・年別の売上推移をグラフで表示</a:t>
             </a:r>
           </a:p>
           <a:p>
@@ -5190,7 +5193,7 @@
               </a:defRPr>
             </a:pPr>
             <a:r>
-              <a:t>  ✓  メニューエンジニアリングで人気商品・利益率を分析</a:t>
+              <a:t>  ✓  総売上・ECショップ・店内メニューの3チャネル別分析</a:t>
             </a:r>
           </a:p>
           <a:p>
@@ -5284,7 +5287,7 @@
               </a:defRPr>
             </a:pPr>
             <a:r>
-              <a:t>管理画面 — シフトカレンダー</a:t>
+              <a:t>管理画面 — 売上データ分析（メニュー分析）</a:t>
             </a:r>
           </a:p>
         </p:txBody>
@@ -5379,7 +5382,7 @@
       </p:sp>
       <p:pic>
         <p:nvPicPr>
-          <p:cNvPr id="5" name="Picture 4" descr="shift_calendar_vp.png"/>
+          <p:cNvPr id="5" name="Picture 4" descr="dashboard_menu_eng_vp.png"/>
           <p:cNvPicPr>
             <a:picLocks noChangeAspect="1"/>
           </p:cNvPicPr>
@@ -5393,8 +5396,8 @@
         </p:blipFill>
         <p:spPr>
           <a:xfrm>
-            <a:off x="473456" y="1188720"/>
-            <a:ext cx="7282688" cy="5120640"/>
+            <a:off x="2044547" y="1188720"/>
+            <a:ext cx="4140504" cy="5120640"/>
           </a:xfrm>
           <a:prstGeom prst="rect">
             <a:avLst/>
@@ -5432,7 +5435,7 @@
               </a:defRPr>
             </a:pPr>
             <a:r>
-              <a:t>シフト管理を効率化</a:t>
+              <a:t>AI分析で利益を最大化</a:t>
             </a:r>
           </a:p>
         </p:txBody>
@@ -5471,7 +5474,7 @@
               </a:defRPr>
             </a:pPr>
             <a:r>
-              <a:t>  ✓  スタッフのシフト希望をスマホから受付</a:t>
+              <a:t>  ✓  メニューエンジニアリング: Star/Plowhorse/Puzzle/Dogの4象限分類</a:t>
             </a:r>
           </a:p>
           <a:p>
@@ -5487,7 +5490,7 @@
               </a:defRPr>
             </a:pPr>
             <a:r>
-              <a:t>  ✓  カレンダー形式で全スタッフの予定を俯瞰</a:t>
+              <a:t>  ✓  ABC分析: パレートの法則で売上の80%を生み出す主力商品を特定</a:t>
             </a:r>
           </a:p>
           <a:p>
@@ -5503,7 +5506,7 @@
               </a:defRPr>
             </a:pPr>
             <a:r>
-              <a:t>  ✓  自動スケジューリングでワンクリック割り当て</a:t>
+              <a:t>  ✓  売上予測: Prophet AIモデルで14日先の売上を自動予測</a:t>
             </a:r>
           </a:p>
           <a:p>
@@ -5519,7 +5522,7 @@
               </a:defRPr>
             </a:pPr>
             <a:r>
-              <a:t>  ✓  人員不足の日を自動検知しアラート表示</a:t>
+              <a:t>  ✓  時間帯別売上ヒートマップで最適なスタッフ配置を提案</a:t>
             </a:r>
           </a:p>
           <a:p>
@@ -5535,7 +5538,7 @@
               </a:defRPr>
             </a:pPr>
             <a:r>
-              <a:t>  ✓  確定シフトをスタッフにLINEで自動通知</a:t>
+              <a:t>  ✓  客単価（AOV）推移で価格戦略の効果を検証</a:t>
             </a:r>
           </a:p>
         </p:txBody>
@@ -5597,7 +5600,7 @@
               </a:defRPr>
             </a:pPr>
             <a:r>
-              <a:t>管理画面 — POS レジ</a:t>
+              <a:t>管理画面 — 売上データ分析（顧客分析）</a:t>
             </a:r>
           </a:p>
         </p:txBody>
@@ -5692,7 +5695,7 @@
       </p:sp>
       <p:pic>
         <p:nvPicPr>
-          <p:cNvPr id="5" name="Picture 4" descr="pos_vp.png"/>
+          <p:cNvPr id="5" name="Picture 4" descr="dashboard_rfm_vp.png"/>
           <p:cNvPicPr>
             <a:picLocks noChangeAspect="1"/>
           </p:cNvPicPr>
@@ -5706,8 +5709,8 @@
         </p:blipFill>
         <p:spPr>
           <a:xfrm>
-            <a:off x="473456" y="1188720"/>
-            <a:ext cx="7282688" cy="5120640"/>
+            <a:off x="1408598" y="1188720"/>
+            <a:ext cx="5412402" cy="5120640"/>
           </a:xfrm>
           <a:prstGeom prst="rect">
             <a:avLst/>
@@ -5745,7 +5748,7 @@
               </a:defRPr>
             </a:pPr>
             <a:r>
-              <a:t>会計をスムーズに</a:t>
+              <a:t>データで顧客理解を深める</a:t>
             </a:r>
           </a:p>
         </p:txBody>
@@ -5784,7 +5787,7 @@
               </a:defRPr>
             </a:pPr>
             <a:r>
-              <a:t>  ✓  カテゴリ別タブで商品をすばやく選択</a:t>
+              <a:t>  ✓  RFM分析: 直近性・頻度・金額で顧客を自動セグメント分類</a:t>
             </a:r>
           </a:p>
           <a:p>
@@ -5800,7 +5803,7 @@
               </a:defRPr>
             </a:pPr>
             <a:r>
-              <a:t>  ✓  現金・クレジットカード・PayPay・交通系ICに対応</a:t>
+              <a:t>  ✓  コホート分析: 月別新規顧客のリテンション率を可視化</a:t>
             </a:r>
           </a:p>
           <a:p>
@@ -5816,7 +5819,7 @@
               </a:defRPr>
             </a:pPr>
             <a:r>
-              <a:t>  ✓  レシート自動発行・印刷対応</a:t>
+              <a:t>  ✓  バスケット分析: 併売パターンからおすすめ商品を発見</a:t>
             </a:r>
           </a:p>
           <a:p>
@@ -5832,7 +5835,7 @@
               </a:defRPr>
             </a:pPr>
             <a:r>
-              <a:t>  ✓  キッチンディスプレイと連動してオーダー通知</a:t>
+              <a:t>  ✓  AI分析テキスト: 各分析結果をAIが日本語で要約・評価</a:t>
             </a:r>
           </a:p>
           <a:p>
@@ -5848,7 +5851,7 @@
               </a:defRPr>
             </a:pPr>
             <a:r>
-              <a:t>  ✓  日次・月次の売上レポートを自動生成</a:t>
+              <a:t>  ✓  推奨アクション: 具体的な改善施策をAIが自動提案</a:t>
             </a:r>
           </a:p>
         </p:txBody>
@@ -5910,7 +5913,7 @@
               </a:defRPr>
             </a:pPr>
             <a:r>
-              <a:t>管理画面 — 在庫管理</a:t>
+              <a:t>管理画面 — シフトカレンダー</a:t>
             </a:r>
           </a:p>
         </p:txBody>
@@ -6005,7 +6008,7 @@
       </p:sp>
       <p:pic>
         <p:nvPicPr>
-          <p:cNvPr id="5" name="Picture 4" descr="inventory_vp.png"/>
+          <p:cNvPr id="5" name="Picture 4" descr="shift_calendar_vp.png"/>
           <p:cNvPicPr>
             <a:picLocks noChangeAspect="1"/>
           </p:cNvPicPr>
@@ -6058,7 +6061,7 @@
               </a:defRPr>
             </a:pPr>
             <a:r>
-              <a:t>在庫切れを防止</a:t>
+              <a:t>シフト管理を効率化</a:t>
             </a:r>
           </a:p>
         </p:txBody>
@@ -6097,7 +6100,7 @@
               </a:defRPr>
             </a:pPr>
             <a:r>
-              <a:t>  ✓  全商品の在庫数をリアルタイムで一覧表示</a:t>
+              <a:t>  ✓  スタッフのシフト希望をスマホから受付</a:t>
             </a:r>
           </a:p>
           <a:p>
@@ -6113,7 +6116,7 @@
               </a:defRPr>
             </a:pPr>
             <a:r>
-              <a:t>  ✓  注文と連動して在庫を自動で差し引き</a:t>
+              <a:t>  ✓  カレンダー形式で全スタッフの予定を俯瞰</a:t>
             </a:r>
           </a:p>
           <a:p>
@@ -6129,7 +6132,7 @@
               </a:defRPr>
             </a:pPr>
             <a:r>
-              <a:t>  ✓  在庫が少なくなったらアラート通知</a:t>
+              <a:t>  ✓  自動スケジューリングでワンクリック割り当て</a:t>
             </a:r>
           </a:p>
           <a:p>
@@ -6145,7 +6148,7 @@
               </a:defRPr>
             </a:pPr>
             <a:r>
-              <a:t>  ✓  QRコードで入庫処理（バーコードリーダー不要）</a:t>
+              <a:t>  ✓  人員不足の日を自動検知しアラート表示</a:t>
             </a:r>
           </a:p>
           <a:p>
@@ -6161,7 +6164,7 @@
               </a:defRPr>
             </a:pPr>
             <a:r>
-              <a:t>  ✓  入出庫の履歴をすべて記録（監査対応）</a:t>
+              <a:t>  ✓  確定シフトをスタッフにLINEで自動通知</a:t>
             </a:r>
           </a:p>
         </p:txBody>
@@ -6223,7 +6226,7 @@
               </a:defRPr>
             </a:pPr>
             <a:r>
-              <a:t>管理画面 — 顧客フィードバック（NPS）</a:t>
+              <a:t>管理画面 — POS レジ</a:t>
             </a:r>
           </a:p>
         </p:txBody>
@@ -6318,7 +6321,7 @@
       </p:sp>
       <p:pic>
         <p:nvPicPr>
-          <p:cNvPr id="5" name="Picture 4" descr="customer_feedback_vp.png"/>
+          <p:cNvPr id="5" name="Picture 4" descr="pos_vp.png"/>
           <p:cNvPicPr>
             <a:picLocks noChangeAspect="1"/>
           </p:cNvPicPr>
@@ -6371,7 +6374,7 @@
               </a:defRPr>
             </a:pPr>
             <a:r>
-              <a:t>お客様の声を数値で把握</a:t>
+              <a:t>会計をスムーズに</a:t>
             </a:r>
           </a:p>
         </p:txBody>
@@ -6410,7 +6413,7 @@
               </a:defRPr>
             </a:pPr>
             <a:r>
-              <a:t>  ✓  NPS（顧客推奨度）を自動集計・トレンド表示</a:t>
+              <a:t>  ✓  カテゴリ別タブで商品をすばやく選択</a:t>
             </a:r>
           </a:p>
           <a:p>
@@ -6426,7 +6429,7 @@
               </a:defRPr>
             </a:pPr>
             <a:r>
-              <a:t>  ✓  Promoter / Passive / Detractor を色分け表示</a:t>
+              <a:t>  ✓  現金・クレジットカード・PayPay・交通系ICに対応</a:t>
             </a:r>
           </a:p>
           <a:p>
@@ -6442,7 +6445,7 @@
               </a:defRPr>
             </a:pPr>
             <a:r>
-              <a:t>  ✓  コメント付きフィードバックで具体的な改善点を把握</a:t>
+              <a:t>  ✓  レシート自動発行・印刷対応</a:t>
             </a:r>
           </a:p>
           <a:p>
@@ -6458,7 +6461,7 @@
               </a:defRPr>
             </a:pPr>
             <a:r>
-              <a:t>  ✓  注文データと紐付けてサービス品質を分析</a:t>
+              <a:t>  ✓  キッチンディスプレイと連動してオーダー通知</a:t>
             </a:r>
           </a:p>
           <a:p>
@@ -6474,7 +6477,7 @@
               </a:defRPr>
             </a:pPr>
             <a:r>
-              <a:t>  ✓  月別・スタッフ別の満足度推移を可視化</a:t>
+              <a:t>  ✓  日次・月次の売上レポートを自動生成</a:t>
             </a:r>
           </a:p>
         </p:txBody>
@@ -7266,7 +7269,7 @@
               </a:defRPr>
             </a:pPr>
             <a:r>
-              <a:t>管理画面 — 出退勤ボード</a:t>
+              <a:t>管理画面 — 在庫管理</a:t>
             </a:r>
           </a:p>
         </p:txBody>
@@ -7361,7 +7364,7 @@
       </p:sp>
       <p:pic>
         <p:nvPicPr>
-          <p:cNvPr id="5" name="Picture 4" descr="attendance_board_vp.png"/>
+          <p:cNvPr id="5" name="Picture 4" descr="inventory_vp.png"/>
           <p:cNvPicPr>
             <a:picLocks noChangeAspect="1"/>
           </p:cNvPicPr>
@@ -7414,7 +7417,7 @@
               </a:defRPr>
             </a:pPr>
             <a:r>
-              <a:t>スタッフの勤務状況をリアルタイム表示</a:t>
+              <a:t>在庫切れを防止</a:t>
             </a:r>
           </a:p>
         </p:txBody>
@@ -7453,7 +7456,7 @@
               </a:defRPr>
             </a:pPr>
             <a:r>
-              <a:t>  ✓  出勤中・休憩中・未出勤のステータスを一覧表示</a:t>
+              <a:t>  ✓  全商品の在庫数をリアルタイムで一覧表示</a:t>
             </a:r>
           </a:p>
           <a:p>
@@ -7469,7 +7472,7 @@
               </a:defRPr>
             </a:pPr>
             <a:r>
-              <a:t>  ✓  30秒ごとに自動更新でリアルタイム把握</a:t>
+              <a:t>  ✓  注文と連動して在庫を自動で差し引き</a:t>
             </a:r>
           </a:p>
           <a:p>
@@ -7485,7 +7488,7 @@
               </a:defRPr>
             </a:pPr>
             <a:r>
-              <a:t>  ✓  QRコード / PIN入力 / スマホ打刻の3方式に対応</a:t>
+              <a:t>  ✓  在庫が少なくなったらアラート通知</a:t>
             </a:r>
           </a:p>
           <a:p>
@@ -7501,7 +7504,7 @@
               </a:defRPr>
             </a:pPr>
             <a:r>
-              <a:t>  ✓  残業・深夜・休日出勤を自動で分類</a:t>
+              <a:t>  ✓  QRコードで入庫処理（バーコードリーダー不要）</a:t>
             </a:r>
           </a:p>
           <a:p>
@@ -7517,7 +7520,7 @@
               </a:defRPr>
             </a:pPr>
             <a:r>
-              <a:t>  ✓  勤怠データから給与計算へシームレスに連携</a:t>
+              <a:t>  ✓  入出庫の履歴をすべて記録（監査対応）</a:t>
             </a:r>
           </a:p>
         </p:txBody>
@@ -7536,7 +7539,7 @@
     <p:bg>
       <p:bgPr>
         <a:solidFill>
-          <a:srgbClr val="F1F0EC"/>
+          <a:srgbClr val="FFFFFF"/>
         </a:solidFill>
         <a:effectLst/>
       </p:bgPr>
@@ -7571,7 +7574,7 @@
           <a:lstStyle/>
           <a:p>
             <a:pPr algn="l">
-              <a:defRPr sz="3200" b="1">
+              <a:defRPr sz="2800" b="1">
                 <a:solidFill>
                   <a:srgbClr val="8C876C"/>
                 </a:solidFill>
@@ -7579,7 +7582,7 @@
               </a:defRPr>
             </a:pPr>
             <a:r>
-              <a:t>導入メリット</a:t>
+              <a:t>管理画面 — 顧客フィードバック（NPS）</a:t>
             </a:r>
           </a:p>
         </p:txBody>
@@ -7593,7 +7596,7 @@
         <p:spPr>
           <a:xfrm>
             <a:off x="731520" y="822960"/>
-            <a:ext cx="1828800" cy="36576"/>
+            <a:ext cx="2743200" cy="36576"/>
           </a:xfrm>
           <a:prstGeom prst="rect">
             <a:avLst/>
@@ -7636,14 +7639,14 @@
         </p:nvSpPr>
         <p:spPr>
           <a:xfrm>
-            <a:off x="457200" y="1188720"/>
-            <a:ext cx="3474720" cy="2286000"/>
+            <a:off x="365760" y="1097280"/>
+            <a:ext cx="7498079" cy="5303520"/>
           </a:xfrm>
           <a:prstGeom prst="roundRect">
             <a:avLst/>
           </a:prstGeom>
           <a:solidFill>
-            <a:srgbClr val="FFFFFF"/>
+            <a:srgbClr val="F5F5F5"/>
           </a:solidFill>
           <a:ln>
             <a:noFill/>
@@ -7672,16 +7675,40 @@
           </a:p>
         </p:txBody>
       </p:sp>
-      <p:sp>
-        <p:nvSpPr>
-          <p:cNvPr id="5" name="TextBox 4"/>
+      <p:pic>
+        <p:nvPicPr>
+          <p:cNvPr id="5" name="Picture 4" descr="customer_feedback_vp.png"/>
+          <p:cNvPicPr>
+            <a:picLocks noChangeAspect="1"/>
+          </p:cNvPicPr>
+          <p:nvPr/>
+        </p:nvPicPr>
+        <p:blipFill>
+          <a:blip r:embed="rId2"/>
+          <a:stretch>
+            <a:fillRect/>
+          </a:stretch>
+        </p:blipFill>
+        <p:spPr>
+          <a:xfrm>
+            <a:off x="473456" y="1188720"/>
+            <a:ext cx="7282688" cy="5120640"/>
+          </a:xfrm>
+          <a:prstGeom prst="rect">
+            <a:avLst/>
+          </a:prstGeom>
+        </p:spPr>
+      </p:pic>
+      <p:sp>
+        <p:nvSpPr>
+          <p:cNvPr id="6" name="TextBox 5"/>
           <p:cNvSpPr txBox="1"/>
           <p:nvPr/>
         </p:nvSpPr>
         <p:spPr>
           <a:xfrm>
-            <a:off x="640080" y="1325880"/>
-            <a:ext cx="640080" cy="640080"/>
+            <a:off x="8138160" y="1097280"/>
+            <a:ext cx="3657600" cy="457200"/>
           </a:xfrm>
           <a:prstGeom prst="rect">
             <a:avLst/>
@@ -7694,30 +7721,30 @@
           </a:bodyPr>
           <a:lstStyle/>
           <a:p>
-            <a:pPr algn="ctr">
-              <a:defRPr sz="3000" b="0">
-                <a:solidFill>
-                  <a:srgbClr val="333333"/>
-                </a:solidFill>
-                <a:latin typeface="Meiryo"/>
-              </a:defRPr>
-            </a:pPr>
-            <a:r>
-              <a:t>🛡</a:t>
-            </a:r>
-          </a:p>
-        </p:txBody>
-      </p:sp>
-      <p:sp>
-        <p:nvSpPr>
-          <p:cNvPr id="6" name="TextBox 5"/>
+            <a:pPr algn="l">
+              <a:defRPr sz="1800" b="1">
+                <a:solidFill>
+                  <a:srgbClr val="333333"/>
+                </a:solidFill>
+                <a:latin typeface="Meiryo"/>
+              </a:defRPr>
+            </a:pPr>
+            <a:r>
+              <a:t>お客様の声を数値で把握</a:t>
+            </a:r>
+          </a:p>
+        </p:txBody>
+      </p:sp>
+      <p:sp>
+        <p:nvSpPr>
+          <p:cNvPr id="7" name="TextBox 6"/>
           <p:cNvSpPr txBox="1"/>
           <p:nvPr/>
         </p:nvSpPr>
         <p:spPr>
           <a:xfrm>
-            <a:off x="1280160" y="1371600"/>
-            <a:ext cx="2468880" cy="320040"/>
+            <a:off x="8138160" y="1645920"/>
+            <a:ext cx="3657600" cy="4572000"/>
           </a:xfrm>
           <a:prstGeom prst="rect">
             <a:avLst/>
@@ -7730,836 +7757,83 @@
           </a:bodyPr>
           <a:lstStyle/>
           <a:p>
-            <a:pPr algn="l">
-              <a:defRPr sz="1600" b="1">
-                <a:solidFill>
-                  <a:srgbClr val="8C876C"/>
-                </a:solidFill>
-                <a:latin typeface="Meiryo"/>
-              </a:defRPr>
-            </a:pPr>
-            <a:r>
-              <a:t>ドタキャン損失ゼロへ</a:t>
-            </a:r>
-          </a:p>
-        </p:txBody>
-      </p:sp>
-      <p:sp>
-        <p:nvSpPr>
-          <p:cNvPr id="7" name="TextBox 6"/>
-          <p:cNvSpPr txBox="1"/>
-          <p:nvPr/>
-        </p:nvSpPr>
-        <p:spPr>
-          <a:xfrm>
-            <a:off x="731520" y="1828800"/>
-            <a:ext cx="2926080" cy="1463040"/>
-          </a:xfrm>
-          <a:prstGeom prst="rect">
-            <a:avLst/>
-          </a:prstGeom>
-          <a:noFill/>
-        </p:spPr>
-        <p:txBody>
-          <a:bodyPr wrap="square">
-            <a:spAutoFit/>
-          </a:bodyPr>
-          <a:lstStyle/>
-          <a:p>
-            <a:pPr algn="l">
-              <a:defRPr sz="1200" b="0">
-                <a:solidFill>
-                  <a:srgbClr val="333333"/>
-                </a:solidFill>
-                <a:latin typeface="Meiryo"/>
-              </a:defRPr>
-            </a:pPr>
-            <a:r>
-              <a:t>前払い予約確定制で無断キャンセルを防止。</a:t>
-            </a:r>
-            <a:br/>
-            <a:r>
-              <a:t>前払い/後払いはワンクリックで切替可能です。</a:t>
-            </a:r>
-          </a:p>
-        </p:txBody>
-      </p:sp>
-      <p:sp>
-        <p:nvSpPr>
-          <p:cNvPr id="8" name="Rounded Rectangle 7"/>
-          <p:cNvSpPr/>
-          <p:nvPr/>
-        </p:nvSpPr>
-        <p:spPr>
-          <a:xfrm>
-            <a:off x="4297680" y="1188720"/>
-            <a:ext cx="3474720" cy="2286000"/>
-          </a:xfrm>
-          <a:prstGeom prst="roundRect">
-            <a:avLst/>
-          </a:prstGeom>
-          <a:solidFill>
-            <a:srgbClr val="FFFFFF"/>
-          </a:solidFill>
-          <a:ln>
-            <a:noFill/>
-          </a:ln>
-          <a:effectLst/>
-        </p:spPr>
-        <p:style>
-          <a:lnRef idx="1">
-            <a:schemeClr val="accent1"/>
-          </a:lnRef>
-          <a:fillRef idx="3">
-            <a:schemeClr val="accent1"/>
-          </a:fillRef>
-          <a:effectRef idx="2">
-            <a:schemeClr val="accent1"/>
-          </a:effectRef>
-          <a:fontRef idx="minor">
-            <a:schemeClr val="lt1"/>
-          </a:fontRef>
-        </p:style>
-        <p:txBody>
-          <a:bodyPr rtlCol="0" anchor="ctr"/>
-          <a:lstStyle/>
-          <a:p>
-            <a:pPr algn="ctr"/>
-          </a:p>
-        </p:txBody>
-      </p:sp>
-      <p:sp>
-        <p:nvSpPr>
-          <p:cNvPr id="9" name="TextBox 8"/>
-          <p:cNvSpPr txBox="1"/>
-          <p:nvPr/>
-        </p:nvSpPr>
-        <p:spPr>
-          <a:xfrm>
-            <a:off x="4480560" y="1325880"/>
-            <a:ext cx="640080" cy="640080"/>
-          </a:xfrm>
-          <a:prstGeom prst="rect">
-            <a:avLst/>
-          </a:prstGeom>
-          <a:noFill/>
-        </p:spPr>
-        <p:txBody>
-          <a:bodyPr wrap="square">
-            <a:spAutoFit/>
-          </a:bodyPr>
-          <a:lstStyle/>
-          <a:p>
-            <a:pPr algn="ctr">
-              <a:defRPr sz="3000" b="0">
-                <a:solidFill>
-                  <a:srgbClr val="333333"/>
-                </a:solidFill>
-                <a:latin typeface="Meiryo"/>
-              </a:defRPr>
-            </a:pPr>
-            <a:r>
-              <a:t>💬</a:t>
-            </a:r>
-          </a:p>
-        </p:txBody>
-      </p:sp>
-      <p:sp>
-        <p:nvSpPr>
-          <p:cNvPr id="10" name="TextBox 9"/>
-          <p:cNvSpPr txBox="1"/>
-          <p:nvPr/>
-        </p:nvSpPr>
-        <p:spPr>
-          <a:xfrm>
-            <a:off x="5120640" y="1371600"/>
-            <a:ext cx="2468880" cy="320040"/>
-          </a:xfrm>
-          <a:prstGeom prst="rect">
-            <a:avLst/>
-          </a:prstGeom>
-          <a:noFill/>
-        </p:spPr>
-        <p:txBody>
-          <a:bodyPr wrap="square">
-            <a:spAutoFit/>
-          </a:bodyPr>
-          <a:lstStyle/>
-          <a:p>
-            <a:pPr algn="l">
-              <a:defRPr sz="1600" b="1">
-                <a:solidFill>
-                  <a:srgbClr val="8C876C"/>
-                </a:solidFill>
-                <a:latin typeface="Meiryo"/>
-              </a:defRPr>
-            </a:pPr>
-            <a:r>
-              <a:t>LINEで予約がラクラク</a:t>
-            </a:r>
-          </a:p>
-        </p:txBody>
-      </p:sp>
-      <p:sp>
-        <p:nvSpPr>
-          <p:cNvPr id="11" name="TextBox 10"/>
-          <p:cNvSpPr txBox="1"/>
-          <p:nvPr/>
-        </p:nvSpPr>
-        <p:spPr>
-          <a:xfrm>
-            <a:off x="4572000" y="1828800"/>
-            <a:ext cx="2926080" cy="1463040"/>
-          </a:xfrm>
-          <a:prstGeom prst="rect">
-            <a:avLst/>
-          </a:prstGeom>
-          <a:noFill/>
-        </p:spPr>
-        <p:txBody>
-          <a:bodyPr wrap="square">
-            <a:spAutoFit/>
-          </a:bodyPr>
-          <a:lstStyle/>
-          <a:p>
-            <a:pPr algn="l">
-              <a:defRPr sz="1200" b="0">
-                <a:solidFill>
-                  <a:srgbClr val="333333"/>
-                </a:solidFill>
-                <a:latin typeface="Meiryo"/>
-              </a:defRPr>
-            </a:pPr>
-            <a:r>
-              <a:t>お客様はLINEのトーク画面から予約完了。</a:t>
-            </a:r>
-            <a:br/>
-            <a:r>
-              <a:t>新しいアプリのインストールは一切不要です。</a:t>
-            </a:r>
-          </a:p>
-        </p:txBody>
-      </p:sp>
-      <p:sp>
-        <p:nvSpPr>
-          <p:cNvPr id="12" name="Rounded Rectangle 11"/>
-          <p:cNvSpPr/>
-          <p:nvPr/>
-        </p:nvSpPr>
-        <p:spPr>
-          <a:xfrm>
-            <a:off x="8138160" y="1188720"/>
-            <a:ext cx="3474720" cy="2286000"/>
-          </a:xfrm>
-          <a:prstGeom prst="roundRect">
-            <a:avLst/>
-          </a:prstGeom>
-          <a:solidFill>
-            <a:srgbClr val="FFFFFF"/>
-          </a:solidFill>
-          <a:ln>
-            <a:noFill/>
-          </a:ln>
-          <a:effectLst/>
-        </p:spPr>
-        <p:style>
-          <a:lnRef idx="1">
-            <a:schemeClr val="accent1"/>
-          </a:lnRef>
-          <a:fillRef idx="3">
-            <a:schemeClr val="accent1"/>
-          </a:fillRef>
-          <a:effectRef idx="2">
-            <a:schemeClr val="accent1"/>
-          </a:effectRef>
-          <a:fontRef idx="minor">
-            <a:schemeClr val="lt1"/>
-          </a:fontRef>
-        </p:style>
-        <p:txBody>
-          <a:bodyPr rtlCol="0" anchor="ctr"/>
-          <a:lstStyle/>
-          <a:p>
-            <a:pPr algn="ctr"/>
-          </a:p>
-        </p:txBody>
-      </p:sp>
-      <p:sp>
-        <p:nvSpPr>
-          <p:cNvPr id="13" name="TextBox 12"/>
-          <p:cNvSpPr txBox="1"/>
-          <p:nvPr/>
-        </p:nvSpPr>
-        <p:spPr>
-          <a:xfrm>
-            <a:off x="8321040" y="1325880"/>
-            <a:ext cx="640080" cy="640080"/>
-          </a:xfrm>
-          <a:prstGeom prst="rect">
-            <a:avLst/>
-          </a:prstGeom>
-          <a:noFill/>
-        </p:spPr>
-        <p:txBody>
-          <a:bodyPr wrap="square">
-            <a:spAutoFit/>
-          </a:bodyPr>
-          <a:lstStyle/>
-          <a:p>
-            <a:pPr algn="ctr">
-              <a:defRPr sz="3000" b="0">
-                <a:solidFill>
-                  <a:srgbClr val="333333"/>
-                </a:solidFill>
-                <a:latin typeface="Meiryo"/>
-              </a:defRPr>
-            </a:pPr>
-            <a:r>
-              <a:t>📈</a:t>
-            </a:r>
-          </a:p>
-        </p:txBody>
-      </p:sp>
-      <p:sp>
-        <p:nvSpPr>
-          <p:cNvPr id="14" name="TextBox 13"/>
-          <p:cNvSpPr txBox="1"/>
-          <p:nvPr/>
-        </p:nvSpPr>
-        <p:spPr>
-          <a:xfrm>
-            <a:off x="8961120" y="1371600"/>
-            <a:ext cx="2468880" cy="320040"/>
-          </a:xfrm>
-          <a:prstGeom prst="rect">
-            <a:avLst/>
-          </a:prstGeom>
-          <a:noFill/>
-        </p:spPr>
-        <p:txBody>
-          <a:bodyPr wrap="square">
-            <a:spAutoFit/>
-          </a:bodyPr>
-          <a:lstStyle/>
-          <a:p>
-            <a:pPr algn="l">
-              <a:defRPr sz="1600" b="1">
-                <a:solidFill>
-                  <a:srgbClr val="8C876C"/>
-                </a:solidFill>
-                <a:latin typeface="Meiryo"/>
-              </a:defRPr>
-            </a:pPr>
-            <a:r>
-              <a:t>売上アップに貢献</a:t>
-            </a:r>
-          </a:p>
-        </p:txBody>
-      </p:sp>
-      <p:sp>
-        <p:nvSpPr>
-          <p:cNvPr id="15" name="TextBox 14"/>
-          <p:cNvSpPr txBox="1"/>
-          <p:nvPr/>
-        </p:nvSpPr>
-        <p:spPr>
-          <a:xfrm>
-            <a:off x="8412480" y="1828800"/>
-            <a:ext cx="2926080" cy="1463040"/>
-          </a:xfrm>
-          <a:prstGeom prst="rect">
-            <a:avLst/>
-          </a:prstGeom>
-          <a:noFill/>
-        </p:spPr>
-        <p:txBody>
-          <a:bodyPr wrap="square">
-            <a:spAutoFit/>
-          </a:bodyPr>
-          <a:lstStyle/>
-          <a:p>
-            <a:pPr algn="l">
-              <a:defRPr sz="1200" b="0">
-                <a:solidFill>
-                  <a:srgbClr val="333333"/>
-                </a:solidFill>
-                <a:latin typeface="Meiryo"/>
-              </a:defRPr>
-            </a:pPr>
-            <a:r>
-              <a:t>QR注文で追加オーダー率UP。</a:t>
-            </a:r>
-            <a:br/>
-            <a:r>
-              <a:t>多言語対応でインバウンド客も取りこぼしません。</a:t>
-            </a:r>
-          </a:p>
-        </p:txBody>
-      </p:sp>
-      <p:sp>
-        <p:nvSpPr>
-          <p:cNvPr id="16" name="Rounded Rectangle 15"/>
-          <p:cNvSpPr/>
-          <p:nvPr/>
-        </p:nvSpPr>
-        <p:spPr>
-          <a:xfrm>
-            <a:off x="457200" y="3840480"/>
-            <a:ext cx="3474720" cy="2286000"/>
-          </a:xfrm>
-          <a:prstGeom prst="roundRect">
-            <a:avLst/>
-          </a:prstGeom>
-          <a:solidFill>
-            <a:srgbClr val="FFFFFF"/>
-          </a:solidFill>
-          <a:ln>
-            <a:noFill/>
-          </a:ln>
-          <a:effectLst/>
-        </p:spPr>
-        <p:style>
-          <a:lnRef idx="1">
-            <a:schemeClr val="accent1"/>
-          </a:lnRef>
-          <a:fillRef idx="3">
-            <a:schemeClr val="accent1"/>
-          </a:fillRef>
-          <a:effectRef idx="2">
-            <a:schemeClr val="accent1"/>
-          </a:effectRef>
-          <a:fontRef idx="minor">
-            <a:schemeClr val="lt1"/>
-          </a:fontRef>
-        </p:style>
-        <p:txBody>
-          <a:bodyPr rtlCol="0" anchor="ctr"/>
-          <a:lstStyle/>
-          <a:p>
-            <a:pPr algn="ctr"/>
-          </a:p>
-        </p:txBody>
-      </p:sp>
-      <p:sp>
-        <p:nvSpPr>
-          <p:cNvPr id="17" name="TextBox 16"/>
-          <p:cNvSpPr txBox="1"/>
-          <p:nvPr/>
-        </p:nvSpPr>
-        <p:spPr>
-          <a:xfrm>
-            <a:off x="640080" y="3977640"/>
-            <a:ext cx="640080" cy="640080"/>
-          </a:xfrm>
-          <a:prstGeom prst="rect">
-            <a:avLst/>
-          </a:prstGeom>
-          <a:noFill/>
-        </p:spPr>
-        <p:txBody>
-          <a:bodyPr wrap="square">
-            <a:spAutoFit/>
-          </a:bodyPr>
-          <a:lstStyle/>
-          <a:p>
-            <a:pPr algn="ctr">
-              <a:defRPr sz="3000" b="0">
-                <a:solidFill>
-                  <a:srgbClr val="333333"/>
-                </a:solidFill>
-                <a:latin typeface="Meiryo"/>
-              </a:defRPr>
-            </a:pPr>
-            <a:r>
-              <a:t>⏱</a:t>
-            </a:r>
-          </a:p>
-        </p:txBody>
-      </p:sp>
-      <p:sp>
-        <p:nvSpPr>
-          <p:cNvPr id="18" name="TextBox 17"/>
-          <p:cNvSpPr txBox="1"/>
-          <p:nvPr/>
-        </p:nvSpPr>
-        <p:spPr>
-          <a:xfrm>
-            <a:off x="1280160" y="4023360"/>
-            <a:ext cx="2468880" cy="320040"/>
-          </a:xfrm>
-          <a:prstGeom prst="rect">
-            <a:avLst/>
-          </a:prstGeom>
-          <a:noFill/>
-        </p:spPr>
-        <p:txBody>
-          <a:bodyPr wrap="square">
-            <a:spAutoFit/>
-          </a:bodyPr>
-          <a:lstStyle/>
-          <a:p>
-            <a:pPr algn="l">
-              <a:defRPr sz="1600" b="1">
-                <a:solidFill>
-                  <a:srgbClr val="8C876C"/>
-                </a:solidFill>
-                <a:latin typeface="Meiryo"/>
-              </a:defRPr>
-            </a:pPr>
-            <a:r>
-              <a:t>業務時間を大幅削減</a:t>
-            </a:r>
-          </a:p>
-        </p:txBody>
-      </p:sp>
-      <p:sp>
-        <p:nvSpPr>
-          <p:cNvPr id="19" name="TextBox 18"/>
-          <p:cNvSpPr txBox="1"/>
-          <p:nvPr/>
-        </p:nvSpPr>
-        <p:spPr>
-          <a:xfrm>
-            <a:off x="731520" y="4480560"/>
-            <a:ext cx="2926080" cy="1463040"/>
-          </a:xfrm>
-          <a:prstGeom prst="rect">
-            <a:avLst/>
-          </a:prstGeom>
-          <a:noFill/>
-        </p:spPr>
-        <p:txBody>
-          <a:bodyPr wrap="square">
-            <a:spAutoFit/>
-          </a:bodyPr>
-          <a:lstStyle/>
-          <a:p>
-            <a:pPr algn="l">
-              <a:defRPr sz="1200" b="0">
-                <a:solidFill>
-                  <a:srgbClr val="333333"/>
-                </a:solidFill>
-                <a:latin typeface="Meiryo"/>
-              </a:defRPr>
-            </a:pPr>
-            <a:r>
-              <a:t>予約受付・注文・シフト管理・給与計算を自動化。</a:t>
-            </a:r>
-            <a:br/>
-            <a:r>
-              <a:t>スタッフが接客に集中できる環境を作ります。</a:t>
-            </a:r>
-          </a:p>
-        </p:txBody>
-      </p:sp>
-      <p:sp>
-        <p:nvSpPr>
-          <p:cNvPr id="20" name="Rounded Rectangle 19"/>
-          <p:cNvSpPr/>
-          <p:nvPr/>
-        </p:nvSpPr>
-        <p:spPr>
-          <a:xfrm>
-            <a:off x="4297680" y="3840480"/>
-            <a:ext cx="3474720" cy="2286000"/>
-          </a:xfrm>
-          <a:prstGeom prst="roundRect">
-            <a:avLst/>
-          </a:prstGeom>
-          <a:solidFill>
-            <a:srgbClr val="FFFFFF"/>
-          </a:solidFill>
-          <a:ln>
-            <a:noFill/>
-          </a:ln>
-          <a:effectLst/>
-        </p:spPr>
-        <p:style>
-          <a:lnRef idx="1">
-            <a:schemeClr val="accent1"/>
-          </a:lnRef>
-          <a:fillRef idx="3">
-            <a:schemeClr val="accent1"/>
-          </a:fillRef>
-          <a:effectRef idx="2">
-            <a:schemeClr val="accent1"/>
-          </a:effectRef>
-          <a:fontRef idx="minor">
-            <a:schemeClr val="lt1"/>
-          </a:fontRef>
-        </p:style>
-        <p:txBody>
-          <a:bodyPr rtlCol="0" anchor="ctr"/>
-          <a:lstStyle/>
-          <a:p>
-            <a:pPr algn="ctr"/>
-          </a:p>
-        </p:txBody>
-      </p:sp>
-      <p:sp>
-        <p:nvSpPr>
-          <p:cNvPr id="21" name="TextBox 20"/>
-          <p:cNvSpPr txBox="1"/>
-          <p:nvPr/>
-        </p:nvSpPr>
-        <p:spPr>
-          <a:xfrm>
-            <a:off x="4480560" y="3977640"/>
-            <a:ext cx="640080" cy="640080"/>
-          </a:xfrm>
-          <a:prstGeom prst="rect">
-            <a:avLst/>
-          </a:prstGeom>
-          <a:noFill/>
-        </p:spPr>
-        <p:txBody>
-          <a:bodyPr wrap="square">
-            <a:spAutoFit/>
-          </a:bodyPr>
-          <a:lstStyle/>
-          <a:p>
-            <a:pPr algn="ctr">
-              <a:defRPr sz="3000" b="0">
-                <a:solidFill>
-                  <a:srgbClr val="333333"/>
-                </a:solidFill>
-                <a:latin typeface="Meiryo"/>
-              </a:defRPr>
-            </a:pPr>
-            <a:r>
-              <a:t>💰</a:t>
-            </a:r>
-          </a:p>
-        </p:txBody>
-      </p:sp>
-      <p:sp>
-        <p:nvSpPr>
-          <p:cNvPr id="22" name="TextBox 21"/>
-          <p:cNvSpPr txBox="1"/>
-          <p:nvPr/>
-        </p:nvSpPr>
-        <p:spPr>
-          <a:xfrm>
-            <a:off x="5120640" y="4023360"/>
-            <a:ext cx="2468880" cy="320040"/>
-          </a:xfrm>
-          <a:prstGeom prst="rect">
-            <a:avLst/>
-          </a:prstGeom>
-          <a:noFill/>
-        </p:spPr>
-        <p:txBody>
-          <a:bodyPr wrap="square">
-            <a:spAutoFit/>
-          </a:bodyPr>
-          <a:lstStyle/>
-          <a:p>
-            <a:pPr algn="l">
-              <a:defRPr sz="1600" b="1">
-                <a:solidFill>
-                  <a:srgbClr val="8C876C"/>
-                </a:solidFill>
-                <a:latin typeface="Meiryo"/>
-              </a:defRPr>
-            </a:pPr>
-            <a:r>
-              <a:t>コスト削減</a:t>
-            </a:r>
-          </a:p>
-        </p:txBody>
-      </p:sp>
-      <p:sp>
-        <p:nvSpPr>
-          <p:cNvPr id="23" name="TextBox 22"/>
-          <p:cNvSpPr txBox="1"/>
-          <p:nvPr/>
-        </p:nvSpPr>
-        <p:spPr>
-          <a:xfrm>
-            <a:off x="4572000" y="4480560"/>
-            <a:ext cx="2926080" cy="1463040"/>
-          </a:xfrm>
-          <a:prstGeom prst="rect">
-            <a:avLst/>
-          </a:prstGeom>
-          <a:noFill/>
-        </p:spPr>
-        <p:txBody>
-          <a:bodyPr wrap="square">
-            <a:spAutoFit/>
-          </a:bodyPr>
-          <a:lstStyle/>
-          <a:p>
-            <a:pPr algn="l">
-              <a:defRPr sz="1200" b="0">
-                <a:solidFill>
-                  <a:srgbClr val="333333"/>
-                </a:solidFill>
-                <a:latin typeface="Meiryo"/>
-              </a:defRPr>
-            </a:pPr>
-            <a:r>
-              <a:t>予約台帳・注文伝票・タイムカード…</a:t>
-            </a:r>
-            <a:br/>
-            <a:r>
-              <a:t>紙のコストと手間をゼロにします。</a:t>
-            </a:r>
-          </a:p>
-        </p:txBody>
-      </p:sp>
-      <p:sp>
-        <p:nvSpPr>
-          <p:cNvPr id="24" name="Rounded Rectangle 23"/>
-          <p:cNvSpPr/>
-          <p:nvPr/>
-        </p:nvSpPr>
-        <p:spPr>
-          <a:xfrm>
-            <a:off x="8138160" y="3840480"/>
-            <a:ext cx="3474720" cy="2286000"/>
-          </a:xfrm>
-          <a:prstGeom prst="roundRect">
-            <a:avLst/>
-          </a:prstGeom>
-          <a:solidFill>
-            <a:srgbClr val="FFFFFF"/>
-          </a:solidFill>
-          <a:ln>
-            <a:noFill/>
-          </a:ln>
-          <a:effectLst/>
-        </p:spPr>
-        <p:style>
-          <a:lnRef idx="1">
-            <a:schemeClr val="accent1"/>
-          </a:lnRef>
-          <a:fillRef idx="3">
-            <a:schemeClr val="accent1"/>
-          </a:fillRef>
-          <a:effectRef idx="2">
-            <a:schemeClr val="accent1"/>
-          </a:effectRef>
-          <a:fontRef idx="minor">
-            <a:schemeClr val="lt1"/>
-          </a:fontRef>
-        </p:style>
-        <p:txBody>
-          <a:bodyPr rtlCol="0" anchor="ctr"/>
-          <a:lstStyle/>
-          <a:p>
-            <a:pPr algn="ctr"/>
-          </a:p>
-        </p:txBody>
-      </p:sp>
-      <p:sp>
-        <p:nvSpPr>
-          <p:cNvPr id="25" name="TextBox 24"/>
-          <p:cNvSpPr txBox="1"/>
-          <p:nvPr/>
-        </p:nvSpPr>
-        <p:spPr>
-          <a:xfrm>
-            <a:off x="8321040" y="3977640"/>
-            <a:ext cx="640080" cy="640080"/>
-          </a:xfrm>
-          <a:prstGeom prst="rect">
-            <a:avLst/>
-          </a:prstGeom>
-          <a:noFill/>
-        </p:spPr>
-        <p:txBody>
-          <a:bodyPr wrap="square">
-            <a:spAutoFit/>
-          </a:bodyPr>
-          <a:lstStyle/>
-          <a:p>
-            <a:pPr algn="ctr">
-              <a:defRPr sz="3000" b="0">
-                <a:solidFill>
-                  <a:srgbClr val="333333"/>
-                </a:solidFill>
-                <a:latin typeface="Meiryo"/>
-              </a:defRPr>
-            </a:pPr>
-            <a:r>
-              <a:t>📊</a:t>
-            </a:r>
-          </a:p>
-        </p:txBody>
-      </p:sp>
-      <p:sp>
-        <p:nvSpPr>
-          <p:cNvPr id="26" name="TextBox 25"/>
-          <p:cNvSpPr txBox="1"/>
-          <p:nvPr/>
-        </p:nvSpPr>
-        <p:spPr>
-          <a:xfrm>
-            <a:off x="8961120" y="4023360"/>
-            <a:ext cx="2468880" cy="320040"/>
-          </a:xfrm>
-          <a:prstGeom prst="rect">
-            <a:avLst/>
-          </a:prstGeom>
-          <a:noFill/>
-        </p:spPr>
-        <p:txBody>
-          <a:bodyPr wrap="square">
-            <a:spAutoFit/>
-          </a:bodyPr>
-          <a:lstStyle/>
-          <a:p>
-            <a:pPr algn="l">
-              <a:defRPr sz="1600" b="1">
-                <a:solidFill>
-                  <a:srgbClr val="8C876C"/>
-                </a:solidFill>
-                <a:latin typeface="Meiryo"/>
-              </a:defRPr>
-            </a:pPr>
-            <a:r>
-              <a:t>データで経営判断</a:t>
-            </a:r>
-          </a:p>
-        </p:txBody>
-      </p:sp>
-      <p:sp>
-        <p:nvSpPr>
-          <p:cNvPr id="27" name="TextBox 26"/>
-          <p:cNvSpPr txBox="1"/>
-          <p:nvPr/>
-        </p:nvSpPr>
-        <p:spPr>
-          <a:xfrm>
-            <a:off x="8412480" y="4480560"/>
-            <a:ext cx="2926080" cy="1463040"/>
-          </a:xfrm>
-          <a:prstGeom prst="rect">
-            <a:avLst/>
-          </a:prstGeom>
-          <a:noFill/>
-        </p:spPr>
-        <p:txBody>
-          <a:bodyPr wrap="square">
-            <a:spAutoFit/>
-          </a:bodyPr>
-          <a:lstStyle/>
-          <a:p>
-            <a:pPr algn="l">
-              <a:defRPr sz="1200" b="0">
-                <a:solidFill>
-                  <a:srgbClr val="333333"/>
-                </a:solidFill>
-                <a:latin typeface="Meiryo"/>
-              </a:defRPr>
-            </a:pPr>
-            <a:r>
-              <a:t>売上・予約・スタッフ実績をダッシュボードで可視化。</a:t>
-            </a:r>
-            <a:br/>
-            <a:r>
-              <a:t>データに基づいた意思決定をサポートします。</a:t>
+            <a:pPr>
+              <a:spcAft>
+                <a:spcPts val="600"/>
+              </a:spcAft>
+              <a:defRPr sz="1200">
+                <a:solidFill>
+                  <a:srgbClr val="333333"/>
+                </a:solidFill>
+                <a:latin typeface="Meiryo"/>
+              </a:defRPr>
+            </a:pPr>
+            <a:r>
+              <a:t>  ✓  NPS（顧客推奨度）を自動集計・トレンド表示</a:t>
+            </a:r>
+          </a:p>
+          <a:p>
+            <a:pPr>
+              <a:spcAft>
+                <a:spcPts val="600"/>
+              </a:spcAft>
+              <a:defRPr sz="1200">
+                <a:solidFill>
+                  <a:srgbClr val="333333"/>
+                </a:solidFill>
+                <a:latin typeface="Meiryo"/>
+              </a:defRPr>
+            </a:pPr>
+            <a:r>
+              <a:t>  ✓  Promoter / Passive / Detractor を色分け表示</a:t>
+            </a:r>
+          </a:p>
+          <a:p>
+            <a:pPr>
+              <a:spcAft>
+                <a:spcPts val="600"/>
+              </a:spcAft>
+              <a:defRPr sz="1200">
+                <a:solidFill>
+                  <a:srgbClr val="333333"/>
+                </a:solidFill>
+                <a:latin typeface="Meiryo"/>
+              </a:defRPr>
+            </a:pPr>
+            <a:r>
+              <a:t>  ✓  コメント付きフィードバックで具体的な改善点を把握</a:t>
+            </a:r>
+          </a:p>
+          <a:p>
+            <a:pPr>
+              <a:spcAft>
+                <a:spcPts val="600"/>
+              </a:spcAft>
+              <a:defRPr sz="1200">
+                <a:solidFill>
+                  <a:srgbClr val="333333"/>
+                </a:solidFill>
+                <a:latin typeface="Meiryo"/>
+              </a:defRPr>
+            </a:pPr>
+            <a:r>
+              <a:t>  ✓  注文データと紐付けてサービス品質を分析</a:t>
+            </a:r>
+          </a:p>
+          <a:p>
+            <a:pPr>
+              <a:spcAft>
+                <a:spcPts val="600"/>
+              </a:spcAft>
+              <a:defRPr sz="1200">
+                <a:solidFill>
+                  <a:srgbClr val="333333"/>
+                </a:solidFill>
+                <a:latin typeface="Meiryo"/>
+              </a:defRPr>
+            </a:pPr>
+            <a:r>
+              <a:t>  ✓  月別・スタッフ別の満足度推移を可視化</a:t>
             </a:r>
           </a:p>
         </p:txBody>
@@ -8613,7 +7887,7 @@
           <a:lstStyle/>
           <a:p>
             <a:pPr algn="l">
-              <a:defRPr sz="3200" b="1">
+              <a:defRPr sz="2800" b="1">
                 <a:solidFill>
                   <a:srgbClr val="8C876C"/>
                 </a:solidFill>
@@ -8621,7 +7895,7 @@
               </a:defRPr>
             </a:pPr>
             <a:r>
-              <a:t>ご利用開始までの流れ</a:t>
+              <a:t>管理画面 — 出退勤ボード</a:t>
             </a:r>
           </a:p>
         </p:txBody>
@@ -8672,803 +7946,14 @@
       </p:sp>
       <p:sp>
         <p:nvSpPr>
-          <p:cNvPr id="4" name="Oval 3"/>
+          <p:cNvPr id="4" name="Rounded Rectangle 3"/>
           <p:cNvSpPr/>
           <p:nvPr/>
         </p:nvSpPr>
         <p:spPr>
           <a:xfrm>
-            <a:off x="960120" y="1463040"/>
-            <a:ext cx="1005840" cy="1005840"/>
-          </a:xfrm>
-          <a:prstGeom prst="ellipse">
-            <a:avLst/>
-          </a:prstGeom>
-          <a:solidFill>
-            <a:srgbClr val="8C876C"/>
-          </a:solidFill>
-          <a:ln>
-            <a:noFill/>
-          </a:ln>
-        </p:spPr>
-        <p:style>
-          <a:lnRef idx="1">
-            <a:schemeClr val="accent1"/>
-          </a:lnRef>
-          <a:fillRef idx="3">
-            <a:schemeClr val="accent1"/>
-          </a:fillRef>
-          <a:effectRef idx="2">
-            <a:schemeClr val="accent1"/>
-          </a:effectRef>
-          <a:fontRef idx="minor">
-            <a:schemeClr val="lt1"/>
-          </a:fontRef>
-        </p:style>
-        <p:txBody>
-          <a:bodyPr rtlCol="0" anchor="ctr" wrap="square"/>
-          <a:lstStyle/>
-          <a:p>
-            <a:pPr algn="ctr">
-              <a:defRPr sz="1400" b="1">
-                <a:solidFill>
-                  <a:srgbClr val="FFFFFF"/>
-                </a:solidFill>
-                <a:latin typeface="Meiryo"/>
-              </a:defRPr>
-            </a:pPr>
-            <a:r>
-              <a:t>STEP 1</a:t>
-            </a:r>
-          </a:p>
-        </p:txBody>
-      </p:sp>
-      <p:sp>
-        <p:nvSpPr>
-          <p:cNvPr id="5" name="TextBox 4"/>
-          <p:cNvSpPr txBox="1"/>
-          <p:nvPr/>
-        </p:nvSpPr>
-        <p:spPr>
-          <a:xfrm>
-            <a:off x="2103120" y="1645920"/>
-            <a:ext cx="548640" cy="548640"/>
-          </a:xfrm>
-          <a:prstGeom prst="rect">
-            <a:avLst/>
-          </a:prstGeom>
-          <a:noFill/>
-        </p:spPr>
-        <p:txBody>
-          <a:bodyPr wrap="square">
-            <a:spAutoFit/>
-          </a:bodyPr>
-          <a:lstStyle/>
-          <a:p>
-            <a:pPr algn="ctr">
-              <a:defRPr sz="2800" b="0">
-                <a:solidFill>
-                  <a:srgbClr val="8C876C"/>
-                </a:solidFill>
-                <a:latin typeface="Meiryo"/>
-              </a:defRPr>
-            </a:pPr>
-            <a:r>
-              <a:t>→</a:t>
-            </a:r>
-          </a:p>
-        </p:txBody>
-      </p:sp>
-      <p:sp>
-        <p:nvSpPr>
-          <p:cNvPr id="6" name="TextBox 5"/>
-          <p:cNvSpPr txBox="1"/>
-          <p:nvPr/>
-        </p:nvSpPr>
-        <p:spPr>
-          <a:xfrm>
-            <a:off x="457200" y="2651760"/>
-            <a:ext cx="2011680" cy="365760"/>
-          </a:xfrm>
-          <a:prstGeom prst="rect">
-            <a:avLst/>
-          </a:prstGeom>
-          <a:noFill/>
-        </p:spPr>
-        <p:txBody>
-          <a:bodyPr wrap="square">
-            <a:spAutoFit/>
-          </a:bodyPr>
-          <a:lstStyle/>
-          <a:p>
-            <a:pPr algn="ctr">
-              <a:defRPr sz="1600" b="1">
-                <a:solidFill>
-                  <a:srgbClr val="333333"/>
-                </a:solidFill>
-                <a:latin typeface="Meiryo"/>
-              </a:defRPr>
-            </a:pPr>
-            <a:r>
-              <a:t>お問い合わせ</a:t>
-            </a:r>
-          </a:p>
-        </p:txBody>
-      </p:sp>
-      <p:sp>
-        <p:nvSpPr>
-          <p:cNvPr id="7" name="TextBox 6"/>
-          <p:cNvSpPr txBox="1"/>
-          <p:nvPr/>
-        </p:nvSpPr>
-        <p:spPr>
-          <a:xfrm>
-            <a:off x="457200" y="3108960"/>
-            <a:ext cx="2011680" cy="1097280"/>
-          </a:xfrm>
-          <a:prstGeom prst="rect">
-            <a:avLst/>
-          </a:prstGeom>
-          <a:noFill/>
-        </p:spPr>
-        <p:txBody>
-          <a:bodyPr wrap="square">
-            <a:spAutoFit/>
-          </a:bodyPr>
-          <a:lstStyle/>
-          <a:p>
-            <a:pPr algn="ctr">
-              <a:defRPr sz="1200" b="0">
-                <a:solidFill>
-                  <a:srgbClr val="999999"/>
-                </a:solidFill>
-                <a:latin typeface="Meiryo"/>
-              </a:defRPr>
-            </a:pPr>
-            <a:r>
-              <a:t>お電話またはフォームから</a:t>
-            </a:r>
-            <a:br/>
-            <a:r>
-              <a:t>お気軽にご連絡ください</a:t>
-            </a:r>
-          </a:p>
-        </p:txBody>
-      </p:sp>
-      <p:sp>
-        <p:nvSpPr>
-          <p:cNvPr id="8" name="Oval 7"/>
-          <p:cNvSpPr/>
-          <p:nvPr/>
-        </p:nvSpPr>
-        <p:spPr>
-          <a:xfrm>
-            <a:off x="3246120" y="1463040"/>
-            <a:ext cx="1005840" cy="1005840"/>
-          </a:xfrm>
-          <a:prstGeom prst="ellipse">
-            <a:avLst/>
-          </a:prstGeom>
-          <a:solidFill>
-            <a:srgbClr val="8C876C"/>
-          </a:solidFill>
-          <a:ln>
-            <a:noFill/>
-          </a:ln>
-        </p:spPr>
-        <p:style>
-          <a:lnRef idx="1">
-            <a:schemeClr val="accent1"/>
-          </a:lnRef>
-          <a:fillRef idx="3">
-            <a:schemeClr val="accent1"/>
-          </a:fillRef>
-          <a:effectRef idx="2">
-            <a:schemeClr val="accent1"/>
-          </a:effectRef>
-          <a:fontRef idx="minor">
-            <a:schemeClr val="lt1"/>
-          </a:fontRef>
-        </p:style>
-        <p:txBody>
-          <a:bodyPr rtlCol="0" anchor="ctr" wrap="square"/>
-          <a:lstStyle/>
-          <a:p>
-            <a:pPr algn="ctr">
-              <a:defRPr sz="1400" b="1">
-                <a:solidFill>
-                  <a:srgbClr val="FFFFFF"/>
-                </a:solidFill>
-                <a:latin typeface="Meiryo"/>
-              </a:defRPr>
-            </a:pPr>
-            <a:r>
-              <a:t>STEP 2</a:t>
-            </a:r>
-          </a:p>
-        </p:txBody>
-      </p:sp>
-      <p:sp>
-        <p:nvSpPr>
-          <p:cNvPr id="9" name="TextBox 8"/>
-          <p:cNvSpPr txBox="1"/>
-          <p:nvPr/>
-        </p:nvSpPr>
-        <p:spPr>
-          <a:xfrm>
-            <a:off x="4389120" y="1645920"/>
-            <a:ext cx="548640" cy="548640"/>
-          </a:xfrm>
-          <a:prstGeom prst="rect">
-            <a:avLst/>
-          </a:prstGeom>
-          <a:noFill/>
-        </p:spPr>
-        <p:txBody>
-          <a:bodyPr wrap="square">
-            <a:spAutoFit/>
-          </a:bodyPr>
-          <a:lstStyle/>
-          <a:p>
-            <a:pPr algn="ctr">
-              <a:defRPr sz="2800" b="0">
-                <a:solidFill>
-                  <a:srgbClr val="8C876C"/>
-                </a:solidFill>
-                <a:latin typeface="Meiryo"/>
-              </a:defRPr>
-            </a:pPr>
-            <a:r>
-              <a:t>→</a:t>
-            </a:r>
-          </a:p>
-        </p:txBody>
-      </p:sp>
-      <p:sp>
-        <p:nvSpPr>
-          <p:cNvPr id="10" name="TextBox 9"/>
-          <p:cNvSpPr txBox="1"/>
-          <p:nvPr/>
-        </p:nvSpPr>
-        <p:spPr>
-          <a:xfrm>
-            <a:off x="2743200" y="2651760"/>
-            <a:ext cx="2011680" cy="365760"/>
-          </a:xfrm>
-          <a:prstGeom prst="rect">
-            <a:avLst/>
-          </a:prstGeom>
-          <a:noFill/>
-        </p:spPr>
-        <p:txBody>
-          <a:bodyPr wrap="square">
-            <a:spAutoFit/>
-          </a:bodyPr>
-          <a:lstStyle/>
-          <a:p>
-            <a:pPr algn="ctr">
-              <a:defRPr sz="1600" b="1">
-                <a:solidFill>
-                  <a:srgbClr val="333333"/>
-                </a:solidFill>
-                <a:latin typeface="Meiryo"/>
-              </a:defRPr>
-            </a:pPr>
-            <a:r>
-              <a:t>ヒアリング</a:t>
-            </a:r>
-          </a:p>
-        </p:txBody>
-      </p:sp>
-      <p:sp>
-        <p:nvSpPr>
-          <p:cNvPr id="11" name="TextBox 10"/>
-          <p:cNvSpPr txBox="1"/>
-          <p:nvPr/>
-        </p:nvSpPr>
-        <p:spPr>
-          <a:xfrm>
-            <a:off x="2743200" y="3108960"/>
-            <a:ext cx="2011680" cy="1097280"/>
-          </a:xfrm>
-          <a:prstGeom prst="rect">
-            <a:avLst/>
-          </a:prstGeom>
-          <a:noFill/>
-        </p:spPr>
-        <p:txBody>
-          <a:bodyPr wrap="square">
-            <a:spAutoFit/>
-          </a:bodyPr>
-          <a:lstStyle/>
-          <a:p>
-            <a:pPr algn="ctr">
-              <a:defRPr sz="1200" b="0">
-                <a:solidFill>
-                  <a:srgbClr val="999999"/>
-                </a:solidFill>
-                <a:latin typeface="Meiryo"/>
-              </a:defRPr>
-            </a:pPr>
-            <a:r>
-              <a:t>現在の業務フローや</a:t>
-            </a:r>
-            <a:br/>
-            <a:r>
-              <a:t>課題をお伺いします</a:t>
-            </a:r>
-          </a:p>
-        </p:txBody>
-      </p:sp>
-      <p:sp>
-        <p:nvSpPr>
-          <p:cNvPr id="12" name="Oval 11"/>
-          <p:cNvSpPr/>
-          <p:nvPr/>
-        </p:nvSpPr>
-        <p:spPr>
-          <a:xfrm>
-            <a:off x="5532120" y="1463040"/>
-            <a:ext cx="1005840" cy="1005840"/>
-          </a:xfrm>
-          <a:prstGeom prst="ellipse">
-            <a:avLst/>
-          </a:prstGeom>
-          <a:solidFill>
-            <a:srgbClr val="8C876C"/>
-          </a:solidFill>
-          <a:ln>
-            <a:noFill/>
-          </a:ln>
-        </p:spPr>
-        <p:style>
-          <a:lnRef idx="1">
-            <a:schemeClr val="accent1"/>
-          </a:lnRef>
-          <a:fillRef idx="3">
-            <a:schemeClr val="accent1"/>
-          </a:fillRef>
-          <a:effectRef idx="2">
-            <a:schemeClr val="accent1"/>
-          </a:effectRef>
-          <a:fontRef idx="minor">
-            <a:schemeClr val="lt1"/>
-          </a:fontRef>
-        </p:style>
-        <p:txBody>
-          <a:bodyPr rtlCol="0" anchor="ctr" wrap="square"/>
-          <a:lstStyle/>
-          <a:p>
-            <a:pPr algn="ctr">
-              <a:defRPr sz="1400" b="1">
-                <a:solidFill>
-                  <a:srgbClr val="FFFFFF"/>
-                </a:solidFill>
-                <a:latin typeface="Meiryo"/>
-              </a:defRPr>
-            </a:pPr>
-            <a:r>
-              <a:t>STEP 3</a:t>
-            </a:r>
-          </a:p>
-        </p:txBody>
-      </p:sp>
-      <p:sp>
-        <p:nvSpPr>
-          <p:cNvPr id="13" name="TextBox 12"/>
-          <p:cNvSpPr txBox="1"/>
-          <p:nvPr/>
-        </p:nvSpPr>
-        <p:spPr>
-          <a:xfrm>
-            <a:off x="6675120" y="1645920"/>
-            <a:ext cx="548640" cy="548640"/>
-          </a:xfrm>
-          <a:prstGeom prst="rect">
-            <a:avLst/>
-          </a:prstGeom>
-          <a:noFill/>
-        </p:spPr>
-        <p:txBody>
-          <a:bodyPr wrap="square">
-            <a:spAutoFit/>
-          </a:bodyPr>
-          <a:lstStyle/>
-          <a:p>
-            <a:pPr algn="ctr">
-              <a:defRPr sz="2800" b="0">
-                <a:solidFill>
-                  <a:srgbClr val="8C876C"/>
-                </a:solidFill>
-                <a:latin typeface="Meiryo"/>
-              </a:defRPr>
-            </a:pPr>
-            <a:r>
-              <a:t>→</a:t>
-            </a:r>
-          </a:p>
-        </p:txBody>
-      </p:sp>
-      <p:sp>
-        <p:nvSpPr>
-          <p:cNvPr id="14" name="TextBox 13"/>
-          <p:cNvSpPr txBox="1"/>
-          <p:nvPr/>
-        </p:nvSpPr>
-        <p:spPr>
-          <a:xfrm>
-            <a:off x="5029200" y="2651760"/>
-            <a:ext cx="2011680" cy="365760"/>
-          </a:xfrm>
-          <a:prstGeom prst="rect">
-            <a:avLst/>
-          </a:prstGeom>
-          <a:noFill/>
-        </p:spPr>
-        <p:txBody>
-          <a:bodyPr wrap="square">
-            <a:spAutoFit/>
-          </a:bodyPr>
-          <a:lstStyle/>
-          <a:p>
-            <a:pPr algn="ctr">
-              <a:defRPr sz="1600" b="1">
-                <a:solidFill>
-                  <a:srgbClr val="333333"/>
-                </a:solidFill>
-                <a:latin typeface="Meiryo"/>
-              </a:defRPr>
-            </a:pPr>
-            <a:r>
-              <a:t>デモ・お見積り</a:t>
-            </a:r>
-          </a:p>
-        </p:txBody>
-      </p:sp>
-      <p:sp>
-        <p:nvSpPr>
-          <p:cNvPr id="15" name="TextBox 14"/>
-          <p:cNvSpPr txBox="1"/>
-          <p:nvPr/>
-        </p:nvSpPr>
-        <p:spPr>
-          <a:xfrm>
-            <a:off x="5029200" y="3108960"/>
-            <a:ext cx="2011680" cy="1097280"/>
-          </a:xfrm>
-          <a:prstGeom prst="rect">
-            <a:avLst/>
-          </a:prstGeom>
-          <a:noFill/>
-        </p:spPr>
-        <p:txBody>
-          <a:bodyPr wrap="square">
-            <a:spAutoFit/>
-          </a:bodyPr>
-          <a:lstStyle/>
-          <a:p>
-            <a:pPr algn="ctr">
-              <a:defRPr sz="1200" b="0">
-                <a:solidFill>
-                  <a:srgbClr val="999999"/>
-                </a:solidFill>
-                <a:latin typeface="Meiryo"/>
-              </a:defRPr>
-            </a:pPr>
-            <a:r>
-              <a:t>実際の画面をお見せしながら</a:t>
-            </a:r>
-            <a:br/>
-            <a:r>
-              <a:t>最適なプランをご提案</a:t>
-            </a:r>
-          </a:p>
-        </p:txBody>
-      </p:sp>
-      <p:sp>
-        <p:nvSpPr>
-          <p:cNvPr id="16" name="Oval 15"/>
-          <p:cNvSpPr/>
-          <p:nvPr/>
-        </p:nvSpPr>
-        <p:spPr>
-          <a:xfrm>
-            <a:off x="7818120" y="1463040"/>
-            <a:ext cx="1005840" cy="1005840"/>
-          </a:xfrm>
-          <a:prstGeom prst="ellipse">
-            <a:avLst/>
-          </a:prstGeom>
-          <a:solidFill>
-            <a:srgbClr val="8C876C"/>
-          </a:solidFill>
-          <a:ln>
-            <a:noFill/>
-          </a:ln>
-        </p:spPr>
-        <p:style>
-          <a:lnRef idx="1">
-            <a:schemeClr val="accent1"/>
-          </a:lnRef>
-          <a:fillRef idx="3">
-            <a:schemeClr val="accent1"/>
-          </a:fillRef>
-          <a:effectRef idx="2">
-            <a:schemeClr val="accent1"/>
-          </a:effectRef>
-          <a:fontRef idx="minor">
-            <a:schemeClr val="lt1"/>
-          </a:fontRef>
-        </p:style>
-        <p:txBody>
-          <a:bodyPr rtlCol="0" anchor="ctr" wrap="square"/>
-          <a:lstStyle/>
-          <a:p>
-            <a:pPr algn="ctr">
-              <a:defRPr sz="1400" b="1">
-                <a:solidFill>
-                  <a:srgbClr val="FFFFFF"/>
-                </a:solidFill>
-                <a:latin typeface="Meiryo"/>
-              </a:defRPr>
-            </a:pPr>
-            <a:r>
-              <a:t>STEP 4</a:t>
-            </a:r>
-          </a:p>
-        </p:txBody>
-      </p:sp>
-      <p:sp>
-        <p:nvSpPr>
-          <p:cNvPr id="17" name="TextBox 16"/>
-          <p:cNvSpPr txBox="1"/>
-          <p:nvPr/>
-        </p:nvSpPr>
-        <p:spPr>
-          <a:xfrm>
-            <a:off x="8961120" y="1645920"/>
-            <a:ext cx="548640" cy="548640"/>
-          </a:xfrm>
-          <a:prstGeom prst="rect">
-            <a:avLst/>
-          </a:prstGeom>
-          <a:noFill/>
-        </p:spPr>
-        <p:txBody>
-          <a:bodyPr wrap="square">
-            <a:spAutoFit/>
-          </a:bodyPr>
-          <a:lstStyle/>
-          <a:p>
-            <a:pPr algn="ctr">
-              <a:defRPr sz="2800" b="0">
-                <a:solidFill>
-                  <a:srgbClr val="8C876C"/>
-                </a:solidFill>
-                <a:latin typeface="Meiryo"/>
-              </a:defRPr>
-            </a:pPr>
-            <a:r>
-              <a:t>→</a:t>
-            </a:r>
-          </a:p>
-        </p:txBody>
-      </p:sp>
-      <p:sp>
-        <p:nvSpPr>
-          <p:cNvPr id="18" name="TextBox 17"/>
-          <p:cNvSpPr txBox="1"/>
-          <p:nvPr/>
-        </p:nvSpPr>
-        <p:spPr>
-          <a:xfrm>
-            <a:off x="7315200" y="2651760"/>
-            <a:ext cx="2011680" cy="365760"/>
-          </a:xfrm>
-          <a:prstGeom prst="rect">
-            <a:avLst/>
-          </a:prstGeom>
-          <a:noFill/>
-        </p:spPr>
-        <p:txBody>
-          <a:bodyPr wrap="square">
-            <a:spAutoFit/>
-          </a:bodyPr>
-          <a:lstStyle/>
-          <a:p>
-            <a:pPr algn="ctr">
-              <a:defRPr sz="1600" b="1">
-                <a:solidFill>
-                  <a:srgbClr val="333333"/>
-                </a:solidFill>
-                <a:latin typeface="Meiryo"/>
-              </a:defRPr>
-            </a:pPr>
-            <a:r>
-              <a:t>アカウント発行</a:t>
-            </a:r>
-          </a:p>
-        </p:txBody>
-      </p:sp>
-      <p:sp>
-        <p:nvSpPr>
-          <p:cNvPr id="19" name="TextBox 18"/>
-          <p:cNvSpPr txBox="1"/>
-          <p:nvPr/>
-        </p:nvSpPr>
-        <p:spPr>
-          <a:xfrm>
-            <a:off x="7315200" y="3108960"/>
-            <a:ext cx="2011680" cy="1097280"/>
-          </a:xfrm>
-          <a:prstGeom prst="rect">
-            <a:avLst/>
-          </a:prstGeom>
-          <a:noFill/>
-        </p:spPr>
-        <p:txBody>
-          <a:bodyPr wrap="square">
-            <a:spAutoFit/>
-          </a:bodyPr>
-          <a:lstStyle/>
-          <a:p>
-            <a:pPr algn="ctr">
-              <a:defRPr sz="1200" b="0">
-                <a:solidFill>
-                  <a:srgbClr val="999999"/>
-                </a:solidFill>
-                <a:latin typeface="Meiryo"/>
-              </a:defRPr>
-            </a:pPr>
-            <a:r>
-              <a:t>店舗情報・スタッフを登録</a:t>
-            </a:r>
-            <a:br/>
-            <a:r>
-              <a:t>初期設定をサポート</a:t>
-            </a:r>
-          </a:p>
-        </p:txBody>
-      </p:sp>
-      <p:sp>
-        <p:nvSpPr>
-          <p:cNvPr id="20" name="Oval 19"/>
-          <p:cNvSpPr/>
-          <p:nvPr/>
-        </p:nvSpPr>
-        <p:spPr>
-          <a:xfrm>
-            <a:off x="10104120" y="1463040"/>
-            <a:ext cx="1005840" cy="1005840"/>
-          </a:xfrm>
-          <a:prstGeom prst="ellipse">
-            <a:avLst/>
-          </a:prstGeom>
-          <a:solidFill>
-            <a:srgbClr val="8C876C"/>
-          </a:solidFill>
-          <a:ln>
-            <a:noFill/>
-          </a:ln>
-        </p:spPr>
-        <p:style>
-          <a:lnRef idx="1">
-            <a:schemeClr val="accent1"/>
-          </a:lnRef>
-          <a:fillRef idx="3">
-            <a:schemeClr val="accent1"/>
-          </a:fillRef>
-          <a:effectRef idx="2">
-            <a:schemeClr val="accent1"/>
-          </a:effectRef>
-          <a:fontRef idx="minor">
-            <a:schemeClr val="lt1"/>
-          </a:fontRef>
-        </p:style>
-        <p:txBody>
-          <a:bodyPr rtlCol="0" anchor="ctr" wrap="square"/>
-          <a:lstStyle/>
-          <a:p>
-            <a:pPr algn="ctr">
-              <a:defRPr sz="1400" b="1">
-                <a:solidFill>
-                  <a:srgbClr val="FFFFFF"/>
-                </a:solidFill>
-                <a:latin typeface="Meiryo"/>
-              </a:defRPr>
-            </a:pPr>
-            <a:r>
-              <a:t>STEP 5</a:t>
-            </a:r>
-          </a:p>
-        </p:txBody>
-      </p:sp>
-      <p:sp>
-        <p:nvSpPr>
-          <p:cNvPr id="21" name="TextBox 20"/>
-          <p:cNvSpPr txBox="1"/>
-          <p:nvPr/>
-        </p:nvSpPr>
-        <p:spPr>
-          <a:xfrm>
-            <a:off x="9601200" y="2651760"/>
-            <a:ext cx="2011680" cy="365760"/>
-          </a:xfrm>
-          <a:prstGeom prst="rect">
-            <a:avLst/>
-          </a:prstGeom>
-          <a:noFill/>
-        </p:spPr>
-        <p:txBody>
-          <a:bodyPr wrap="square">
-            <a:spAutoFit/>
-          </a:bodyPr>
-          <a:lstStyle/>
-          <a:p>
-            <a:pPr algn="ctr">
-              <a:defRPr sz="1600" b="1">
-                <a:solidFill>
-                  <a:srgbClr val="333333"/>
-                </a:solidFill>
-                <a:latin typeface="Meiryo"/>
-              </a:defRPr>
-            </a:pPr>
-            <a:r>
-              <a:t>運用開始</a:t>
-            </a:r>
-          </a:p>
-        </p:txBody>
-      </p:sp>
-      <p:sp>
-        <p:nvSpPr>
-          <p:cNvPr id="22" name="TextBox 21"/>
-          <p:cNvSpPr txBox="1"/>
-          <p:nvPr/>
-        </p:nvSpPr>
-        <p:spPr>
-          <a:xfrm>
-            <a:off x="9601200" y="3108960"/>
-            <a:ext cx="2011680" cy="1097280"/>
-          </a:xfrm>
-          <a:prstGeom prst="rect">
-            <a:avLst/>
-          </a:prstGeom>
-          <a:noFill/>
-        </p:spPr>
-        <p:txBody>
-          <a:bodyPr wrap="square">
-            <a:spAutoFit/>
-          </a:bodyPr>
-          <a:lstStyle/>
-          <a:p>
-            <a:pPr algn="ctr">
-              <a:defRPr sz="1200" b="0">
-                <a:solidFill>
-                  <a:srgbClr val="999999"/>
-                </a:solidFill>
-                <a:latin typeface="Meiryo"/>
-              </a:defRPr>
-            </a:pPr>
-            <a:r>
-              <a:t>操作方法のレクチャー後</a:t>
-            </a:r>
-            <a:br/>
-            <a:r>
-              <a:t>すぐにご利用開始！</a:t>
-            </a:r>
-          </a:p>
-        </p:txBody>
-      </p:sp>
-      <p:sp>
-        <p:nvSpPr>
-          <p:cNvPr id="23" name="Rounded Rectangle 22"/>
-          <p:cNvSpPr/>
-          <p:nvPr/>
-        </p:nvSpPr>
-        <p:spPr>
-          <a:xfrm>
-            <a:off x="914400" y="4754880"/>
-            <a:ext cx="10360152" cy="1371600"/>
+            <a:off x="365760" y="1097280"/>
+            <a:ext cx="7498079" cy="5303520"/>
           </a:xfrm>
           <a:prstGeom prst="roundRect">
             <a:avLst/>
@@ -9503,16 +7988,40 @@
           </a:p>
         </p:txBody>
       </p:sp>
-      <p:sp>
-        <p:nvSpPr>
-          <p:cNvPr id="24" name="TextBox 23"/>
+      <p:pic>
+        <p:nvPicPr>
+          <p:cNvPr id="5" name="Picture 4" descr="attendance_board_vp.png"/>
+          <p:cNvPicPr>
+            <a:picLocks noChangeAspect="1"/>
+          </p:cNvPicPr>
+          <p:nvPr/>
+        </p:nvPicPr>
+        <p:blipFill>
+          <a:blip r:embed="rId2"/>
+          <a:stretch>
+            <a:fillRect/>
+          </a:stretch>
+        </p:blipFill>
+        <p:spPr>
+          <a:xfrm>
+            <a:off x="473456" y="1188720"/>
+            <a:ext cx="7282688" cy="5120640"/>
+          </a:xfrm>
+          <a:prstGeom prst="rect">
+            <a:avLst/>
+          </a:prstGeom>
+        </p:spPr>
+      </p:pic>
+      <p:sp>
+        <p:nvSpPr>
+          <p:cNvPr id="6" name="TextBox 5"/>
           <p:cNvSpPr txBox="1"/>
           <p:nvPr/>
         </p:nvSpPr>
         <p:spPr>
           <a:xfrm>
-            <a:off x="1371600" y="4937760"/>
-            <a:ext cx="9445752" cy="1097280"/>
+            <a:off x="8138160" y="1097280"/>
+            <a:ext cx="3657600" cy="457200"/>
           </a:xfrm>
           <a:prstGeom prst="rect">
             <a:avLst/>
@@ -9526,23 +8035,118 @@
           <a:lstStyle/>
           <a:p>
             <a:pPr algn="l">
-              <a:defRPr sz="1300" b="0">
-                <a:solidFill>
-                  <a:srgbClr val="333333"/>
-                </a:solidFill>
-                <a:latin typeface="Meiryo"/>
-              </a:defRPr>
-            </a:pPr>
-            <a:r>
-              <a:t>最短即日でご利用開始いただけます。</a:t>
-            </a:r>
-            <a:br/>
-            <a:r>
-              <a:t>専用機器の購入やシステム工事は一切不要です。お手持ちのスマホ・タブレット・PCからすぐにアクセスできます。</a:t>
-            </a:r>
-            <a:br/>
-            <a:r>
-              <a:t>導入後も操作方法のサポートや機能アップデートを継続的にご提供します。</a:t>
+              <a:defRPr sz="1800" b="1">
+                <a:solidFill>
+                  <a:srgbClr val="333333"/>
+                </a:solidFill>
+                <a:latin typeface="Meiryo"/>
+              </a:defRPr>
+            </a:pPr>
+            <a:r>
+              <a:t>スタッフの勤務状況をリアルタイム表示</a:t>
+            </a:r>
+          </a:p>
+        </p:txBody>
+      </p:sp>
+      <p:sp>
+        <p:nvSpPr>
+          <p:cNvPr id="7" name="TextBox 6"/>
+          <p:cNvSpPr txBox="1"/>
+          <p:nvPr/>
+        </p:nvSpPr>
+        <p:spPr>
+          <a:xfrm>
+            <a:off x="8138160" y="1645920"/>
+            <a:ext cx="3657600" cy="4572000"/>
+          </a:xfrm>
+          <a:prstGeom prst="rect">
+            <a:avLst/>
+          </a:prstGeom>
+          <a:noFill/>
+        </p:spPr>
+        <p:txBody>
+          <a:bodyPr wrap="square">
+            <a:spAutoFit/>
+          </a:bodyPr>
+          <a:lstStyle/>
+          <a:p>
+            <a:pPr>
+              <a:spcAft>
+                <a:spcPts val="600"/>
+              </a:spcAft>
+              <a:defRPr sz="1200">
+                <a:solidFill>
+                  <a:srgbClr val="333333"/>
+                </a:solidFill>
+                <a:latin typeface="Meiryo"/>
+              </a:defRPr>
+            </a:pPr>
+            <a:r>
+              <a:t>  ✓  出勤中・休憩中・未出勤のステータスを一覧表示</a:t>
+            </a:r>
+          </a:p>
+          <a:p>
+            <a:pPr>
+              <a:spcAft>
+                <a:spcPts val="600"/>
+              </a:spcAft>
+              <a:defRPr sz="1200">
+                <a:solidFill>
+                  <a:srgbClr val="333333"/>
+                </a:solidFill>
+                <a:latin typeface="Meiryo"/>
+              </a:defRPr>
+            </a:pPr>
+            <a:r>
+              <a:t>  ✓  30秒ごとに自動更新でリアルタイム把握</a:t>
+            </a:r>
+          </a:p>
+          <a:p>
+            <a:pPr>
+              <a:spcAft>
+                <a:spcPts val="600"/>
+              </a:spcAft>
+              <a:defRPr sz="1200">
+                <a:solidFill>
+                  <a:srgbClr val="333333"/>
+                </a:solidFill>
+                <a:latin typeface="Meiryo"/>
+              </a:defRPr>
+            </a:pPr>
+            <a:r>
+              <a:t>  ✓  QRコード / PIN入力 / スマホ打刻の3方式に対応</a:t>
+            </a:r>
+          </a:p>
+          <a:p>
+            <a:pPr>
+              <a:spcAft>
+                <a:spcPts val="600"/>
+              </a:spcAft>
+              <a:defRPr sz="1200">
+                <a:solidFill>
+                  <a:srgbClr val="333333"/>
+                </a:solidFill>
+                <a:latin typeface="Meiryo"/>
+              </a:defRPr>
+            </a:pPr>
+            <a:r>
+              <a:t>  ✓  残業・深夜・休日出勤を自動で分類</a:t>
+            </a:r>
+          </a:p>
+          <a:p>
+            <a:pPr>
+              <a:spcAft>
+                <a:spcPts val="600"/>
+              </a:spcAft>
+              <a:defRPr sz="1200">
+                <a:solidFill>
+                  <a:srgbClr val="333333"/>
+                </a:solidFill>
+                <a:latin typeface="Meiryo"/>
+              </a:defRPr>
+            </a:pPr>
+            <a:r>
+              <a:t>  ✓  勤怠データから給与計算へシームレスに連携</a:t>
             </a:r>
           </a:p>
         </p:txBody>
@@ -9596,7 +8200,7 @@
           <a:lstStyle/>
           <a:p>
             <a:pPr algn="l">
-              <a:defRPr sz="3200" b="1">
+              <a:defRPr sz="2800" b="1">
                 <a:solidFill>
                   <a:srgbClr val="8C876C"/>
                 </a:solidFill>
@@ -9604,7 +8208,7 @@
               </a:defRPr>
             </a:pPr>
             <a:r>
-              <a:t>料金プラン</a:t>
+              <a:t>管理画面 — IoTセンサーモニター</a:t>
             </a:r>
           </a:p>
         </p:txBody>
@@ -9618,7 +8222,7 @@
         <p:spPr>
           <a:xfrm>
             <a:off x="731520" y="822960"/>
-            <a:ext cx="1828800" cy="36576"/>
+            <a:ext cx="2743200" cy="36576"/>
           </a:xfrm>
           <a:prstGeom prst="rect">
             <a:avLst/>
@@ -9655,50 +8259,14 @@
       </p:sp>
       <p:sp>
         <p:nvSpPr>
-          <p:cNvPr id="4" name="TextBox 3"/>
-          <p:cNvSpPr txBox="1"/>
-          <p:nvPr/>
-        </p:nvSpPr>
-        <p:spPr>
-          <a:xfrm>
-            <a:off x="731520" y="1005840"/>
-            <a:ext cx="10058400" cy="365760"/>
-          </a:xfrm>
-          <a:prstGeom prst="rect">
-            <a:avLst/>
-          </a:prstGeom>
-          <a:noFill/>
-        </p:spPr>
-        <p:txBody>
-          <a:bodyPr wrap="square">
-            <a:spAutoFit/>
-          </a:bodyPr>
-          <a:lstStyle/>
-          <a:p>
-            <a:pPr algn="l">
-              <a:defRPr sz="1200" b="0">
-                <a:solidFill>
-                  <a:srgbClr val="999999"/>
-                </a:solidFill>
-                <a:latin typeface="Meiryo"/>
-              </a:defRPr>
-            </a:pPr>
-            <a:r>
-              <a:t>※ 以下は参考価格です。ご要望に応じてカスタマイズいたします。</a:t>
-            </a:r>
-          </a:p>
-        </p:txBody>
-      </p:sp>
-      <p:sp>
-        <p:nvSpPr>
-          <p:cNvPr id="5" name="Rounded Rectangle 4"/>
+          <p:cNvPr id="4" name="Rounded Rectangle 3"/>
           <p:cNvSpPr/>
           <p:nvPr/>
         </p:nvSpPr>
         <p:spPr>
           <a:xfrm>
-            <a:off x="548640" y="1554480"/>
-            <a:ext cx="3474720" cy="4754880"/>
+            <a:off x="365760" y="1097280"/>
+            <a:ext cx="7498079" cy="5303520"/>
           </a:xfrm>
           <a:prstGeom prst="roundRect">
             <a:avLst/>
@@ -9733,60 +8301,40 @@
           </a:p>
         </p:txBody>
       </p:sp>
-      <p:sp>
-        <p:nvSpPr>
-          <p:cNvPr id="6" name="Rectangle 5"/>
-          <p:cNvSpPr/>
-          <p:nvPr/>
-        </p:nvSpPr>
-        <p:spPr>
-          <a:xfrm>
-            <a:off x="548640" y="1554480"/>
-            <a:ext cx="3474720" cy="73152"/>
-          </a:xfrm>
-          <a:prstGeom prst="rect">
-            <a:avLst/>
-          </a:prstGeom>
-          <a:solidFill>
-            <a:srgbClr val="4CAF50"/>
-          </a:solidFill>
-          <a:ln>
-            <a:noFill/>
-          </a:ln>
-          <a:effectLst/>
-        </p:spPr>
-        <p:style>
-          <a:lnRef idx="1">
-            <a:schemeClr val="accent1"/>
-          </a:lnRef>
-          <a:fillRef idx="3">
-            <a:schemeClr val="accent1"/>
-          </a:fillRef>
-          <a:effectRef idx="2">
-            <a:schemeClr val="accent1"/>
-          </a:effectRef>
-          <a:fontRef idx="minor">
-            <a:schemeClr val="lt1"/>
-          </a:fontRef>
-        </p:style>
-        <p:txBody>
-          <a:bodyPr rtlCol="0" anchor="ctr"/>
-          <a:lstStyle/>
-          <a:p>
-            <a:pPr algn="ctr"/>
-          </a:p>
-        </p:txBody>
-      </p:sp>
-      <p:sp>
-        <p:nvSpPr>
-          <p:cNvPr id="7" name="TextBox 6"/>
+      <p:pic>
+        <p:nvPicPr>
+          <p:cNvPr id="5" name="Picture 4" descr="iot_sensors_vp.png"/>
+          <p:cNvPicPr>
+            <a:picLocks noChangeAspect="1"/>
+          </p:cNvPicPr>
+          <p:nvPr/>
+        </p:nvPicPr>
+        <p:blipFill>
+          <a:blip r:embed="rId2"/>
+          <a:stretch>
+            <a:fillRect/>
+          </a:stretch>
+        </p:blipFill>
+        <p:spPr>
+          <a:xfrm>
+            <a:off x="457200" y="1188720"/>
+            <a:ext cx="7315200" cy="5120640"/>
+          </a:xfrm>
+          <a:prstGeom prst="rect">
+            <a:avLst/>
+          </a:prstGeom>
+        </p:spPr>
+      </p:pic>
+      <p:sp>
+        <p:nvSpPr>
+          <p:cNvPr id="6" name="TextBox 5"/>
           <p:cNvSpPr txBox="1"/>
           <p:nvPr/>
         </p:nvSpPr>
         <p:spPr>
           <a:xfrm>
-            <a:off x="731520" y="1828800"/>
-            <a:ext cx="3108960" cy="365760"/>
+            <a:off x="8138160" y="1097280"/>
+            <a:ext cx="3657600" cy="457200"/>
           </a:xfrm>
           <a:prstGeom prst="rect">
             <a:avLst/>
@@ -9799,7 +8347,7 @@
           </a:bodyPr>
           <a:lstStyle/>
           <a:p>
-            <a:pPr algn="ctr">
+            <a:pPr algn="l">
               <a:defRPr sz="1800" b="1">
                 <a:solidFill>
                   <a:srgbClr val="333333"/>
@@ -9808,137 +8356,21 @@
               </a:defRPr>
             </a:pPr>
             <a:r>
-              <a:t>ライトプラン</a:t>
-            </a:r>
-          </a:p>
-        </p:txBody>
-      </p:sp>
-      <p:sp>
-        <p:nvSpPr>
-          <p:cNvPr id="8" name="TextBox 7"/>
+              <a:t>店舗環境をリアルタイム監視</a:t>
+            </a:r>
+          </a:p>
+        </p:txBody>
+      </p:sp>
+      <p:sp>
+        <p:nvSpPr>
+          <p:cNvPr id="7" name="TextBox 6"/>
           <p:cNvSpPr txBox="1"/>
           <p:nvPr/>
         </p:nvSpPr>
         <p:spPr>
           <a:xfrm>
-            <a:off x="731520" y="2286000"/>
-            <a:ext cx="3108960" cy="457200"/>
-          </a:xfrm>
-          <a:prstGeom prst="rect">
-            <a:avLst/>
-          </a:prstGeom>
-          <a:noFill/>
-        </p:spPr>
-        <p:txBody>
-          <a:bodyPr wrap="square">
-            <a:spAutoFit/>
-          </a:bodyPr>
-          <a:lstStyle/>
-          <a:p>
-            <a:pPr algn="ctr">
-              <a:defRPr sz="2200" b="1">
-                <a:solidFill>
-                  <a:srgbClr val="4CAF50"/>
-                </a:solidFill>
-                <a:latin typeface="Meiryo"/>
-              </a:defRPr>
-            </a:pPr>
-            <a:r>
-              <a:t>月額 ¥○○,○○○〜</a:t>
-            </a:r>
-          </a:p>
-        </p:txBody>
-      </p:sp>
-      <p:sp>
-        <p:nvSpPr>
-          <p:cNvPr id="9" name="Rectangle 8"/>
-          <p:cNvSpPr/>
-          <p:nvPr/>
-        </p:nvSpPr>
-        <p:spPr>
-          <a:xfrm>
-            <a:off x="822960" y="2834640"/>
-            <a:ext cx="2926080" cy="18288"/>
-          </a:xfrm>
-          <a:prstGeom prst="rect">
-            <a:avLst/>
-          </a:prstGeom>
-          <a:solidFill>
-            <a:srgbClr val="999999"/>
-          </a:solidFill>
-          <a:ln>
-            <a:noFill/>
-          </a:ln>
-          <a:effectLst/>
-        </p:spPr>
-        <p:style>
-          <a:lnRef idx="1">
-            <a:schemeClr val="accent1"/>
-          </a:lnRef>
-          <a:fillRef idx="3">
-            <a:schemeClr val="accent1"/>
-          </a:fillRef>
-          <a:effectRef idx="2">
-            <a:schemeClr val="accent1"/>
-          </a:effectRef>
-          <a:fontRef idx="minor">
-            <a:schemeClr val="lt1"/>
-          </a:fontRef>
-        </p:style>
-        <p:txBody>
-          <a:bodyPr rtlCol="0" anchor="ctr"/>
-          <a:lstStyle/>
-          <a:p>
-            <a:pPr algn="ctr"/>
-          </a:p>
-        </p:txBody>
-      </p:sp>
-      <p:sp>
-        <p:nvSpPr>
-          <p:cNvPr id="10" name="TextBox 9"/>
-          <p:cNvSpPr txBox="1"/>
-          <p:nvPr/>
-        </p:nvSpPr>
-        <p:spPr>
-          <a:xfrm>
-            <a:off x="731520" y="2926080"/>
-            <a:ext cx="3108960" cy="274320"/>
-          </a:xfrm>
-          <a:prstGeom prst="rect">
-            <a:avLst/>
-          </a:prstGeom>
-          <a:noFill/>
-        </p:spPr>
-        <p:txBody>
-          <a:bodyPr wrap="square">
-            <a:spAutoFit/>
-          </a:bodyPr>
-          <a:lstStyle/>
-          <a:p>
-            <a:pPr algn="ctr">
-              <a:defRPr sz="1100" b="0">
-                <a:solidFill>
-                  <a:srgbClr val="999999"/>
-                </a:solidFill>
-                <a:latin typeface="Meiryo"/>
-              </a:defRPr>
-            </a:pPr>
-            <a:r>
-              <a:t>小規模店舗向け</a:t>
-            </a:r>
-          </a:p>
-        </p:txBody>
-      </p:sp>
-      <p:sp>
-        <p:nvSpPr>
-          <p:cNvPr id="11" name="TextBox 10"/>
-          <p:cNvSpPr txBox="1"/>
-          <p:nvPr/>
-        </p:nvSpPr>
-        <p:spPr>
-          <a:xfrm>
-            <a:off x="822960" y="3291840"/>
-            <a:ext cx="2926080" cy="2834640"/>
+            <a:off x="8138160" y="1645920"/>
+            <a:ext cx="3657600" cy="4572000"/>
           </a:xfrm>
           <a:prstGeom prst="rect">
             <a:avLst/>
@@ -9963,7 +8395,7 @@
               </a:defRPr>
             </a:pPr>
             <a:r>
-              <a:t>  ✓  予約管理（LINE・メール）</a:t>
+              <a:t>  ✓  温度・湿度・気圧・ガス濃度をリアルタイム表示</a:t>
             </a:r>
           </a:p>
           <a:p>
@@ -9979,7 +8411,7 @@
               </a:defRPr>
             </a:pPr>
             <a:r>
-              <a:t>  ✓  スタッフ管理（5名まで）</a:t>
+              <a:t>  ✓  PIR人感センサーで来店客数を自動カウント</a:t>
             </a:r>
           </a:p>
           <a:p>
@@ -9995,7 +8427,7 @@
               </a:defRPr>
             </a:pPr>
             <a:r>
-              <a:t>  ✓  ホームページ管理</a:t>
+              <a:t>  ✓  異常値検知時にアラート通知（ガス漏れ・高温等）</a:t>
             </a:r>
           </a:p>
           <a:p>
@@ -10011,326 +8443,9 @@
               </a:defRPr>
             </a:pPr>
             <a:r>
-              <a:t>  ✓  メール・チャットサポート</a:t>
-            </a:r>
-          </a:p>
-        </p:txBody>
-      </p:sp>
-      <p:sp>
-        <p:nvSpPr>
-          <p:cNvPr id="12" name="Rounded Rectangle 11"/>
-          <p:cNvSpPr/>
-          <p:nvPr/>
-        </p:nvSpPr>
-        <p:spPr>
-          <a:xfrm>
-            <a:off x="4389120" y="1554480"/>
-            <a:ext cx="3474720" cy="4754880"/>
-          </a:xfrm>
-          <a:prstGeom prst="roundRect">
-            <a:avLst/>
-          </a:prstGeom>
-          <a:solidFill>
-            <a:srgbClr val="F5F5F5"/>
-          </a:solidFill>
-          <a:ln>
-            <a:noFill/>
-          </a:ln>
-          <a:effectLst/>
-        </p:spPr>
-        <p:style>
-          <a:lnRef idx="1">
-            <a:schemeClr val="accent1"/>
-          </a:lnRef>
-          <a:fillRef idx="3">
-            <a:schemeClr val="accent1"/>
-          </a:fillRef>
-          <a:effectRef idx="2">
-            <a:schemeClr val="accent1"/>
-          </a:effectRef>
-          <a:fontRef idx="minor">
-            <a:schemeClr val="lt1"/>
-          </a:fontRef>
-        </p:style>
-        <p:txBody>
-          <a:bodyPr rtlCol="0" anchor="ctr"/>
-          <a:lstStyle/>
-          <a:p>
-            <a:pPr algn="ctr"/>
-          </a:p>
-        </p:txBody>
-      </p:sp>
-      <p:sp>
-        <p:nvSpPr>
-          <p:cNvPr id="13" name="Rectangle 12"/>
-          <p:cNvSpPr/>
-          <p:nvPr/>
-        </p:nvSpPr>
-        <p:spPr>
-          <a:xfrm>
-            <a:off x="4389120" y="1554480"/>
-            <a:ext cx="3474720" cy="73152"/>
-          </a:xfrm>
-          <a:prstGeom prst="rect">
-            <a:avLst/>
-          </a:prstGeom>
-          <a:solidFill>
-            <a:srgbClr val="428BCA"/>
-          </a:solidFill>
-          <a:ln>
-            <a:noFill/>
-          </a:ln>
-          <a:effectLst/>
-        </p:spPr>
-        <p:style>
-          <a:lnRef idx="1">
-            <a:schemeClr val="accent1"/>
-          </a:lnRef>
-          <a:fillRef idx="3">
-            <a:schemeClr val="accent1"/>
-          </a:fillRef>
-          <a:effectRef idx="2">
-            <a:schemeClr val="accent1"/>
-          </a:effectRef>
-          <a:fontRef idx="minor">
-            <a:schemeClr val="lt1"/>
-          </a:fontRef>
-        </p:style>
-        <p:txBody>
-          <a:bodyPr rtlCol="0" anchor="ctr"/>
-          <a:lstStyle/>
-          <a:p>
-            <a:pPr algn="ctr"/>
-          </a:p>
-        </p:txBody>
-      </p:sp>
-      <p:sp>
-        <p:nvSpPr>
-          <p:cNvPr id="14" name="Rounded Rectangle 13"/>
-          <p:cNvSpPr/>
-          <p:nvPr/>
-        </p:nvSpPr>
-        <p:spPr>
-          <a:xfrm>
-            <a:off x="5120640" y="1417320"/>
-            <a:ext cx="2011680" cy="320040"/>
-          </a:xfrm>
-          <a:prstGeom prst="roundRect">
-            <a:avLst/>
-          </a:prstGeom>
-          <a:solidFill>
-            <a:srgbClr val="428BCA"/>
-          </a:solidFill>
-          <a:ln>
-            <a:noFill/>
-          </a:ln>
-          <a:effectLst/>
-        </p:spPr>
-        <p:style>
-          <a:lnRef idx="1">
-            <a:schemeClr val="accent1"/>
-          </a:lnRef>
-          <a:fillRef idx="3">
-            <a:schemeClr val="accent1"/>
-          </a:fillRef>
-          <a:effectRef idx="2">
-            <a:schemeClr val="accent1"/>
-          </a:effectRef>
-          <a:fontRef idx="minor">
-            <a:schemeClr val="lt1"/>
-          </a:fontRef>
-        </p:style>
-        <p:txBody>
-          <a:bodyPr rtlCol="0" anchor="ctr"/>
-          <a:lstStyle/>
-          <a:p>
-            <a:pPr algn="ctr">
-              <a:defRPr sz="1100" b="1">
-                <a:solidFill>
-                  <a:srgbClr val="FFFFFF"/>
-                </a:solidFill>
-                <a:latin typeface="Meiryo"/>
-              </a:defRPr>
-            </a:pPr>
-            <a:r>
-              <a:t>★ おすすめ！</a:t>
-            </a:r>
-          </a:p>
-        </p:txBody>
-      </p:sp>
-      <p:sp>
-        <p:nvSpPr>
-          <p:cNvPr id="15" name="TextBox 14"/>
-          <p:cNvSpPr txBox="1"/>
-          <p:nvPr/>
-        </p:nvSpPr>
-        <p:spPr>
-          <a:xfrm>
-            <a:off x="4572000" y="1828800"/>
-            <a:ext cx="3108960" cy="365760"/>
-          </a:xfrm>
-          <a:prstGeom prst="rect">
-            <a:avLst/>
-          </a:prstGeom>
-          <a:noFill/>
-        </p:spPr>
-        <p:txBody>
-          <a:bodyPr wrap="square">
-            <a:spAutoFit/>
-          </a:bodyPr>
-          <a:lstStyle/>
-          <a:p>
-            <a:pPr algn="ctr">
-              <a:defRPr sz="1800" b="1">
-                <a:solidFill>
-                  <a:srgbClr val="333333"/>
-                </a:solidFill>
-                <a:latin typeface="Meiryo"/>
-              </a:defRPr>
-            </a:pPr>
-            <a:r>
-              <a:t>スタンダードプラン</a:t>
-            </a:r>
-          </a:p>
-        </p:txBody>
-      </p:sp>
-      <p:sp>
-        <p:nvSpPr>
-          <p:cNvPr id="16" name="TextBox 15"/>
-          <p:cNvSpPr txBox="1"/>
-          <p:nvPr/>
-        </p:nvSpPr>
-        <p:spPr>
-          <a:xfrm>
-            <a:off x="4572000" y="2286000"/>
-            <a:ext cx="3108960" cy="457200"/>
-          </a:xfrm>
-          <a:prstGeom prst="rect">
-            <a:avLst/>
-          </a:prstGeom>
-          <a:noFill/>
-        </p:spPr>
-        <p:txBody>
-          <a:bodyPr wrap="square">
-            <a:spAutoFit/>
-          </a:bodyPr>
-          <a:lstStyle/>
-          <a:p>
-            <a:pPr algn="ctr">
-              <a:defRPr sz="2200" b="1">
-                <a:solidFill>
-                  <a:srgbClr val="428BCA"/>
-                </a:solidFill>
-                <a:latin typeface="Meiryo"/>
-              </a:defRPr>
-            </a:pPr>
-            <a:r>
-              <a:t>月額 ¥○○,○○○〜</a:t>
-            </a:r>
-          </a:p>
-        </p:txBody>
-      </p:sp>
-      <p:sp>
-        <p:nvSpPr>
-          <p:cNvPr id="17" name="Rectangle 16"/>
-          <p:cNvSpPr/>
-          <p:nvPr/>
-        </p:nvSpPr>
-        <p:spPr>
-          <a:xfrm>
-            <a:off x="4663440" y="2834640"/>
-            <a:ext cx="2926080" cy="18288"/>
-          </a:xfrm>
-          <a:prstGeom prst="rect">
-            <a:avLst/>
-          </a:prstGeom>
-          <a:solidFill>
-            <a:srgbClr val="999999"/>
-          </a:solidFill>
-          <a:ln>
-            <a:noFill/>
-          </a:ln>
-          <a:effectLst/>
-        </p:spPr>
-        <p:style>
-          <a:lnRef idx="1">
-            <a:schemeClr val="accent1"/>
-          </a:lnRef>
-          <a:fillRef idx="3">
-            <a:schemeClr val="accent1"/>
-          </a:fillRef>
-          <a:effectRef idx="2">
-            <a:schemeClr val="accent1"/>
-          </a:effectRef>
-          <a:fontRef idx="minor">
-            <a:schemeClr val="lt1"/>
-          </a:fontRef>
-        </p:style>
-        <p:txBody>
-          <a:bodyPr rtlCol="0" anchor="ctr"/>
-          <a:lstStyle/>
-          <a:p>
-            <a:pPr algn="ctr"/>
-          </a:p>
-        </p:txBody>
-      </p:sp>
-      <p:sp>
-        <p:nvSpPr>
-          <p:cNvPr id="18" name="TextBox 17"/>
-          <p:cNvSpPr txBox="1"/>
-          <p:nvPr/>
-        </p:nvSpPr>
-        <p:spPr>
-          <a:xfrm>
-            <a:off x="4572000" y="2926080"/>
-            <a:ext cx="3108960" cy="274320"/>
-          </a:xfrm>
-          <a:prstGeom prst="rect">
-            <a:avLst/>
-          </a:prstGeom>
-          <a:noFill/>
-        </p:spPr>
-        <p:txBody>
-          <a:bodyPr wrap="square">
-            <a:spAutoFit/>
-          </a:bodyPr>
-          <a:lstStyle/>
-          <a:p>
-            <a:pPr algn="ctr">
-              <a:defRPr sz="1100" b="0">
-                <a:solidFill>
-                  <a:srgbClr val="999999"/>
-                </a:solidFill>
-                <a:latin typeface="Meiryo"/>
-              </a:defRPr>
-            </a:pPr>
-            <a:r>
-              <a:t>中規模店舗向け</a:t>
-            </a:r>
-          </a:p>
-        </p:txBody>
-      </p:sp>
-      <p:sp>
-        <p:nvSpPr>
-          <p:cNvPr id="19" name="TextBox 18"/>
-          <p:cNvSpPr txBox="1"/>
-          <p:nvPr/>
-        </p:nvSpPr>
-        <p:spPr>
-          <a:xfrm>
-            <a:off x="4663440" y="3291840"/>
-            <a:ext cx="2926080" cy="2834640"/>
-          </a:xfrm>
-          <a:prstGeom prst="rect">
-            <a:avLst/>
-          </a:prstGeom>
-          <a:noFill/>
-        </p:spPr>
-        <p:txBody>
-          <a:bodyPr wrap="square">
-            <a:spAutoFit/>
-          </a:bodyPr>
-          <a:lstStyle/>
+              <a:t>  ✓  センサーデータの時系列グラフで傾向を把握</a:t>
+            </a:r>
+          </a:p>
           <a:p>
             <a:pPr>
               <a:spcAft>
@@ -10344,498 +8459,7 @@
               </a:defRPr>
             </a:pPr>
             <a:r>
-              <a:t>  ✓  ライトプランの全機能</a:t>
-            </a:r>
-          </a:p>
-          <a:p>
-            <a:pPr>
-              <a:spcAft>
-                <a:spcPts val="600"/>
-              </a:spcAft>
-              <a:defRPr sz="1200">
-                <a:solidFill>
-                  <a:srgbClr val="333333"/>
-                </a:solidFill>
-                <a:latin typeface="Meiryo"/>
-              </a:defRPr>
-            </a:pPr>
-            <a:r>
-              <a:t>  ✓  QRテーブル注文</a:t>
-            </a:r>
-          </a:p>
-          <a:p>
-            <a:pPr>
-              <a:spcAft>
-                <a:spcPts val="600"/>
-              </a:spcAft>
-              <a:defRPr sz="1200">
-                <a:solidFill>
-                  <a:srgbClr val="333333"/>
-                </a:solidFill>
-                <a:latin typeface="Meiryo"/>
-              </a:defRPr>
-            </a:pPr>
-            <a:r>
-              <a:t>  ✓  在庫管理</a:t>
-            </a:r>
-          </a:p>
-          <a:p>
-            <a:pPr>
-              <a:spcAft>
-                <a:spcPts val="600"/>
-              </a:spcAft>
-              <a:defRPr sz="1200">
-                <a:solidFill>
-                  <a:srgbClr val="333333"/>
-                </a:solidFill>
-                <a:latin typeface="Meiryo"/>
-              </a:defRPr>
-            </a:pPr>
-            <a:r>
-              <a:t>  ✓  シフト管理</a:t>
-            </a:r>
-          </a:p>
-          <a:p>
-            <a:pPr>
-              <a:spcAft>
-                <a:spcPts val="600"/>
-              </a:spcAft>
-              <a:defRPr sz="1200">
-                <a:solidFill>
-                  <a:srgbClr val="333333"/>
-                </a:solidFill>
-                <a:latin typeface="Meiryo"/>
-              </a:defRPr>
-            </a:pPr>
-            <a:r>
-              <a:t>  ✓  スタッフ無制限</a:t>
-            </a:r>
-          </a:p>
-          <a:p>
-            <a:pPr>
-              <a:spcAft>
-                <a:spcPts val="600"/>
-              </a:spcAft>
-              <a:defRPr sz="1200">
-                <a:solidFill>
-                  <a:srgbClr val="333333"/>
-                </a:solidFill>
-                <a:latin typeface="Meiryo"/>
-              </a:defRPr>
-            </a:pPr>
-            <a:r>
-              <a:t>  ✓  電話サポート</a:t>
-            </a:r>
-          </a:p>
-        </p:txBody>
-      </p:sp>
-      <p:sp>
-        <p:nvSpPr>
-          <p:cNvPr id="20" name="Rounded Rectangle 19"/>
-          <p:cNvSpPr/>
-          <p:nvPr/>
-        </p:nvSpPr>
-        <p:spPr>
-          <a:xfrm>
-            <a:off x="8229600" y="1554480"/>
-            <a:ext cx="3474720" cy="4754880"/>
-          </a:xfrm>
-          <a:prstGeom prst="roundRect">
-            <a:avLst/>
-          </a:prstGeom>
-          <a:solidFill>
-            <a:srgbClr val="F5F5F5"/>
-          </a:solidFill>
-          <a:ln>
-            <a:noFill/>
-          </a:ln>
-          <a:effectLst/>
-        </p:spPr>
-        <p:style>
-          <a:lnRef idx="1">
-            <a:schemeClr val="accent1"/>
-          </a:lnRef>
-          <a:fillRef idx="3">
-            <a:schemeClr val="accent1"/>
-          </a:fillRef>
-          <a:effectRef idx="2">
-            <a:schemeClr val="accent1"/>
-          </a:effectRef>
-          <a:fontRef idx="minor">
-            <a:schemeClr val="lt1"/>
-          </a:fontRef>
-        </p:style>
-        <p:txBody>
-          <a:bodyPr rtlCol="0" anchor="ctr"/>
-          <a:lstStyle/>
-          <a:p>
-            <a:pPr algn="ctr"/>
-          </a:p>
-        </p:txBody>
-      </p:sp>
-      <p:sp>
-        <p:nvSpPr>
-          <p:cNvPr id="21" name="Rectangle 20"/>
-          <p:cNvSpPr/>
-          <p:nvPr/>
-        </p:nvSpPr>
-        <p:spPr>
-          <a:xfrm>
-            <a:off x="8229600" y="1554480"/>
-            <a:ext cx="3474720" cy="73152"/>
-          </a:xfrm>
-          <a:prstGeom prst="rect">
-            <a:avLst/>
-          </a:prstGeom>
-          <a:solidFill>
-            <a:srgbClr val="8C876C"/>
-          </a:solidFill>
-          <a:ln>
-            <a:noFill/>
-          </a:ln>
-          <a:effectLst/>
-        </p:spPr>
-        <p:style>
-          <a:lnRef idx="1">
-            <a:schemeClr val="accent1"/>
-          </a:lnRef>
-          <a:fillRef idx="3">
-            <a:schemeClr val="accent1"/>
-          </a:fillRef>
-          <a:effectRef idx="2">
-            <a:schemeClr val="accent1"/>
-          </a:effectRef>
-          <a:fontRef idx="minor">
-            <a:schemeClr val="lt1"/>
-          </a:fontRef>
-        </p:style>
-        <p:txBody>
-          <a:bodyPr rtlCol="0" anchor="ctr"/>
-          <a:lstStyle/>
-          <a:p>
-            <a:pPr algn="ctr"/>
-          </a:p>
-        </p:txBody>
-      </p:sp>
-      <p:sp>
-        <p:nvSpPr>
-          <p:cNvPr id="22" name="TextBox 21"/>
-          <p:cNvSpPr txBox="1"/>
-          <p:nvPr/>
-        </p:nvSpPr>
-        <p:spPr>
-          <a:xfrm>
-            <a:off x="8412480" y="1828800"/>
-            <a:ext cx="3108960" cy="365760"/>
-          </a:xfrm>
-          <a:prstGeom prst="rect">
-            <a:avLst/>
-          </a:prstGeom>
-          <a:noFill/>
-        </p:spPr>
-        <p:txBody>
-          <a:bodyPr wrap="square">
-            <a:spAutoFit/>
-          </a:bodyPr>
-          <a:lstStyle/>
-          <a:p>
-            <a:pPr algn="ctr">
-              <a:defRPr sz="1800" b="1">
-                <a:solidFill>
-                  <a:srgbClr val="333333"/>
-                </a:solidFill>
-                <a:latin typeface="Meiryo"/>
-              </a:defRPr>
-            </a:pPr>
-            <a:r>
-              <a:t>プレミアムプラン</a:t>
-            </a:r>
-          </a:p>
-        </p:txBody>
-      </p:sp>
-      <p:sp>
-        <p:nvSpPr>
-          <p:cNvPr id="23" name="TextBox 22"/>
-          <p:cNvSpPr txBox="1"/>
-          <p:nvPr/>
-        </p:nvSpPr>
-        <p:spPr>
-          <a:xfrm>
-            <a:off x="8412480" y="2286000"/>
-            <a:ext cx="3108960" cy="457200"/>
-          </a:xfrm>
-          <a:prstGeom prst="rect">
-            <a:avLst/>
-          </a:prstGeom>
-          <a:noFill/>
-        </p:spPr>
-        <p:txBody>
-          <a:bodyPr wrap="square">
-            <a:spAutoFit/>
-          </a:bodyPr>
-          <a:lstStyle/>
-          <a:p>
-            <a:pPr algn="ctr">
-              <a:defRPr sz="2200" b="1">
-                <a:solidFill>
-                  <a:srgbClr val="8C876C"/>
-                </a:solidFill>
-                <a:latin typeface="Meiryo"/>
-              </a:defRPr>
-            </a:pPr>
-            <a:r>
-              <a:t>月額 ¥○○,○○○〜</a:t>
-            </a:r>
-          </a:p>
-        </p:txBody>
-      </p:sp>
-      <p:sp>
-        <p:nvSpPr>
-          <p:cNvPr id="24" name="Rectangle 23"/>
-          <p:cNvSpPr/>
-          <p:nvPr/>
-        </p:nvSpPr>
-        <p:spPr>
-          <a:xfrm>
-            <a:off x="8503920" y="2834640"/>
-            <a:ext cx="2926080" cy="18288"/>
-          </a:xfrm>
-          <a:prstGeom prst="rect">
-            <a:avLst/>
-          </a:prstGeom>
-          <a:solidFill>
-            <a:srgbClr val="999999"/>
-          </a:solidFill>
-          <a:ln>
-            <a:noFill/>
-          </a:ln>
-          <a:effectLst/>
-        </p:spPr>
-        <p:style>
-          <a:lnRef idx="1">
-            <a:schemeClr val="accent1"/>
-          </a:lnRef>
-          <a:fillRef idx="3">
-            <a:schemeClr val="accent1"/>
-          </a:fillRef>
-          <a:effectRef idx="2">
-            <a:schemeClr val="accent1"/>
-          </a:effectRef>
-          <a:fontRef idx="minor">
-            <a:schemeClr val="lt1"/>
-          </a:fontRef>
-        </p:style>
-        <p:txBody>
-          <a:bodyPr rtlCol="0" anchor="ctr"/>
-          <a:lstStyle/>
-          <a:p>
-            <a:pPr algn="ctr"/>
-          </a:p>
-        </p:txBody>
-      </p:sp>
-      <p:sp>
-        <p:nvSpPr>
-          <p:cNvPr id="25" name="TextBox 24"/>
-          <p:cNvSpPr txBox="1"/>
-          <p:nvPr/>
-        </p:nvSpPr>
-        <p:spPr>
-          <a:xfrm>
-            <a:off x="8412480" y="2926080"/>
-            <a:ext cx="3108960" cy="274320"/>
-          </a:xfrm>
-          <a:prstGeom prst="rect">
-            <a:avLst/>
-          </a:prstGeom>
-          <a:noFill/>
-        </p:spPr>
-        <p:txBody>
-          <a:bodyPr wrap="square">
-            <a:spAutoFit/>
-          </a:bodyPr>
-          <a:lstStyle/>
-          <a:p>
-            <a:pPr algn="ctr">
-              <a:defRPr sz="1100" b="0">
-                <a:solidFill>
-                  <a:srgbClr val="999999"/>
-                </a:solidFill>
-                <a:latin typeface="Meiryo"/>
-              </a:defRPr>
-            </a:pPr>
-            <a:r>
-              <a:t>複数店舗・フル機能</a:t>
-            </a:r>
-          </a:p>
-        </p:txBody>
-      </p:sp>
-      <p:sp>
-        <p:nvSpPr>
-          <p:cNvPr id="26" name="TextBox 25"/>
-          <p:cNvSpPr txBox="1"/>
-          <p:nvPr/>
-        </p:nvSpPr>
-        <p:spPr>
-          <a:xfrm>
-            <a:off x="8503920" y="3291840"/>
-            <a:ext cx="2926080" cy="2834640"/>
-          </a:xfrm>
-          <a:prstGeom prst="rect">
-            <a:avLst/>
-          </a:prstGeom>
-          <a:noFill/>
-        </p:spPr>
-        <p:txBody>
-          <a:bodyPr wrap="square">
-            <a:spAutoFit/>
-          </a:bodyPr>
-          <a:lstStyle/>
-          <a:p>
-            <a:pPr>
-              <a:spcAft>
-                <a:spcPts val="600"/>
-              </a:spcAft>
-              <a:defRPr sz="1200">
-                <a:solidFill>
-                  <a:srgbClr val="333333"/>
-                </a:solidFill>
-                <a:latin typeface="Meiryo"/>
-              </a:defRPr>
-            </a:pPr>
-            <a:r>
-              <a:t>  ✓  スタンダードの全機能</a:t>
-            </a:r>
-          </a:p>
-          <a:p>
-            <a:pPr>
-              <a:spcAft>
-                <a:spcPts val="600"/>
-              </a:spcAft>
-              <a:defRPr sz="1200">
-                <a:solidFill>
-                  <a:srgbClr val="333333"/>
-                </a:solidFill>
-                <a:latin typeface="Meiryo"/>
-              </a:defRPr>
-            </a:pPr>
-            <a:r>
-              <a:t>  ✓  給与計算・勤怠管理</a:t>
-            </a:r>
-          </a:p>
-          <a:p>
-            <a:pPr>
-              <a:spcAft>
-                <a:spcPts val="600"/>
-              </a:spcAft>
-              <a:defRPr sz="1200">
-                <a:solidFill>
-                  <a:srgbClr val="333333"/>
-                </a:solidFill>
-                <a:latin typeface="Meiryo"/>
-              </a:defRPr>
-            </a:pPr>
-            <a:r>
-              <a:t>  ✓  売上ダッシュボード</a:t>
-            </a:r>
-          </a:p>
-          <a:p>
-            <a:pPr>
-              <a:spcAft>
-                <a:spcPts val="600"/>
-              </a:spcAft>
-              <a:defRPr sz="1200">
-                <a:solidFill>
-                  <a:srgbClr val="333333"/>
-                </a:solidFill>
-                <a:latin typeface="Meiryo"/>
-              </a:defRPr>
-            </a:pPr>
-            <a:r>
-              <a:t>  ✓  多言語対応（7言語）</a:t>
-            </a:r>
-          </a:p>
-          <a:p>
-            <a:pPr>
-              <a:spcAft>
-                <a:spcPts val="600"/>
-              </a:spcAft>
-              <a:defRPr sz="1200">
-                <a:solidFill>
-                  <a:srgbClr val="333333"/>
-                </a:solidFill>
-                <a:latin typeface="Meiryo"/>
-              </a:defRPr>
-            </a:pPr>
-            <a:r>
-              <a:t>  ✓  複数店舗管理</a:t>
-            </a:r>
-          </a:p>
-          <a:p>
-            <a:pPr>
-              <a:spcAft>
-                <a:spcPts val="600"/>
-              </a:spcAft>
-              <a:defRPr sz="1200">
-                <a:solidFill>
-                  <a:srgbClr val="333333"/>
-                </a:solidFill>
-                <a:latin typeface="Meiryo"/>
-              </a:defRPr>
-            </a:pPr>
-            <a:r>
-              <a:t>  ✓  優先サポート</a:t>
-            </a:r>
-          </a:p>
-          <a:p>
-            <a:pPr>
-              <a:spcAft>
-                <a:spcPts val="600"/>
-              </a:spcAft>
-              <a:defRPr sz="1200">
-                <a:solidFill>
-                  <a:srgbClr val="333333"/>
-                </a:solidFill>
-                <a:latin typeface="Meiryo"/>
-              </a:defRPr>
-            </a:pPr>
-            <a:r>
-              <a:t>  ✓  カスタマイズ対応</a:t>
-            </a:r>
-          </a:p>
-        </p:txBody>
-      </p:sp>
-      <p:sp>
-        <p:nvSpPr>
-          <p:cNvPr id="27" name="TextBox 26"/>
-          <p:cNvSpPr txBox="1"/>
-          <p:nvPr/>
-        </p:nvSpPr>
-        <p:spPr>
-          <a:xfrm>
-            <a:off x="731520" y="6400800"/>
-            <a:ext cx="10058400" cy="274320"/>
-          </a:xfrm>
-          <a:prstGeom prst="rect">
-            <a:avLst/>
-          </a:prstGeom>
-          <a:noFill/>
-        </p:spPr>
-        <p:txBody>
-          <a:bodyPr wrap="square">
-            <a:spAutoFit/>
-          </a:bodyPr>
-          <a:lstStyle/>
-          <a:p>
-            <a:pPr algn="l">
-              <a:defRPr sz="1000" b="0">
-                <a:solidFill>
-                  <a:srgbClr val="999999"/>
-                </a:solidFill>
-                <a:latin typeface="Meiryo"/>
-              </a:defRPr>
-            </a:pPr>
-            <a:r>
-              <a:t>※ 初期費用・カスタマイズ費用は別途お見積りとなります。  ※ 表示価格は税別です。</a:t>
+              <a:t>  ✓  ESP32デバイスの接続状態を常時モニタリング</a:t>
             </a:r>
           </a:p>
         </p:txBody>
@@ -10897,7 +8521,7 @@
               </a:defRPr>
             </a:pPr>
             <a:r>
-              <a:t>よくあるご質問</a:t>
+              <a:t>導入メリット</a:t>
             </a:r>
           </a:p>
         </p:txBody>
@@ -10954,8 +8578,8 @@
         </p:nvSpPr>
         <p:spPr>
           <a:xfrm>
-            <a:off x="457200" y="1097280"/>
-            <a:ext cx="11274552" cy="960120"/>
+            <a:off x="457200" y="1188720"/>
+            <a:ext cx="3474720" cy="2286000"/>
           </a:xfrm>
           <a:prstGeom prst="roundRect">
             <a:avLst/>
@@ -10998,8 +8622,8 @@
         </p:nvSpPr>
         <p:spPr>
           <a:xfrm>
-            <a:off x="731520" y="1170432"/>
-            <a:ext cx="10725912" cy="274320"/>
+            <a:off x="640080" y="1325880"/>
+            <a:ext cx="640080" cy="640080"/>
           </a:xfrm>
           <a:prstGeom prst="rect">
             <a:avLst/>
@@ -11012,16 +8636,16 @@
           </a:bodyPr>
           <a:lstStyle/>
           <a:p>
-            <a:pPr algn="l">
-              <a:defRPr sz="1300" b="1">
-                <a:solidFill>
-                  <a:srgbClr val="8C876C"/>
-                </a:solidFill>
-                <a:latin typeface="Meiryo"/>
-              </a:defRPr>
-            </a:pPr>
-            <a:r>
-              <a:t>Q. 導入に必要な機器はありますか？</a:t>
+            <a:pPr algn="ctr">
+              <a:defRPr sz="3000" b="0">
+                <a:solidFill>
+                  <a:srgbClr val="333333"/>
+                </a:solidFill>
+                <a:latin typeface="Meiryo"/>
+              </a:defRPr>
+            </a:pPr>
+            <a:r>
+              <a:t>🛡</a:t>
             </a:r>
           </a:p>
         </p:txBody>
@@ -11034,8 +8658,8 @@
         </p:nvSpPr>
         <p:spPr>
           <a:xfrm>
-            <a:off x="731520" y="1463040"/>
-            <a:ext cx="10725912" cy="548640"/>
+            <a:off x="1280160" y="1371600"/>
+            <a:ext cx="2468880" cy="320040"/>
           </a:xfrm>
           <a:prstGeom prst="rect">
             <a:avLst/>
@@ -11049,33 +8673,69 @@
           <a:lstStyle/>
           <a:p>
             <a:pPr algn="l">
-              <a:defRPr sz="1100" b="0">
-                <a:solidFill>
-                  <a:srgbClr val="333333"/>
-                </a:solidFill>
-                <a:latin typeface="Meiryo"/>
-              </a:defRPr>
-            </a:pPr>
-            <a:r>
-              <a:t>A. いいえ、専用機器は不要です。お手持ちのスマートフォン、タブレット、PCからすぐにご利用いただけます。</a:t>
+              <a:defRPr sz="1600" b="1">
+                <a:solidFill>
+                  <a:srgbClr val="8C876C"/>
+                </a:solidFill>
+                <a:latin typeface="Meiryo"/>
+              </a:defRPr>
+            </a:pPr>
+            <a:r>
+              <a:t>ドタキャン損失ゼロへ</a:t>
+            </a:r>
+          </a:p>
+        </p:txBody>
+      </p:sp>
+      <p:sp>
+        <p:nvSpPr>
+          <p:cNvPr id="7" name="TextBox 6"/>
+          <p:cNvSpPr txBox="1"/>
+          <p:nvPr/>
+        </p:nvSpPr>
+        <p:spPr>
+          <a:xfrm>
+            <a:off x="731520" y="1828800"/>
+            <a:ext cx="2926080" cy="1463040"/>
+          </a:xfrm>
+          <a:prstGeom prst="rect">
+            <a:avLst/>
+          </a:prstGeom>
+          <a:noFill/>
+        </p:spPr>
+        <p:txBody>
+          <a:bodyPr wrap="square">
+            <a:spAutoFit/>
+          </a:bodyPr>
+          <a:lstStyle/>
+          <a:p>
+            <a:pPr algn="l">
+              <a:defRPr sz="1200" b="0">
+                <a:solidFill>
+                  <a:srgbClr val="333333"/>
+                </a:solidFill>
+                <a:latin typeface="Meiryo"/>
+              </a:defRPr>
+            </a:pPr>
+            <a:r>
+              <a:t>前払い予約確定制で無断キャンセルを防止。</a:t>
             </a:r>
             <a:br/>
             <a:r>
-              <a:t>　 テーブル注文のQRコードは、管理画面から生成して印刷するだけです。</a:t>
-            </a:r>
-          </a:p>
-        </p:txBody>
-      </p:sp>
-      <p:sp>
-        <p:nvSpPr>
-          <p:cNvPr id="7" name="Rounded Rectangle 6"/>
+              <a:t>前払い/後払いはワンクリックで切替可能です。</a:t>
+            </a:r>
+          </a:p>
+        </p:txBody>
+      </p:sp>
+      <p:sp>
+        <p:nvSpPr>
+          <p:cNvPr id="8" name="Rounded Rectangle 7"/>
           <p:cNvSpPr/>
           <p:nvPr/>
         </p:nvSpPr>
         <p:spPr>
           <a:xfrm>
-            <a:off x="457200" y="2194560"/>
-            <a:ext cx="11274552" cy="960120"/>
+            <a:off x="4297680" y="1188720"/>
+            <a:ext cx="3474720" cy="2286000"/>
           </a:xfrm>
           <a:prstGeom prst="roundRect">
             <a:avLst/>
@@ -11112,14 +8772,14 @@
       </p:sp>
       <p:sp>
         <p:nvSpPr>
-          <p:cNvPr id="8" name="TextBox 7"/>
+          <p:cNvPr id="9" name="TextBox 8"/>
           <p:cNvSpPr txBox="1"/>
           <p:nvPr/>
         </p:nvSpPr>
         <p:spPr>
           <a:xfrm>
-            <a:off x="731520" y="2267712"/>
-            <a:ext cx="10725912" cy="274320"/>
+            <a:off x="4480560" y="1325880"/>
+            <a:ext cx="640080" cy="640080"/>
           </a:xfrm>
           <a:prstGeom prst="rect">
             <a:avLst/>
@@ -11132,30 +8792,30 @@
           </a:bodyPr>
           <a:lstStyle/>
           <a:p>
-            <a:pPr algn="l">
-              <a:defRPr sz="1300" b="1">
-                <a:solidFill>
-                  <a:srgbClr val="8C876C"/>
-                </a:solidFill>
-                <a:latin typeface="Meiryo"/>
-              </a:defRPr>
-            </a:pPr>
-            <a:r>
-              <a:t>Q. ITに詳しくないスタッフでも使えますか？</a:t>
-            </a:r>
-          </a:p>
-        </p:txBody>
-      </p:sp>
-      <p:sp>
-        <p:nvSpPr>
-          <p:cNvPr id="9" name="TextBox 8"/>
+            <a:pPr algn="ctr">
+              <a:defRPr sz="3000" b="0">
+                <a:solidFill>
+                  <a:srgbClr val="333333"/>
+                </a:solidFill>
+                <a:latin typeface="Meiryo"/>
+              </a:defRPr>
+            </a:pPr>
+            <a:r>
+              <a:t>💬</a:t>
+            </a:r>
+          </a:p>
+        </p:txBody>
+      </p:sp>
+      <p:sp>
+        <p:nvSpPr>
+          <p:cNvPr id="10" name="TextBox 9"/>
           <p:cNvSpPr txBox="1"/>
           <p:nvPr/>
         </p:nvSpPr>
         <p:spPr>
           <a:xfrm>
-            <a:off x="731520" y="2560320"/>
-            <a:ext cx="10725912" cy="548640"/>
+            <a:off x="5120640" y="1371600"/>
+            <a:ext cx="2468880" cy="320040"/>
           </a:xfrm>
           <a:prstGeom prst="rect">
             <a:avLst/>
@@ -11169,33 +8829,69 @@
           <a:lstStyle/>
           <a:p>
             <a:pPr algn="l">
-              <a:defRPr sz="1100" b="0">
-                <a:solidFill>
-                  <a:srgbClr val="333333"/>
-                </a:solidFill>
-                <a:latin typeface="Meiryo"/>
-              </a:defRPr>
-            </a:pPr>
-            <a:r>
-              <a:t>A. はい。スマホが使える方なら直感的に操作できるシンプルな画面設計です。</a:t>
+              <a:defRPr sz="1600" b="1">
+                <a:solidFill>
+                  <a:srgbClr val="8C876C"/>
+                </a:solidFill>
+                <a:latin typeface="Meiryo"/>
+              </a:defRPr>
+            </a:pPr>
+            <a:r>
+              <a:t>LINEで予約がラクラク</a:t>
+            </a:r>
+          </a:p>
+        </p:txBody>
+      </p:sp>
+      <p:sp>
+        <p:nvSpPr>
+          <p:cNvPr id="11" name="TextBox 10"/>
+          <p:cNvSpPr txBox="1"/>
+          <p:nvPr/>
+        </p:nvSpPr>
+        <p:spPr>
+          <a:xfrm>
+            <a:off x="4572000" y="1828800"/>
+            <a:ext cx="2926080" cy="1463040"/>
+          </a:xfrm>
+          <a:prstGeom prst="rect">
+            <a:avLst/>
+          </a:prstGeom>
+          <a:noFill/>
+        </p:spPr>
+        <p:txBody>
+          <a:bodyPr wrap="square">
+            <a:spAutoFit/>
+          </a:bodyPr>
+          <a:lstStyle/>
+          <a:p>
+            <a:pPr algn="l">
+              <a:defRPr sz="1200" b="0">
+                <a:solidFill>
+                  <a:srgbClr val="333333"/>
+                </a:solidFill>
+                <a:latin typeface="Meiryo"/>
+              </a:defRPr>
+            </a:pPr>
+            <a:r>
+              <a:t>お客様はLINEのトーク画面から予約完了。</a:t>
             </a:r>
             <a:br/>
             <a:r>
-              <a:t>　 導入時には操作レクチャーも実施いたします。</a:t>
-            </a:r>
-          </a:p>
-        </p:txBody>
-      </p:sp>
-      <p:sp>
-        <p:nvSpPr>
-          <p:cNvPr id="10" name="Rounded Rectangle 9"/>
+              <a:t>新しいアプリのインストールは一切不要です。</a:t>
+            </a:r>
+          </a:p>
+        </p:txBody>
+      </p:sp>
+      <p:sp>
+        <p:nvSpPr>
+          <p:cNvPr id="12" name="Rounded Rectangle 11"/>
           <p:cNvSpPr/>
           <p:nvPr/>
         </p:nvSpPr>
         <p:spPr>
           <a:xfrm>
-            <a:off x="457200" y="3291840"/>
-            <a:ext cx="11274552" cy="960120"/>
+            <a:off x="8138160" y="1188720"/>
+            <a:ext cx="3474720" cy="2286000"/>
           </a:xfrm>
           <a:prstGeom prst="roundRect">
             <a:avLst/>
@@ -11232,14 +8928,14 @@
       </p:sp>
       <p:sp>
         <p:nvSpPr>
-          <p:cNvPr id="11" name="TextBox 10"/>
+          <p:cNvPr id="13" name="TextBox 12"/>
           <p:cNvSpPr txBox="1"/>
           <p:nvPr/>
         </p:nvSpPr>
         <p:spPr>
           <a:xfrm>
-            <a:off x="731520" y="3364992"/>
-            <a:ext cx="10725912" cy="274320"/>
+            <a:off x="8321040" y="1325880"/>
+            <a:ext cx="640080" cy="640080"/>
           </a:xfrm>
           <a:prstGeom prst="rect">
             <a:avLst/>
@@ -11252,30 +8948,30 @@
           </a:bodyPr>
           <a:lstStyle/>
           <a:p>
-            <a:pPr algn="l">
-              <a:defRPr sz="1300" b="1">
-                <a:solidFill>
-                  <a:srgbClr val="8C876C"/>
-                </a:solidFill>
-                <a:latin typeface="Meiryo"/>
-              </a:defRPr>
-            </a:pPr>
-            <a:r>
-              <a:t>Q. 途中で機能を追加・変更できますか？</a:t>
-            </a:r>
-          </a:p>
-        </p:txBody>
-      </p:sp>
-      <p:sp>
-        <p:nvSpPr>
-          <p:cNvPr id="12" name="TextBox 11"/>
+            <a:pPr algn="ctr">
+              <a:defRPr sz="3000" b="0">
+                <a:solidFill>
+                  <a:srgbClr val="333333"/>
+                </a:solidFill>
+                <a:latin typeface="Meiryo"/>
+              </a:defRPr>
+            </a:pPr>
+            <a:r>
+              <a:t>📈</a:t>
+            </a:r>
+          </a:p>
+        </p:txBody>
+      </p:sp>
+      <p:sp>
+        <p:nvSpPr>
+          <p:cNvPr id="14" name="TextBox 13"/>
           <p:cNvSpPr txBox="1"/>
           <p:nvPr/>
         </p:nvSpPr>
         <p:spPr>
           <a:xfrm>
-            <a:off x="731520" y="3657600"/>
-            <a:ext cx="10725912" cy="548640"/>
+            <a:off x="8961120" y="1371600"/>
+            <a:ext cx="2468880" cy="320040"/>
           </a:xfrm>
           <a:prstGeom prst="rect">
             <a:avLst/>
@@ -11289,33 +8985,69 @@
           <a:lstStyle/>
           <a:p>
             <a:pPr algn="l">
-              <a:defRPr sz="1100" b="0">
-                <a:solidFill>
-                  <a:srgbClr val="333333"/>
-                </a:solidFill>
-                <a:latin typeface="Meiryo"/>
-              </a:defRPr>
-            </a:pPr>
-            <a:r>
-              <a:t>A. はい。プランの変更はいつでも可能です。</a:t>
+              <a:defRPr sz="1600" b="1">
+                <a:solidFill>
+                  <a:srgbClr val="8C876C"/>
+                </a:solidFill>
+                <a:latin typeface="Meiryo"/>
+              </a:defRPr>
+            </a:pPr>
+            <a:r>
+              <a:t>売上アップに貢献</a:t>
+            </a:r>
+          </a:p>
+        </p:txBody>
+      </p:sp>
+      <p:sp>
+        <p:nvSpPr>
+          <p:cNvPr id="15" name="TextBox 14"/>
+          <p:cNvSpPr txBox="1"/>
+          <p:nvPr/>
+        </p:nvSpPr>
+        <p:spPr>
+          <a:xfrm>
+            <a:off x="8412480" y="1828800"/>
+            <a:ext cx="2926080" cy="1463040"/>
+          </a:xfrm>
+          <a:prstGeom prst="rect">
+            <a:avLst/>
+          </a:prstGeom>
+          <a:noFill/>
+        </p:spPr>
+        <p:txBody>
+          <a:bodyPr wrap="square">
+            <a:spAutoFit/>
+          </a:bodyPr>
+          <a:lstStyle/>
+          <a:p>
+            <a:pPr algn="l">
+              <a:defRPr sz="1200" b="0">
+                <a:solidFill>
+                  <a:srgbClr val="333333"/>
+                </a:solidFill>
+                <a:latin typeface="Meiryo"/>
+              </a:defRPr>
+            </a:pPr>
+            <a:r>
+              <a:t>QR注文で追加オーダー率UP。</a:t>
             </a:r>
             <a:br/>
             <a:r>
-              <a:t>　 まずは基本機能からスタートして、必要に応じて機能を追加していくことをおすすめしています。</a:t>
-            </a:r>
-          </a:p>
-        </p:txBody>
-      </p:sp>
-      <p:sp>
-        <p:nvSpPr>
-          <p:cNvPr id="13" name="Rounded Rectangle 12"/>
+              <a:t>多言語対応でインバウンド客も取りこぼしません。</a:t>
+            </a:r>
+          </a:p>
+        </p:txBody>
+      </p:sp>
+      <p:sp>
+        <p:nvSpPr>
+          <p:cNvPr id="16" name="Rounded Rectangle 15"/>
           <p:cNvSpPr/>
           <p:nvPr/>
         </p:nvSpPr>
         <p:spPr>
           <a:xfrm>
-            <a:off x="457200" y="4389120"/>
-            <a:ext cx="11274552" cy="960120"/>
+            <a:off x="457200" y="3840480"/>
+            <a:ext cx="3474720" cy="2286000"/>
           </a:xfrm>
           <a:prstGeom prst="roundRect">
             <a:avLst/>
@@ -11352,14 +9084,14 @@
       </p:sp>
       <p:sp>
         <p:nvSpPr>
-          <p:cNvPr id="14" name="TextBox 13"/>
+          <p:cNvPr id="17" name="TextBox 16"/>
           <p:cNvSpPr txBox="1"/>
           <p:nvPr/>
         </p:nvSpPr>
         <p:spPr>
           <a:xfrm>
-            <a:off x="731520" y="4462272"/>
-            <a:ext cx="10725912" cy="274320"/>
+            <a:off x="640080" y="3977640"/>
+            <a:ext cx="640080" cy="640080"/>
           </a:xfrm>
           <a:prstGeom prst="rect">
             <a:avLst/>
@@ -11372,30 +9104,30 @@
           </a:bodyPr>
           <a:lstStyle/>
           <a:p>
-            <a:pPr algn="l">
-              <a:defRPr sz="1300" b="1">
-                <a:solidFill>
-                  <a:srgbClr val="8C876C"/>
-                </a:solidFill>
-                <a:latin typeface="Meiryo"/>
-              </a:defRPr>
-            </a:pPr>
-            <a:r>
-              <a:t>Q. データのセキュリティは大丈夫ですか？</a:t>
-            </a:r>
-          </a:p>
-        </p:txBody>
-      </p:sp>
-      <p:sp>
-        <p:nvSpPr>
-          <p:cNvPr id="15" name="TextBox 14"/>
+            <a:pPr algn="ctr">
+              <a:defRPr sz="3000" b="0">
+                <a:solidFill>
+                  <a:srgbClr val="333333"/>
+                </a:solidFill>
+                <a:latin typeface="Meiryo"/>
+              </a:defRPr>
+            </a:pPr>
+            <a:r>
+              <a:t>⏱</a:t>
+            </a:r>
+          </a:p>
+        </p:txBody>
+      </p:sp>
+      <p:sp>
+        <p:nvSpPr>
+          <p:cNvPr id="18" name="TextBox 17"/>
           <p:cNvSpPr txBox="1"/>
           <p:nvPr/>
         </p:nvSpPr>
         <p:spPr>
           <a:xfrm>
-            <a:off x="731520" y="4754880"/>
-            <a:ext cx="10725912" cy="548640"/>
+            <a:off x="1280160" y="4023360"/>
+            <a:ext cx="2468880" cy="320040"/>
           </a:xfrm>
           <a:prstGeom prst="rect">
             <a:avLst/>
@@ -11409,33 +9141,69 @@
           <a:lstStyle/>
           <a:p>
             <a:pPr algn="l">
-              <a:defRPr sz="1100" b="0">
-                <a:solidFill>
-                  <a:srgbClr val="333333"/>
-                </a:solidFill>
-                <a:latin typeface="Meiryo"/>
-              </a:defRPr>
-            </a:pPr>
-            <a:r>
-              <a:t>A. お客様の個人情報は暗号化して保管しています。通信はすべてSSL暗号化で保護されており、</a:t>
+              <a:defRPr sz="1600" b="1">
+                <a:solidFill>
+                  <a:srgbClr val="8C876C"/>
+                </a:solidFill>
+                <a:latin typeface="Meiryo"/>
+              </a:defRPr>
+            </a:pPr>
+            <a:r>
+              <a:t>業務時間を大幅削減</a:t>
+            </a:r>
+          </a:p>
+        </p:txBody>
+      </p:sp>
+      <p:sp>
+        <p:nvSpPr>
+          <p:cNvPr id="19" name="TextBox 18"/>
+          <p:cNvSpPr txBox="1"/>
+          <p:nvPr/>
+        </p:nvSpPr>
+        <p:spPr>
+          <a:xfrm>
+            <a:off x="731520" y="4480560"/>
+            <a:ext cx="2926080" cy="1463040"/>
+          </a:xfrm>
+          <a:prstGeom prst="rect">
+            <a:avLst/>
+          </a:prstGeom>
+          <a:noFill/>
+        </p:spPr>
+        <p:txBody>
+          <a:bodyPr wrap="square">
+            <a:spAutoFit/>
+          </a:bodyPr>
+          <a:lstStyle/>
+          <a:p>
+            <a:pPr algn="l">
+              <a:defRPr sz="1200" b="0">
+                <a:solidFill>
+                  <a:srgbClr val="333333"/>
+                </a:solidFill>
+                <a:latin typeface="Meiryo"/>
+              </a:defRPr>
+            </a:pPr>
+            <a:r>
+              <a:t>予約受付・注文・シフト管理・給与計算を自動化。</a:t>
             </a:r>
             <a:br/>
             <a:r>
-              <a:t>　 クレジットカード情報は外部の決済サービス（PCI DSS準拠）で処理するため、店舗側にカード情報は残りません。</a:t>
-            </a:r>
-          </a:p>
-        </p:txBody>
-      </p:sp>
-      <p:sp>
-        <p:nvSpPr>
-          <p:cNvPr id="16" name="Rounded Rectangle 15"/>
+              <a:t>スタッフが接客に集中できる環境を作ります。</a:t>
+            </a:r>
+          </a:p>
+        </p:txBody>
+      </p:sp>
+      <p:sp>
+        <p:nvSpPr>
+          <p:cNvPr id="20" name="Rounded Rectangle 19"/>
           <p:cNvSpPr/>
           <p:nvPr/>
         </p:nvSpPr>
         <p:spPr>
           <a:xfrm>
-            <a:off x="457200" y="5486400"/>
-            <a:ext cx="11274552" cy="960120"/>
+            <a:off x="4297680" y="3840480"/>
+            <a:ext cx="3474720" cy="2286000"/>
           </a:xfrm>
           <a:prstGeom prst="roundRect">
             <a:avLst/>
@@ -11472,14 +9240,14 @@
       </p:sp>
       <p:sp>
         <p:nvSpPr>
-          <p:cNvPr id="17" name="TextBox 16"/>
+          <p:cNvPr id="21" name="TextBox 20"/>
           <p:cNvSpPr txBox="1"/>
           <p:nvPr/>
         </p:nvSpPr>
         <p:spPr>
           <a:xfrm>
-            <a:off x="731520" y="5559552"/>
-            <a:ext cx="10725912" cy="274320"/>
+            <a:off x="4480560" y="3977640"/>
+            <a:ext cx="640080" cy="640080"/>
           </a:xfrm>
           <a:prstGeom prst="rect">
             <a:avLst/>
@@ -11492,30 +9260,30 @@
           </a:bodyPr>
           <a:lstStyle/>
           <a:p>
-            <a:pPr algn="l">
-              <a:defRPr sz="1300" b="1">
-                <a:solidFill>
-                  <a:srgbClr val="8C876C"/>
-                </a:solidFill>
-                <a:latin typeface="Meiryo"/>
-              </a:defRPr>
-            </a:pPr>
-            <a:r>
-              <a:t>Q. 複数店舗で使えますか？</a:t>
-            </a:r>
-          </a:p>
-        </p:txBody>
-      </p:sp>
-      <p:sp>
-        <p:nvSpPr>
-          <p:cNvPr id="18" name="TextBox 17"/>
+            <a:pPr algn="ctr">
+              <a:defRPr sz="3000" b="0">
+                <a:solidFill>
+                  <a:srgbClr val="333333"/>
+                </a:solidFill>
+                <a:latin typeface="Meiryo"/>
+              </a:defRPr>
+            </a:pPr>
+            <a:r>
+              <a:t>💰</a:t>
+            </a:r>
+          </a:p>
+        </p:txBody>
+      </p:sp>
+      <p:sp>
+        <p:nvSpPr>
+          <p:cNvPr id="22" name="TextBox 21"/>
           <p:cNvSpPr txBox="1"/>
           <p:nvPr/>
         </p:nvSpPr>
         <p:spPr>
           <a:xfrm>
-            <a:off x="731520" y="5852160"/>
-            <a:ext cx="10725912" cy="548640"/>
+            <a:off x="5120640" y="4023360"/>
+            <a:ext cx="2468880" cy="320040"/>
           </a:xfrm>
           <a:prstGeom prst="rect">
             <a:avLst/>
@@ -11529,19 +9297,211 @@
           <a:lstStyle/>
           <a:p>
             <a:pPr algn="l">
-              <a:defRPr sz="1100" b="0">
-                <a:solidFill>
-                  <a:srgbClr val="333333"/>
-                </a:solidFill>
-                <a:latin typeface="Meiryo"/>
-              </a:defRPr>
-            </a:pPr>
-            <a:r>
-              <a:t>A. はい。プレミアムプランでは複数店舗を一元管理できます。</a:t>
+              <a:defRPr sz="1600" b="1">
+                <a:solidFill>
+                  <a:srgbClr val="8C876C"/>
+                </a:solidFill>
+                <a:latin typeface="Meiryo"/>
+              </a:defRPr>
+            </a:pPr>
+            <a:r>
+              <a:t>コスト削減</a:t>
+            </a:r>
+          </a:p>
+        </p:txBody>
+      </p:sp>
+      <p:sp>
+        <p:nvSpPr>
+          <p:cNvPr id="23" name="TextBox 22"/>
+          <p:cNvSpPr txBox="1"/>
+          <p:nvPr/>
+        </p:nvSpPr>
+        <p:spPr>
+          <a:xfrm>
+            <a:off x="4572000" y="4480560"/>
+            <a:ext cx="2926080" cy="1463040"/>
+          </a:xfrm>
+          <a:prstGeom prst="rect">
+            <a:avLst/>
+          </a:prstGeom>
+          <a:noFill/>
+        </p:spPr>
+        <p:txBody>
+          <a:bodyPr wrap="square">
+            <a:spAutoFit/>
+          </a:bodyPr>
+          <a:lstStyle/>
+          <a:p>
+            <a:pPr algn="l">
+              <a:defRPr sz="1200" b="0">
+                <a:solidFill>
+                  <a:srgbClr val="333333"/>
+                </a:solidFill>
+                <a:latin typeface="Meiryo"/>
+              </a:defRPr>
+            </a:pPr>
+            <a:r>
+              <a:t>予約台帳・注文伝票・タイムカード…</a:t>
             </a:r>
             <a:br/>
             <a:r>
-              <a:t>　 店舗ごとにスタッフや在庫を分けて管理しながら、全体の売上をまとめて確認できます。</a:t>
+              <a:t>紙のコストと手間をゼロにします。</a:t>
+            </a:r>
+          </a:p>
+        </p:txBody>
+      </p:sp>
+      <p:sp>
+        <p:nvSpPr>
+          <p:cNvPr id="24" name="Rounded Rectangle 23"/>
+          <p:cNvSpPr/>
+          <p:nvPr/>
+        </p:nvSpPr>
+        <p:spPr>
+          <a:xfrm>
+            <a:off x="8138160" y="3840480"/>
+            <a:ext cx="3474720" cy="2286000"/>
+          </a:xfrm>
+          <a:prstGeom prst="roundRect">
+            <a:avLst/>
+          </a:prstGeom>
+          <a:solidFill>
+            <a:srgbClr val="FFFFFF"/>
+          </a:solidFill>
+          <a:ln>
+            <a:noFill/>
+          </a:ln>
+          <a:effectLst/>
+        </p:spPr>
+        <p:style>
+          <a:lnRef idx="1">
+            <a:schemeClr val="accent1"/>
+          </a:lnRef>
+          <a:fillRef idx="3">
+            <a:schemeClr val="accent1"/>
+          </a:fillRef>
+          <a:effectRef idx="2">
+            <a:schemeClr val="accent1"/>
+          </a:effectRef>
+          <a:fontRef idx="minor">
+            <a:schemeClr val="lt1"/>
+          </a:fontRef>
+        </p:style>
+        <p:txBody>
+          <a:bodyPr rtlCol="0" anchor="ctr"/>
+          <a:lstStyle/>
+          <a:p>
+            <a:pPr algn="ctr"/>
+          </a:p>
+        </p:txBody>
+      </p:sp>
+      <p:sp>
+        <p:nvSpPr>
+          <p:cNvPr id="25" name="TextBox 24"/>
+          <p:cNvSpPr txBox="1"/>
+          <p:nvPr/>
+        </p:nvSpPr>
+        <p:spPr>
+          <a:xfrm>
+            <a:off x="8321040" y="3977640"/>
+            <a:ext cx="640080" cy="640080"/>
+          </a:xfrm>
+          <a:prstGeom prst="rect">
+            <a:avLst/>
+          </a:prstGeom>
+          <a:noFill/>
+        </p:spPr>
+        <p:txBody>
+          <a:bodyPr wrap="square">
+            <a:spAutoFit/>
+          </a:bodyPr>
+          <a:lstStyle/>
+          <a:p>
+            <a:pPr algn="ctr">
+              <a:defRPr sz="3000" b="0">
+                <a:solidFill>
+                  <a:srgbClr val="333333"/>
+                </a:solidFill>
+                <a:latin typeface="Meiryo"/>
+              </a:defRPr>
+            </a:pPr>
+            <a:r>
+              <a:t>📊</a:t>
+            </a:r>
+          </a:p>
+        </p:txBody>
+      </p:sp>
+      <p:sp>
+        <p:nvSpPr>
+          <p:cNvPr id="26" name="TextBox 25"/>
+          <p:cNvSpPr txBox="1"/>
+          <p:nvPr/>
+        </p:nvSpPr>
+        <p:spPr>
+          <a:xfrm>
+            <a:off x="8961120" y="4023360"/>
+            <a:ext cx="2468880" cy="320040"/>
+          </a:xfrm>
+          <a:prstGeom prst="rect">
+            <a:avLst/>
+          </a:prstGeom>
+          <a:noFill/>
+        </p:spPr>
+        <p:txBody>
+          <a:bodyPr wrap="square">
+            <a:spAutoFit/>
+          </a:bodyPr>
+          <a:lstStyle/>
+          <a:p>
+            <a:pPr algn="l">
+              <a:defRPr sz="1600" b="1">
+                <a:solidFill>
+                  <a:srgbClr val="8C876C"/>
+                </a:solidFill>
+                <a:latin typeface="Meiryo"/>
+              </a:defRPr>
+            </a:pPr>
+            <a:r>
+              <a:t>データで経営判断</a:t>
+            </a:r>
+          </a:p>
+        </p:txBody>
+      </p:sp>
+      <p:sp>
+        <p:nvSpPr>
+          <p:cNvPr id="27" name="TextBox 26"/>
+          <p:cNvSpPr txBox="1"/>
+          <p:nvPr/>
+        </p:nvSpPr>
+        <p:spPr>
+          <a:xfrm>
+            <a:off x="8412480" y="4480560"/>
+            <a:ext cx="2926080" cy="1463040"/>
+          </a:xfrm>
+          <a:prstGeom prst="rect">
+            <a:avLst/>
+          </a:prstGeom>
+          <a:noFill/>
+        </p:spPr>
+        <p:txBody>
+          <a:bodyPr wrap="square">
+            <a:spAutoFit/>
+          </a:bodyPr>
+          <a:lstStyle/>
+          <a:p>
+            <a:pPr algn="l">
+              <a:defRPr sz="1200" b="0">
+                <a:solidFill>
+                  <a:srgbClr val="333333"/>
+                </a:solidFill>
+                <a:latin typeface="Meiryo"/>
+              </a:defRPr>
+            </a:pPr>
+            <a:r>
+              <a:t>売上・予約・スタッフ実績をダッシュボードで可視化。</a:t>
+            </a:r>
+            <a:br/>
+            <a:r>
+              <a:t>データに基づいた意思決定をサポートします。</a:t>
             </a:r>
           </a:p>
         </p:txBody>
@@ -11555,6 +9515,2988 @@
 </file>
 
 <file path=ppt/slides/slide25.xml><?xml version="1.0" encoding="utf-8"?>
+<p:sld xmlns:a="http://schemas.openxmlformats.org/drawingml/2006/main" xmlns:p="http://schemas.openxmlformats.org/presentationml/2006/main" xmlns:r="http://schemas.openxmlformats.org/officeDocument/2006/relationships">
+  <p:cSld>
+    <p:bg>
+      <p:bgPr>
+        <a:solidFill>
+          <a:srgbClr val="FFFFFF"/>
+        </a:solidFill>
+        <a:effectLst/>
+      </p:bgPr>
+    </p:bg>
+    <p:spTree>
+      <p:nvGrpSpPr>
+        <p:cNvPr id="1" name=""/>
+        <p:cNvGrpSpPr/>
+        <p:nvPr/>
+      </p:nvGrpSpPr>
+      <p:grpSpPr/>
+      <p:sp>
+        <p:nvSpPr>
+          <p:cNvPr id="2" name="TextBox 1"/>
+          <p:cNvSpPr txBox="1"/>
+          <p:nvPr/>
+        </p:nvSpPr>
+        <p:spPr>
+          <a:xfrm>
+            <a:off x="731520" y="274320"/>
+            <a:ext cx="10058400" cy="457200"/>
+          </a:xfrm>
+          <a:prstGeom prst="rect">
+            <a:avLst/>
+          </a:prstGeom>
+          <a:noFill/>
+        </p:spPr>
+        <p:txBody>
+          <a:bodyPr wrap="square">
+            <a:spAutoFit/>
+          </a:bodyPr>
+          <a:lstStyle/>
+          <a:p>
+            <a:pPr algn="l">
+              <a:defRPr sz="3200" b="1">
+                <a:solidFill>
+                  <a:srgbClr val="8C876C"/>
+                </a:solidFill>
+                <a:latin typeface="Meiryo"/>
+              </a:defRPr>
+            </a:pPr>
+            <a:r>
+              <a:t>ご利用開始までの流れ</a:t>
+            </a:r>
+          </a:p>
+        </p:txBody>
+      </p:sp>
+      <p:sp>
+        <p:nvSpPr>
+          <p:cNvPr id="3" name="Rectangle 2"/>
+          <p:cNvSpPr/>
+          <p:nvPr/>
+        </p:nvSpPr>
+        <p:spPr>
+          <a:xfrm>
+            <a:off x="731520" y="822960"/>
+            <a:ext cx="2743200" cy="36576"/>
+          </a:xfrm>
+          <a:prstGeom prst="rect">
+            <a:avLst/>
+          </a:prstGeom>
+          <a:solidFill>
+            <a:srgbClr val="8C876C"/>
+          </a:solidFill>
+          <a:ln>
+            <a:noFill/>
+          </a:ln>
+          <a:effectLst/>
+        </p:spPr>
+        <p:style>
+          <a:lnRef idx="1">
+            <a:schemeClr val="accent1"/>
+          </a:lnRef>
+          <a:fillRef idx="3">
+            <a:schemeClr val="accent1"/>
+          </a:fillRef>
+          <a:effectRef idx="2">
+            <a:schemeClr val="accent1"/>
+          </a:effectRef>
+          <a:fontRef idx="minor">
+            <a:schemeClr val="lt1"/>
+          </a:fontRef>
+        </p:style>
+        <p:txBody>
+          <a:bodyPr rtlCol="0" anchor="ctr"/>
+          <a:lstStyle/>
+          <a:p>
+            <a:pPr algn="ctr"/>
+          </a:p>
+        </p:txBody>
+      </p:sp>
+      <p:sp>
+        <p:nvSpPr>
+          <p:cNvPr id="4" name="Oval 3"/>
+          <p:cNvSpPr/>
+          <p:nvPr/>
+        </p:nvSpPr>
+        <p:spPr>
+          <a:xfrm>
+            <a:off x="960120" y="1463040"/>
+            <a:ext cx="1005840" cy="1005840"/>
+          </a:xfrm>
+          <a:prstGeom prst="ellipse">
+            <a:avLst/>
+          </a:prstGeom>
+          <a:solidFill>
+            <a:srgbClr val="8C876C"/>
+          </a:solidFill>
+          <a:ln>
+            <a:noFill/>
+          </a:ln>
+        </p:spPr>
+        <p:style>
+          <a:lnRef idx="1">
+            <a:schemeClr val="accent1"/>
+          </a:lnRef>
+          <a:fillRef idx="3">
+            <a:schemeClr val="accent1"/>
+          </a:fillRef>
+          <a:effectRef idx="2">
+            <a:schemeClr val="accent1"/>
+          </a:effectRef>
+          <a:fontRef idx="minor">
+            <a:schemeClr val="lt1"/>
+          </a:fontRef>
+        </p:style>
+        <p:txBody>
+          <a:bodyPr rtlCol="0" anchor="ctr" wrap="square"/>
+          <a:lstStyle/>
+          <a:p>
+            <a:pPr algn="ctr">
+              <a:defRPr sz="1400" b="1">
+                <a:solidFill>
+                  <a:srgbClr val="FFFFFF"/>
+                </a:solidFill>
+                <a:latin typeface="Meiryo"/>
+              </a:defRPr>
+            </a:pPr>
+            <a:r>
+              <a:t>STEP 1</a:t>
+            </a:r>
+          </a:p>
+        </p:txBody>
+      </p:sp>
+      <p:sp>
+        <p:nvSpPr>
+          <p:cNvPr id="5" name="TextBox 4"/>
+          <p:cNvSpPr txBox="1"/>
+          <p:nvPr/>
+        </p:nvSpPr>
+        <p:spPr>
+          <a:xfrm>
+            <a:off x="2103120" y="1645920"/>
+            <a:ext cx="548640" cy="548640"/>
+          </a:xfrm>
+          <a:prstGeom prst="rect">
+            <a:avLst/>
+          </a:prstGeom>
+          <a:noFill/>
+        </p:spPr>
+        <p:txBody>
+          <a:bodyPr wrap="square">
+            <a:spAutoFit/>
+          </a:bodyPr>
+          <a:lstStyle/>
+          <a:p>
+            <a:pPr algn="ctr">
+              <a:defRPr sz="2800" b="0">
+                <a:solidFill>
+                  <a:srgbClr val="8C876C"/>
+                </a:solidFill>
+                <a:latin typeface="Meiryo"/>
+              </a:defRPr>
+            </a:pPr>
+            <a:r>
+              <a:t>→</a:t>
+            </a:r>
+          </a:p>
+        </p:txBody>
+      </p:sp>
+      <p:sp>
+        <p:nvSpPr>
+          <p:cNvPr id="6" name="TextBox 5"/>
+          <p:cNvSpPr txBox="1"/>
+          <p:nvPr/>
+        </p:nvSpPr>
+        <p:spPr>
+          <a:xfrm>
+            <a:off x="457200" y="2651760"/>
+            <a:ext cx="2011680" cy="365760"/>
+          </a:xfrm>
+          <a:prstGeom prst="rect">
+            <a:avLst/>
+          </a:prstGeom>
+          <a:noFill/>
+        </p:spPr>
+        <p:txBody>
+          <a:bodyPr wrap="square">
+            <a:spAutoFit/>
+          </a:bodyPr>
+          <a:lstStyle/>
+          <a:p>
+            <a:pPr algn="ctr">
+              <a:defRPr sz="1600" b="1">
+                <a:solidFill>
+                  <a:srgbClr val="333333"/>
+                </a:solidFill>
+                <a:latin typeface="Meiryo"/>
+              </a:defRPr>
+            </a:pPr>
+            <a:r>
+              <a:t>お問い合わせ</a:t>
+            </a:r>
+          </a:p>
+        </p:txBody>
+      </p:sp>
+      <p:sp>
+        <p:nvSpPr>
+          <p:cNvPr id="7" name="TextBox 6"/>
+          <p:cNvSpPr txBox="1"/>
+          <p:nvPr/>
+        </p:nvSpPr>
+        <p:spPr>
+          <a:xfrm>
+            <a:off x="457200" y="3108960"/>
+            <a:ext cx="2011680" cy="1097280"/>
+          </a:xfrm>
+          <a:prstGeom prst="rect">
+            <a:avLst/>
+          </a:prstGeom>
+          <a:noFill/>
+        </p:spPr>
+        <p:txBody>
+          <a:bodyPr wrap="square">
+            <a:spAutoFit/>
+          </a:bodyPr>
+          <a:lstStyle/>
+          <a:p>
+            <a:pPr algn="ctr">
+              <a:defRPr sz="1200" b="0">
+                <a:solidFill>
+                  <a:srgbClr val="999999"/>
+                </a:solidFill>
+                <a:latin typeface="Meiryo"/>
+              </a:defRPr>
+            </a:pPr>
+            <a:r>
+              <a:t>お電話またはフォームから</a:t>
+            </a:r>
+            <a:br/>
+            <a:r>
+              <a:t>お気軽にご連絡ください</a:t>
+            </a:r>
+          </a:p>
+        </p:txBody>
+      </p:sp>
+      <p:sp>
+        <p:nvSpPr>
+          <p:cNvPr id="8" name="Oval 7"/>
+          <p:cNvSpPr/>
+          <p:nvPr/>
+        </p:nvSpPr>
+        <p:spPr>
+          <a:xfrm>
+            <a:off x="3246120" y="1463040"/>
+            <a:ext cx="1005840" cy="1005840"/>
+          </a:xfrm>
+          <a:prstGeom prst="ellipse">
+            <a:avLst/>
+          </a:prstGeom>
+          <a:solidFill>
+            <a:srgbClr val="8C876C"/>
+          </a:solidFill>
+          <a:ln>
+            <a:noFill/>
+          </a:ln>
+        </p:spPr>
+        <p:style>
+          <a:lnRef idx="1">
+            <a:schemeClr val="accent1"/>
+          </a:lnRef>
+          <a:fillRef idx="3">
+            <a:schemeClr val="accent1"/>
+          </a:fillRef>
+          <a:effectRef idx="2">
+            <a:schemeClr val="accent1"/>
+          </a:effectRef>
+          <a:fontRef idx="minor">
+            <a:schemeClr val="lt1"/>
+          </a:fontRef>
+        </p:style>
+        <p:txBody>
+          <a:bodyPr rtlCol="0" anchor="ctr" wrap="square"/>
+          <a:lstStyle/>
+          <a:p>
+            <a:pPr algn="ctr">
+              <a:defRPr sz="1400" b="1">
+                <a:solidFill>
+                  <a:srgbClr val="FFFFFF"/>
+                </a:solidFill>
+                <a:latin typeface="Meiryo"/>
+              </a:defRPr>
+            </a:pPr>
+            <a:r>
+              <a:t>STEP 2</a:t>
+            </a:r>
+          </a:p>
+        </p:txBody>
+      </p:sp>
+      <p:sp>
+        <p:nvSpPr>
+          <p:cNvPr id="9" name="TextBox 8"/>
+          <p:cNvSpPr txBox="1"/>
+          <p:nvPr/>
+        </p:nvSpPr>
+        <p:spPr>
+          <a:xfrm>
+            <a:off x="4389120" y="1645920"/>
+            <a:ext cx="548640" cy="548640"/>
+          </a:xfrm>
+          <a:prstGeom prst="rect">
+            <a:avLst/>
+          </a:prstGeom>
+          <a:noFill/>
+        </p:spPr>
+        <p:txBody>
+          <a:bodyPr wrap="square">
+            <a:spAutoFit/>
+          </a:bodyPr>
+          <a:lstStyle/>
+          <a:p>
+            <a:pPr algn="ctr">
+              <a:defRPr sz="2800" b="0">
+                <a:solidFill>
+                  <a:srgbClr val="8C876C"/>
+                </a:solidFill>
+                <a:latin typeface="Meiryo"/>
+              </a:defRPr>
+            </a:pPr>
+            <a:r>
+              <a:t>→</a:t>
+            </a:r>
+          </a:p>
+        </p:txBody>
+      </p:sp>
+      <p:sp>
+        <p:nvSpPr>
+          <p:cNvPr id="10" name="TextBox 9"/>
+          <p:cNvSpPr txBox="1"/>
+          <p:nvPr/>
+        </p:nvSpPr>
+        <p:spPr>
+          <a:xfrm>
+            <a:off x="2743200" y="2651760"/>
+            <a:ext cx="2011680" cy="365760"/>
+          </a:xfrm>
+          <a:prstGeom prst="rect">
+            <a:avLst/>
+          </a:prstGeom>
+          <a:noFill/>
+        </p:spPr>
+        <p:txBody>
+          <a:bodyPr wrap="square">
+            <a:spAutoFit/>
+          </a:bodyPr>
+          <a:lstStyle/>
+          <a:p>
+            <a:pPr algn="ctr">
+              <a:defRPr sz="1600" b="1">
+                <a:solidFill>
+                  <a:srgbClr val="333333"/>
+                </a:solidFill>
+                <a:latin typeface="Meiryo"/>
+              </a:defRPr>
+            </a:pPr>
+            <a:r>
+              <a:t>ヒアリング</a:t>
+            </a:r>
+          </a:p>
+        </p:txBody>
+      </p:sp>
+      <p:sp>
+        <p:nvSpPr>
+          <p:cNvPr id="11" name="TextBox 10"/>
+          <p:cNvSpPr txBox="1"/>
+          <p:nvPr/>
+        </p:nvSpPr>
+        <p:spPr>
+          <a:xfrm>
+            <a:off x="2743200" y="3108960"/>
+            <a:ext cx="2011680" cy="1097280"/>
+          </a:xfrm>
+          <a:prstGeom prst="rect">
+            <a:avLst/>
+          </a:prstGeom>
+          <a:noFill/>
+        </p:spPr>
+        <p:txBody>
+          <a:bodyPr wrap="square">
+            <a:spAutoFit/>
+          </a:bodyPr>
+          <a:lstStyle/>
+          <a:p>
+            <a:pPr algn="ctr">
+              <a:defRPr sz="1200" b="0">
+                <a:solidFill>
+                  <a:srgbClr val="999999"/>
+                </a:solidFill>
+                <a:latin typeface="Meiryo"/>
+              </a:defRPr>
+            </a:pPr>
+            <a:r>
+              <a:t>現在の業務フローや</a:t>
+            </a:r>
+            <a:br/>
+            <a:r>
+              <a:t>課題をお伺いします</a:t>
+            </a:r>
+          </a:p>
+        </p:txBody>
+      </p:sp>
+      <p:sp>
+        <p:nvSpPr>
+          <p:cNvPr id="12" name="Oval 11"/>
+          <p:cNvSpPr/>
+          <p:nvPr/>
+        </p:nvSpPr>
+        <p:spPr>
+          <a:xfrm>
+            <a:off x="5532120" y="1463040"/>
+            <a:ext cx="1005840" cy="1005840"/>
+          </a:xfrm>
+          <a:prstGeom prst="ellipse">
+            <a:avLst/>
+          </a:prstGeom>
+          <a:solidFill>
+            <a:srgbClr val="8C876C"/>
+          </a:solidFill>
+          <a:ln>
+            <a:noFill/>
+          </a:ln>
+        </p:spPr>
+        <p:style>
+          <a:lnRef idx="1">
+            <a:schemeClr val="accent1"/>
+          </a:lnRef>
+          <a:fillRef idx="3">
+            <a:schemeClr val="accent1"/>
+          </a:fillRef>
+          <a:effectRef idx="2">
+            <a:schemeClr val="accent1"/>
+          </a:effectRef>
+          <a:fontRef idx="minor">
+            <a:schemeClr val="lt1"/>
+          </a:fontRef>
+        </p:style>
+        <p:txBody>
+          <a:bodyPr rtlCol="0" anchor="ctr" wrap="square"/>
+          <a:lstStyle/>
+          <a:p>
+            <a:pPr algn="ctr">
+              <a:defRPr sz="1400" b="1">
+                <a:solidFill>
+                  <a:srgbClr val="FFFFFF"/>
+                </a:solidFill>
+                <a:latin typeface="Meiryo"/>
+              </a:defRPr>
+            </a:pPr>
+            <a:r>
+              <a:t>STEP 3</a:t>
+            </a:r>
+          </a:p>
+        </p:txBody>
+      </p:sp>
+      <p:sp>
+        <p:nvSpPr>
+          <p:cNvPr id="13" name="TextBox 12"/>
+          <p:cNvSpPr txBox="1"/>
+          <p:nvPr/>
+        </p:nvSpPr>
+        <p:spPr>
+          <a:xfrm>
+            <a:off x="6675120" y="1645920"/>
+            <a:ext cx="548640" cy="548640"/>
+          </a:xfrm>
+          <a:prstGeom prst="rect">
+            <a:avLst/>
+          </a:prstGeom>
+          <a:noFill/>
+        </p:spPr>
+        <p:txBody>
+          <a:bodyPr wrap="square">
+            <a:spAutoFit/>
+          </a:bodyPr>
+          <a:lstStyle/>
+          <a:p>
+            <a:pPr algn="ctr">
+              <a:defRPr sz="2800" b="0">
+                <a:solidFill>
+                  <a:srgbClr val="8C876C"/>
+                </a:solidFill>
+                <a:latin typeface="Meiryo"/>
+              </a:defRPr>
+            </a:pPr>
+            <a:r>
+              <a:t>→</a:t>
+            </a:r>
+          </a:p>
+        </p:txBody>
+      </p:sp>
+      <p:sp>
+        <p:nvSpPr>
+          <p:cNvPr id="14" name="TextBox 13"/>
+          <p:cNvSpPr txBox="1"/>
+          <p:nvPr/>
+        </p:nvSpPr>
+        <p:spPr>
+          <a:xfrm>
+            <a:off x="5029200" y="2651760"/>
+            <a:ext cx="2011680" cy="365760"/>
+          </a:xfrm>
+          <a:prstGeom prst="rect">
+            <a:avLst/>
+          </a:prstGeom>
+          <a:noFill/>
+        </p:spPr>
+        <p:txBody>
+          <a:bodyPr wrap="square">
+            <a:spAutoFit/>
+          </a:bodyPr>
+          <a:lstStyle/>
+          <a:p>
+            <a:pPr algn="ctr">
+              <a:defRPr sz="1600" b="1">
+                <a:solidFill>
+                  <a:srgbClr val="333333"/>
+                </a:solidFill>
+                <a:latin typeface="Meiryo"/>
+              </a:defRPr>
+            </a:pPr>
+            <a:r>
+              <a:t>デモ・お見積り</a:t>
+            </a:r>
+          </a:p>
+        </p:txBody>
+      </p:sp>
+      <p:sp>
+        <p:nvSpPr>
+          <p:cNvPr id="15" name="TextBox 14"/>
+          <p:cNvSpPr txBox="1"/>
+          <p:nvPr/>
+        </p:nvSpPr>
+        <p:spPr>
+          <a:xfrm>
+            <a:off x="5029200" y="3108960"/>
+            <a:ext cx="2011680" cy="1097280"/>
+          </a:xfrm>
+          <a:prstGeom prst="rect">
+            <a:avLst/>
+          </a:prstGeom>
+          <a:noFill/>
+        </p:spPr>
+        <p:txBody>
+          <a:bodyPr wrap="square">
+            <a:spAutoFit/>
+          </a:bodyPr>
+          <a:lstStyle/>
+          <a:p>
+            <a:pPr algn="ctr">
+              <a:defRPr sz="1200" b="0">
+                <a:solidFill>
+                  <a:srgbClr val="999999"/>
+                </a:solidFill>
+                <a:latin typeface="Meiryo"/>
+              </a:defRPr>
+            </a:pPr>
+            <a:r>
+              <a:t>実際の画面をお見せしながら</a:t>
+            </a:r>
+            <a:br/>
+            <a:r>
+              <a:t>最適なプランをご提案</a:t>
+            </a:r>
+          </a:p>
+        </p:txBody>
+      </p:sp>
+      <p:sp>
+        <p:nvSpPr>
+          <p:cNvPr id="16" name="Oval 15"/>
+          <p:cNvSpPr/>
+          <p:nvPr/>
+        </p:nvSpPr>
+        <p:spPr>
+          <a:xfrm>
+            <a:off x="7818120" y="1463040"/>
+            <a:ext cx="1005840" cy="1005840"/>
+          </a:xfrm>
+          <a:prstGeom prst="ellipse">
+            <a:avLst/>
+          </a:prstGeom>
+          <a:solidFill>
+            <a:srgbClr val="8C876C"/>
+          </a:solidFill>
+          <a:ln>
+            <a:noFill/>
+          </a:ln>
+        </p:spPr>
+        <p:style>
+          <a:lnRef idx="1">
+            <a:schemeClr val="accent1"/>
+          </a:lnRef>
+          <a:fillRef idx="3">
+            <a:schemeClr val="accent1"/>
+          </a:fillRef>
+          <a:effectRef idx="2">
+            <a:schemeClr val="accent1"/>
+          </a:effectRef>
+          <a:fontRef idx="minor">
+            <a:schemeClr val="lt1"/>
+          </a:fontRef>
+        </p:style>
+        <p:txBody>
+          <a:bodyPr rtlCol="0" anchor="ctr" wrap="square"/>
+          <a:lstStyle/>
+          <a:p>
+            <a:pPr algn="ctr">
+              <a:defRPr sz="1400" b="1">
+                <a:solidFill>
+                  <a:srgbClr val="FFFFFF"/>
+                </a:solidFill>
+                <a:latin typeface="Meiryo"/>
+              </a:defRPr>
+            </a:pPr>
+            <a:r>
+              <a:t>STEP 4</a:t>
+            </a:r>
+          </a:p>
+        </p:txBody>
+      </p:sp>
+      <p:sp>
+        <p:nvSpPr>
+          <p:cNvPr id="17" name="TextBox 16"/>
+          <p:cNvSpPr txBox="1"/>
+          <p:nvPr/>
+        </p:nvSpPr>
+        <p:spPr>
+          <a:xfrm>
+            <a:off x="8961120" y="1645920"/>
+            <a:ext cx="548640" cy="548640"/>
+          </a:xfrm>
+          <a:prstGeom prst="rect">
+            <a:avLst/>
+          </a:prstGeom>
+          <a:noFill/>
+        </p:spPr>
+        <p:txBody>
+          <a:bodyPr wrap="square">
+            <a:spAutoFit/>
+          </a:bodyPr>
+          <a:lstStyle/>
+          <a:p>
+            <a:pPr algn="ctr">
+              <a:defRPr sz="2800" b="0">
+                <a:solidFill>
+                  <a:srgbClr val="8C876C"/>
+                </a:solidFill>
+                <a:latin typeface="Meiryo"/>
+              </a:defRPr>
+            </a:pPr>
+            <a:r>
+              <a:t>→</a:t>
+            </a:r>
+          </a:p>
+        </p:txBody>
+      </p:sp>
+      <p:sp>
+        <p:nvSpPr>
+          <p:cNvPr id="18" name="TextBox 17"/>
+          <p:cNvSpPr txBox="1"/>
+          <p:nvPr/>
+        </p:nvSpPr>
+        <p:spPr>
+          <a:xfrm>
+            <a:off x="7315200" y="2651760"/>
+            <a:ext cx="2011680" cy="365760"/>
+          </a:xfrm>
+          <a:prstGeom prst="rect">
+            <a:avLst/>
+          </a:prstGeom>
+          <a:noFill/>
+        </p:spPr>
+        <p:txBody>
+          <a:bodyPr wrap="square">
+            <a:spAutoFit/>
+          </a:bodyPr>
+          <a:lstStyle/>
+          <a:p>
+            <a:pPr algn="ctr">
+              <a:defRPr sz="1600" b="1">
+                <a:solidFill>
+                  <a:srgbClr val="333333"/>
+                </a:solidFill>
+                <a:latin typeface="Meiryo"/>
+              </a:defRPr>
+            </a:pPr>
+            <a:r>
+              <a:t>アカウント発行</a:t>
+            </a:r>
+          </a:p>
+        </p:txBody>
+      </p:sp>
+      <p:sp>
+        <p:nvSpPr>
+          <p:cNvPr id="19" name="TextBox 18"/>
+          <p:cNvSpPr txBox="1"/>
+          <p:nvPr/>
+        </p:nvSpPr>
+        <p:spPr>
+          <a:xfrm>
+            <a:off x="7315200" y="3108960"/>
+            <a:ext cx="2011680" cy="1097280"/>
+          </a:xfrm>
+          <a:prstGeom prst="rect">
+            <a:avLst/>
+          </a:prstGeom>
+          <a:noFill/>
+        </p:spPr>
+        <p:txBody>
+          <a:bodyPr wrap="square">
+            <a:spAutoFit/>
+          </a:bodyPr>
+          <a:lstStyle/>
+          <a:p>
+            <a:pPr algn="ctr">
+              <a:defRPr sz="1200" b="0">
+                <a:solidFill>
+                  <a:srgbClr val="999999"/>
+                </a:solidFill>
+                <a:latin typeface="Meiryo"/>
+              </a:defRPr>
+            </a:pPr>
+            <a:r>
+              <a:t>店舗情報・スタッフを登録</a:t>
+            </a:r>
+            <a:br/>
+            <a:r>
+              <a:t>初期設定をサポート</a:t>
+            </a:r>
+          </a:p>
+        </p:txBody>
+      </p:sp>
+      <p:sp>
+        <p:nvSpPr>
+          <p:cNvPr id="20" name="Oval 19"/>
+          <p:cNvSpPr/>
+          <p:nvPr/>
+        </p:nvSpPr>
+        <p:spPr>
+          <a:xfrm>
+            <a:off x="10104120" y="1463040"/>
+            <a:ext cx="1005840" cy="1005840"/>
+          </a:xfrm>
+          <a:prstGeom prst="ellipse">
+            <a:avLst/>
+          </a:prstGeom>
+          <a:solidFill>
+            <a:srgbClr val="8C876C"/>
+          </a:solidFill>
+          <a:ln>
+            <a:noFill/>
+          </a:ln>
+        </p:spPr>
+        <p:style>
+          <a:lnRef idx="1">
+            <a:schemeClr val="accent1"/>
+          </a:lnRef>
+          <a:fillRef idx="3">
+            <a:schemeClr val="accent1"/>
+          </a:fillRef>
+          <a:effectRef idx="2">
+            <a:schemeClr val="accent1"/>
+          </a:effectRef>
+          <a:fontRef idx="minor">
+            <a:schemeClr val="lt1"/>
+          </a:fontRef>
+        </p:style>
+        <p:txBody>
+          <a:bodyPr rtlCol="0" anchor="ctr" wrap="square"/>
+          <a:lstStyle/>
+          <a:p>
+            <a:pPr algn="ctr">
+              <a:defRPr sz="1400" b="1">
+                <a:solidFill>
+                  <a:srgbClr val="FFFFFF"/>
+                </a:solidFill>
+                <a:latin typeface="Meiryo"/>
+              </a:defRPr>
+            </a:pPr>
+            <a:r>
+              <a:t>STEP 5</a:t>
+            </a:r>
+          </a:p>
+        </p:txBody>
+      </p:sp>
+      <p:sp>
+        <p:nvSpPr>
+          <p:cNvPr id="21" name="TextBox 20"/>
+          <p:cNvSpPr txBox="1"/>
+          <p:nvPr/>
+        </p:nvSpPr>
+        <p:spPr>
+          <a:xfrm>
+            <a:off x="9601200" y="2651760"/>
+            <a:ext cx="2011680" cy="365760"/>
+          </a:xfrm>
+          <a:prstGeom prst="rect">
+            <a:avLst/>
+          </a:prstGeom>
+          <a:noFill/>
+        </p:spPr>
+        <p:txBody>
+          <a:bodyPr wrap="square">
+            <a:spAutoFit/>
+          </a:bodyPr>
+          <a:lstStyle/>
+          <a:p>
+            <a:pPr algn="ctr">
+              <a:defRPr sz="1600" b="1">
+                <a:solidFill>
+                  <a:srgbClr val="333333"/>
+                </a:solidFill>
+                <a:latin typeface="Meiryo"/>
+              </a:defRPr>
+            </a:pPr>
+            <a:r>
+              <a:t>運用開始</a:t>
+            </a:r>
+          </a:p>
+        </p:txBody>
+      </p:sp>
+      <p:sp>
+        <p:nvSpPr>
+          <p:cNvPr id="22" name="TextBox 21"/>
+          <p:cNvSpPr txBox="1"/>
+          <p:nvPr/>
+        </p:nvSpPr>
+        <p:spPr>
+          <a:xfrm>
+            <a:off x="9601200" y="3108960"/>
+            <a:ext cx="2011680" cy="1097280"/>
+          </a:xfrm>
+          <a:prstGeom prst="rect">
+            <a:avLst/>
+          </a:prstGeom>
+          <a:noFill/>
+        </p:spPr>
+        <p:txBody>
+          <a:bodyPr wrap="square">
+            <a:spAutoFit/>
+          </a:bodyPr>
+          <a:lstStyle/>
+          <a:p>
+            <a:pPr algn="ctr">
+              <a:defRPr sz="1200" b="0">
+                <a:solidFill>
+                  <a:srgbClr val="999999"/>
+                </a:solidFill>
+                <a:latin typeface="Meiryo"/>
+              </a:defRPr>
+            </a:pPr>
+            <a:r>
+              <a:t>操作方法のレクチャー後</a:t>
+            </a:r>
+            <a:br/>
+            <a:r>
+              <a:t>すぐにご利用開始！</a:t>
+            </a:r>
+          </a:p>
+        </p:txBody>
+      </p:sp>
+      <p:sp>
+        <p:nvSpPr>
+          <p:cNvPr id="23" name="Rounded Rectangle 22"/>
+          <p:cNvSpPr/>
+          <p:nvPr/>
+        </p:nvSpPr>
+        <p:spPr>
+          <a:xfrm>
+            <a:off x="914400" y="4754880"/>
+            <a:ext cx="10360152" cy="1371600"/>
+          </a:xfrm>
+          <a:prstGeom prst="roundRect">
+            <a:avLst/>
+          </a:prstGeom>
+          <a:solidFill>
+            <a:srgbClr val="F5F5F5"/>
+          </a:solidFill>
+          <a:ln>
+            <a:noFill/>
+          </a:ln>
+          <a:effectLst/>
+        </p:spPr>
+        <p:style>
+          <a:lnRef idx="1">
+            <a:schemeClr val="accent1"/>
+          </a:lnRef>
+          <a:fillRef idx="3">
+            <a:schemeClr val="accent1"/>
+          </a:fillRef>
+          <a:effectRef idx="2">
+            <a:schemeClr val="accent1"/>
+          </a:effectRef>
+          <a:fontRef idx="minor">
+            <a:schemeClr val="lt1"/>
+          </a:fontRef>
+        </p:style>
+        <p:txBody>
+          <a:bodyPr rtlCol="0" anchor="ctr"/>
+          <a:lstStyle/>
+          <a:p>
+            <a:pPr algn="ctr"/>
+          </a:p>
+        </p:txBody>
+      </p:sp>
+      <p:sp>
+        <p:nvSpPr>
+          <p:cNvPr id="24" name="TextBox 23"/>
+          <p:cNvSpPr txBox="1"/>
+          <p:nvPr/>
+        </p:nvSpPr>
+        <p:spPr>
+          <a:xfrm>
+            <a:off x="1371600" y="4937760"/>
+            <a:ext cx="9445752" cy="1097280"/>
+          </a:xfrm>
+          <a:prstGeom prst="rect">
+            <a:avLst/>
+          </a:prstGeom>
+          <a:noFill/>
+        </p:spPr>
+        <p:txBody>
+          <a:bodyPr wrap="square">
+            <a:spAutoFit/>
+          </a:bodyPr>
+          <a:lstStyle/>
+          <a:p>
+            <a:pPr algn="l">
+              <a:defRPr sz="1300" b="0">
+                <a:solidFill>
+                  <a:srgbClr val="333333"/>
+                </a:solidFill>
+                <a:latin typeface="Meiryo"/>
+              </a:defRPr>
+            </a:pPr>
+            <a:r>
+              <a:t>最短即日でご利用開始いただけます。</a:t>
+            </a:r>
+            <a:br/>
+            <a:r>
+              <a:t>専用機器の購入やシステム工事は一切不要です。お手持ちのスマホ・タブレット・PCからすぐにアクセスできます。</a:t>
+            </a:r>
+            <a:br/>
+            <a:r>
+              <a:t>導入後も操作方法のサポートや機能アップデートを継続的にご提供します。</a:t>
+            </a:r>
+          </a:p>
+        </p:txBody>
+      </p:sp>
+    </p:spTree>
+  </p:cSld>
+  <p:clrMapOvr>
+    <a:masterClrMapping/>
+  </p:clrMapOvr>
+</p:sld>
+</file>
+
+<file path=ppt/slides/slide26.xml><?xml version="1.0" encoding="utf-8"?>
+<p:sld xmlns:a="http://schemas.openxmlformats.org/drawingml/2006/main" xmlns:p="http://schemas.openxmlformats.org/presentationml/2006/main" xmlns:r="http://schemas.openxmlformats.org/officeDocument/2006/relationships">
+  <p:cSld>
+    <p:bg>
+      <p:bgPr>
+        <a:solidFill>
+          <a:srgbClr val="FFFFFF"/>
+        </a:solidFill>
+        <a:effectLst/>
+      </p:bgPr>
+    </p:bg>
+    <p:spTree>
+      <p:nvGrpSpPr>
+        <p:cNvPr id="1" name=""/>
+        <p:cNvGrpSpPr/>
+        <p:nvPr/>
+      </p:nvGrpSpPr>
+      <p:grpSpPr/>
+      <p:sp>
+        <p:nvSpPr>
+          <p:cNvPr id="2" name="TextBox 1"/>
+          <p:cNvSpPr txBox="1"/>
+          <p:nvPr/>
+        </p:nvSpPr>
+        <p:spPr>
+          <a:xfrm>
+            <a:off x="731520" y="274320"/>
+            <a:ext cx="10058400" cy="457200"/>
+          </a:xfrm>
+          <a:prstGeom prst="rect">
+            <a:avLst/>
+          </a:prstGeom>
+          <a:noFill/>
+        </p:spPr>
+        <p:txBody>
+          <a:bodyPr wrap="square">
+            <a:spAutoFit/>
+          </a:bodyPr>
+          <a:lstStyle/>
+          <a:p>
+            <a:pPr algn="l">
+              <a:defRPr sz="3200" b="1">
+                <a:solidFill>
+                  <a:srgbClr val="8C876C"/>
+                </a:solidFill>
+                <a:latin typeface="Meiryo"/>
+              </a:defRPr>
+            </a:pPr>
+            <a:r>
+              <a:t>料金プラン</a:t>
+            </a:r>
+          </a:p>
+        </p:txBody>
+      </p:sp>
+      <p:sp>
+        <p:nvSpPr>
+          <p:cNvPr id="3" name="Rectangle 2"/>
+          <p:cNvSpPr/>
+          <p:nvPr/>
+        </p:nvSpPr>
+        <p:spPr>
+          <a:xfrm>
+            <a:off x="731520" y="822960"/>
+            <a:ext cx="1828800" cy="36576"/>
+          </a:xfrm>
+          <a:prstGeom prst="rect">
+            <a:avLst/>
+          </a:prstGeom>
+          <a:solidFill>
+            <a:srgbClr val="8C876C"/>
+          </a:solidFill>
+          <a:ln>
+            <a:noFill/>
+          </a:ln>
+          <a:effectLst/>
+        </p:spPr>
+        <p:style>
+          <a:lnRef idx="1">
+            <a:schemeClr val="accent1"/>
+          </a:lnRef>
+          <a:fillRef idx="3">
+            <a:schemeClr val="accent1"/>
+          </a:fillRef>
+          <a:effectRef idx="2">
+            <a:schemeClr val="accent1"/>
+          </a:effectRef>
+          <a:fontRef idx="minor">
+            <a:schemeClr val="lt1"/>
+          </a:fontRef>
+        </p:style>
+        <p:txBody>
+          <a:bodyPr rtlCol="0" anchor="ctr"/>
+          <a:lstStyle/>
+          <a:p>
+            <a:pPr algn="ctr"/>
+          </a:p>
+        </p:txBody>
+      </p:sp>
+      <p:sp>
+        <p:nvSpPr>
+          <p:cNvPr id="4" name="TextBox 3"/>
+          <p:cNvSpPr txBox="1"/>
+          <p:nvPr/>
+        </p:nvSpPr>
+        <p:spPr>
+          <a:xfrm>
+            <a:off x="731520" y="1005840"/>
+            <a:ext cx="10058400" cy="365760"/>
+          </a:xfrm>
+          <a:prstGeom prst="rect">
+            <a:avLst/>
+          </a:prstGeom>
+          <a:noFill/>
+        </p:spPr>
+        <p:txBody>
+          <a:bodyPr wrap="square">
+            <a:spAutoFit/>
+          </a:bodyPr>
+          <a:lstStyle/>
+          <a:p>
+            <a:pPr algn="l">
+              <a:defRPr sz="1200" b="0">
+                <a:solidFill>
+                  <a:srgbClr val="999999"/>
+                </a:solidFill>
+                <a:latin typeface="Meiryo"/>
+              </a:defRPr>
+            </a:pPr>
+            <a:r>
+              <a:t>※ 以下は参考価格です。ご要望に応じてカスタマイズいたします。</a:t>
+            </a:r>
+          </a:p>
+        </p:txBody>
+      </p:sp>
+      <p:sp>
+        <p:nvSpPr>
+          <p:cNvPr id="5" name="Rounded Rectangle 4"/>
+          <p:cNvSpPr/>
+          <p:nvPr/>
+        </p:nvSpPr>
+        <p:spPr>
+          <a:xfrm>
+            <a:off x="548640" y="1554480"/>
+            <a:ext cx="3474720" cy="4754880"/>
+          </a:xfrm>
+          <a:prstGeom prst="roundRect">
+            <a:avLst/>
+          </a:prstGeom>
+          <a:solidFill>
+            <a:srgbClr val="F5F5F5"/>
+          </a:solidFill>
+          <a:ln>
+            <a:noFill/>
+          </a:ln>
+          <a:effectLst/>
+        </p:spPr>
+        <p:style>
+          <a:lnRef idx="1">
+            <a:schemeClr val="accent1"/>
+          </a:lnRef>
+          <a:fillRef idx="3">
+            <a:schemeClr val="accent1"/>
+          </a:fillRef>
+          <a:effectRef idx="2">
+            <a:schemeClr val="accent1"/>
+          </a:effectRef>
+          <a:fontRef idx="minor">
+            <a:schemeClr val="lt1"/>
+          </a:fontRef>
+        </p:style>
+        <p:txBody>
+          <a:bodyPr rtlCol="0" anchor="ctr"/>
+          <a:lstStyle/>
+          <a:p>
+            <a:pPr algn="ctr"/>
+          </a:p>
+        </p:txBody>
+      </p:sp>
+      <p:sp>
+        <p:nvSpPr>
+          <p:cNvPr id="6" name="Rectangle 5"/>
+          <p:cNvSpPr/>
+          <p:nvPr/>
+        </p:nvSpPr>
+        <p:spPr>
+          <a:xfrm>
+            <a:off x="548640" y="1554480"/>
+            <a:ext cx="3474720" cy="73152"/>
+          </a:xfrm>
+          <a:prstGeom prst="rect">
+            <a:avLst/>
+          </a:prstGeom>
+          <a:solidFill>
+            <a:srgbClr val="4CAF50"/>
+          </a:solidFill>
+          <a:ln>
+            <a:noFill/>
+          </a:ln>
+          <a:effectLst/>
+        </p:spPr>
+        <p:style>
+          <a:lnRef idx="1">
+            <a:schemeClr val="accent1"/>
+          </a:lnRef>
+          <a:fillRef idx="3">
+            <a:schemeClr val="accent1"/>
+          </a:fillRef>
+          <a:effectRef idx="2">
+            <a:schemeClr val="accent1"/>
+          </a:effectRef>
+          <a:fontRef idx="minor">
+            <a:schemeClr val="lt1"/>
+          </a:fontRef>
+        </p:style>
+        <p:txBody>
+          <a:bodyPr rtlCol="0" anchor="ctr"/>
+          <a:lstStyle/>
+          <a:p>
+            <a:pPr algn="ctr"/>
+          </a:p>
+        </p:txBody>
+      </p:sp>
+      <p:sp>
+        <p:nvSpPr>
+          <p:cNvPr id="7" name="TextBox 6"/>
+          <p:cNvSpPr txBox="1"/>
+          <p:nvPr/>
+        </p:nvSpPr>
+        <p:spPr>
+          <a:xfrm>
+            <a:off x="731520" y="1828800"/>
+            <a:ext cx="3108960" cy="365760"/>
+          </a:xfrm>
+          <a:prstGeom prst="rect">
+            <a:avLst/>
+          </a:prstGeom>
+          <a:noFill/>
+        </p:spPr>
+        <p:txBody>
+          <a:bodyPr wrap="square">
+            <a:spAutoFit/>
+          </a:bodyPr>
+          <a:lstStyle/>
+          <a:p>
+            <a:pPr algn="ctr">
+              <a:defRPr sz="1800" b="1">
+                <a:solidFill>
+                  <a:srgbClr val="333333"/>
+                </a:solidFill>
+                <a:latin typeface="Meiryo"/>
+              </a:defRPr>
+            </a:pPr>
+            <a:r>
+              <a:t>ライトプラン</a:t>
+            </a:r>
+          </a:p>
+        </p:txBody>
+      </p:sp>
+      <p:sp>
+        <p:nvSpPr>
+          <p:cNvPr id="8" name="TextBox 7"/>
+          <p:cNvSpPr txBox="1"/>
+          <p:nvPr/>
+        </p:nvSpPr>
+        <p:spPr>
+          <a:xfrm>
+            <a:off x="731520" y="2286000"/>
+            <a:ext cx="3108960" cy="457200"/>
+          </a:xfrm>
+          <a:prstGeom prst="rect">
+            <a:avLst/>
+          </a:prstGeom>
+          <a:noFill/>
+        </p:spPr>
+        <p:txBody>
+          <a:bodyPr wrap="square">
+            <a:spAutoFit/>
+          </a:bodyPr>
+          <a:lstStyle/>
+          <a:p>
+            <a:pPr algn="ctr">
+              <a:defRPr sz="2200" b="1">
+                <a:solidFill>
+                  <a:srgbClr val="4CAF50"/>
+                </a:solidFill>
+                <a:latin typeface="Meiryo"/>
+              </a:defRPr>
+            </a:pPr>
+            <a:r>
+              <a:t>月額 ¥○○,○○○〜</a:t>
+            </a:r>
+          </a:p>
+        </p:txBody>
+      </p:sp>
+      <p:sp>
+        <p:nvSpPr>
+          <p:cNvPr id="9" name="Rectangle 8"/>
+          <p:cNvSpPr/>
+          <p:nvPr/>
+        </p:nvSpPr>
+        <p:spPr>
+          <a:xfrm>
+            <a:off x="822960" y="2834640"/>
+            <a:ext cx="2926080" cy="18288"/>
+          </a:xfrm>
+          <a:prstGeom prst="rect">
+            <a:avLst/>
+          </a:prstGeom>
+          <a:solidFill>
+            <a:srgbClr val="999999"/>
+          </a:solidFill>
+          <a:ln>
+            <a:noFill/>
+          </a:ln>
+          <a:effectLst/>
+        </p:spPr>
+        <p:style>
+          <a:lnRef idx="1">
+            <a:schemeClr val="accent1"/>
+          </a:lnRef>
+          <a:fillRef idx="3">
+            <a:schemeClr val="accent1"/>
+          </a:fillRef>
+          <a:effectRef idx="2">
+            <a:schemeClr val="accent1"/>
+          </a:effectRef>
+          <a:fontRef idx="minor">
+            <a:schemeClr val="lt1"/>
+          </a:fontRef>
+        </p:style>
+        <p:txBody>
+          <a:bodyPr rtlCol="0" anchor="ctr"/>
+          <a:lstStyle/>
+          <a:p>
+            <a:pPr algn="ctr"/>
+          </a:p>
+        </p:txBody>
+      </p:sp>
+      <p:sp>
+        <p:nvSpPr>
+          <p:cNvPr id="10" name="TextBox 9"/>
+          <p:cNvSpPr txBox="1"/>
+          <p:nvPr/>
+        </p:nvSpPr>
+        <p:spPr>
+          <a:xfrm>
+            <a:off x="731520" y="2926080"/>
+            <a:ext cx="3108960" cy="274320"/>
+          </a:xfrm>
+          <a:prstGeom prst="rect">
+            <a:avLst/>
+          </a:prstGeom>
+          <a:noFill/>
+        </p:spPr>
+        <p:txBody>
+          <a:bodyPr wrap="square">
+            <a:spAutoFit/>
+          </a:bodyPr>
+          <a:lstStyle/>
+          <a:p>
+            <a:pPr algn="ctr">
+              <a:defRPr sz="1100" b="0">
+                <a:solidFill>
+                  <a:srgbClr val="999999"/>
+                </a:solidFill>
+                <a:latin typeface="Meiryo"/>
+              </a:defRPr>
+            </a:pPr>
+            <a:r>
+              <a:t>小規模店舗向け</a:t>
+            </a:r>
+          </a:p>
+        </p:txBody>
+      </p:sp>
+      <p:sp>
+        <p:nvSpPr>
+          <p:cNvPr id="11" name="TextBox 10"/>
+          <p:cNvSpPr txBox="1"/>
+          <p:nvPr/>
+        </p:nvSpPr>
+        <p:spPr>
+          <a:xfrm>
+            <a:off x="822960" y="3291840"/>
+            <a:ext cx="2926080" cy="2834640"/>
+          </a:xfrm>
+          <a:prstGeom prst="rect">
+            <a:avLst/>
+          </a:prstGeom>
+          <a:noFill/>
+        </p:spPr>
+        <p:txBody>
+          <a:bodyPr wrap="square">
+            <a:spAutoFit/>
+          </a:bodyPr>
+          <a:lstStyle/>
+          <a:p>
+            <a:pPr>
+              <a:spcAft>
+                <a:spcPts val="600"/>
+              </a:spcAft>
+              <a:defRPr sz="1200">
+                <a:solidFill>
+                  <a:srgbClr val="333333"/>
+                </a:solidFill>
+                <a:latin typeface="Meiryo"/>
+              </a:defRPr>
+            </a:pPr>
+            <a:r>
+              <a:t>  ✓  予約管理（LINE・メール）</a:t>
+            </a:r>
+          </a:p>
+          <a:p>
+            <a:pPr>
+              <a:spcAft>
+                <a:spcPts val="600"/>
+              </a:spcAft>
+              <a:defRPr sz="1200">
+                <a:solidFill>
+                  <a:srgbClr val="333333"/>
+                </a:solidFill>
+                <a:latin typeface="Meiryo"/>
+              </a:defRPr>
+            </a:pPr>
+            <a:r>
+              <a:t>  ✓  スタッフ管理（5名まで）</a:t>
+            </a:r>
+          </a:p>
+          <a:p>
+            <a:pPr>
+              <a:spcAft>
+                <a:spcPts val="600"/>
+              </a:spcAft>
+              <a:defRPr sz="1200">
+                <a:solidFill>
+                  <a:srgbClr val="333333"/>
+                </a:solidFill>
+                <a:latin typeface="Meiryo"/>
+              </a:defRPr>
+            </a:pPr>
+            <a:r>
+              <a:t>  ✓  ホームページ管理</a:t>
+            </a:r>
+          </a:p>
+          <a:p>
+            <a:pPr>
+              <a:spcAft>
+                <a:spcPts val="600"/>
+              </a:spcAft>
+              <a:defRPr sz="1200">
+                <a:solidFill>
+                  <a:srgbClr val="333333"/>
+                </a:solidFill>
+                <a:latin typeface="Meiryo"/>
+              </a:defRPr>
+            </a:pPr>
+            <a:r>
+              <a:t>  ✓  メール・チャットサポート</a:t>
+            </a:r>
+          </a:p>
+        </p:txBody>
+      </p:sp>
+      <p:sp>
+        <p:nvSpPr>
+          <p:cNvPr id="12" name="Rounded Rectangle 11"/>
+          <p:cNvSpPr/>
+          <p:nvPr/>
+        </p:nvSpPr>
+        <p:spPr>
+          <a:xfrm>
+            <a:off x="4389120" y="1554480"/>
+            <a:ext cx="3474720" cy="4754880"/>
+          </a:xfrm>
+          <a:prstGeom prst="roundRect">
+            <a:avLst/>
+          </a:prstGeom>
+          <a:solidFill>
+            <a:srgbClr val="F5F5F5"/>
+          </a:solidFill>
+          <a:ln>
+            <a:noFill/>
+          </a:ln>
+          <a:effectLst/>
+        </p:spPr>
+        <p:style>
+          <a:lnRef idx="1">
+            <a:schemeClr val="accent1"/>
+          </a:lnRef>
+          <a:fillRef idx="3">
+            <a:schemeClr val="accent1"/>
+          </a:fillRef>
+          <a:effectRef idx="2">
+            <a:schemeClr val="accent1"/>
+          </a:effectRef>
+          <a:fontRef idx="minor">
+            <a:schemeClr val="lt1"/>
+          </a:fontRef>
+        </p:style>
+        <p:txBody>
+          <a:bodyPr rtlCol="0" anchor="ctr"/>
+          <a:lstStyle/>
+          <a:p>
+            <a:pPr algn="ctr"/>
+          </a:p>
+        </p:txBody>
+      </p:sp>
+      <p:sp>
+        <p:nvSpPr>
+          <p:cNvPr id="13" name="Rectangle 12"/>
+          <p:cNvSpPr/>
+          <p:nvPr/>
+        </p:nvSpPr>
+        <p:spPr>
+          <a:xfrm>
+            <a:off x="4389120" y="1554480"/>
+            <a:ext cx="3474720" cy="73152"/>
+          </a:xfrm>
+          <a:prstGeom prst="rect">
+            <a:avLst/>
+          </a:prstGeom>
+          <a:solidFill>
+            <a:srgbClr val="428BCA"/>
+          </a:solidFill>
+          <a:ln>
+            <a:noFill/>
+          </a:ln>
+          <a:effectLst/>
+        </p:spPr>
+        <p:style>
+          <a:lnRef idx="1">
+            <a:schemeClr val="accent1"/>
+          </a:lnRef>
+          <a:fillRef idx="3">
+            <a:schemeClr val="accent1"/>
+          </a:fillRef>
+          <a:effectRef idx="2">
+            <a:schemeClr val="accent1"/>
+          </a:effectRef>
+          <a:fontRef idx="minor">
+            <a:schemeClr val="lt1"/>
+          </a:fontRef>
+        </p:style>
+        <p:txBody>
+          <a:bodyPr rtlCol="0" anchor="ctr"/>
+          <a:lstStyle/>
+          <a:p>
+            <a:pPr algn="ctr"/>
+          </a:p>
+        </p:txBody>
+      </p:sp>
+      <p:sp>
+        <p:nvSpPr>
+          <p:cNvPr id="14" name="Rounded Rectangle 13"/>
+          <p:cNvSpPr/>
+          <p:nvPr/>
+        </p:nvSpPr>
+        <p:spPr>
+          <a:xfrm>
+            <a:off x="5120640" y="1417320"/>
+            <a:ext cx="2011680" cy="320040"/>
+          </a:xfrm>
+          <a:prstGeom prst="roundRect">
+            <a:avLst/>
+          </a:prstGeom>
+          <a:solidFill>
+            <a:srgbClr val="428BCA"/>
+          </a:solidFill>
+          <a:ln>
+            <a:noFill/>
+          </a:ln>
+          <a:effectLst/>
+        </p:spPr>
+        <p:style>
+          <a:lnRef idx="1">
+            <a:schemeClr val="accent1"/>
+          </a:lnRef>
+          <a:fillRef idx="3">
+            <a:schemeClr val="accent1"/>
+          </a:fillRef>
+          <a:effectRef idx="2">
+            <a:schemeClr val="accent1"/>
+          </a:effectRef>
+          <a:fontRef idx="minor">
+            <a:schemeClr val="lt1"/>
+          </a:fontRef>
+        </p:style>
+        <p:txBody>
+          <a:bodyPr rtlCol="0" anchor="ctr"/>
+          <a:lstStyle/>
+          <a:p>
+            <a:pPr algn="ctr">
+              <a:defRPr sz="1100" b="1">
+                <a:solidFill>
+                  <a:srgbClr val="FFFFFF"/>
+                </a:solidFill>
+                <a:latin typeface="Meiryo"/>
+              </a:defRPr>
+            </a:pPr>
+            <a:r>
+              <a:t>★ おすすめ！</a:t>
+            </a:r>
+          </a:p>
+        </p:txBody>
+      </p:sp>
+      <p:sp>
+        <p:nvSpPr>
+          <p:cNvPr id="15" name="TextBox 14"/>
+          <p:cNvSpPr txBox="1"/>
+          <p:nvPr/>
+        </p:nvSpPr>
+        <p:spPr>
+          <a:xfrm>
+            <a:off x="4572000" y="1828800"/>
+            <a:ext cx="3108960" cy="365760"/>
+          </a:xfrm>
+          <a:prstGeom prst="rect">
+            <a:avLst/>
+          </a:prstGeom>
+          <a:noFill/>
+        </p:spPr>
+        <p:txBody>
+          <a:bodyPr wrap="square">
+            <a:spAutoFit/>
+          </a:bodyPr>
+          <a:lstStyle/>
+          <a:p>
+            <a:pPr algn="ctr">
+              <a:defRPr sz="1800" b="1">
+                <a:solidFill>
+                  <a:srgbClr val="333333"/>
+                </a:solidFill>
+                <a:latin typeface="Meiryo"/>
+              </a:defRPr>
+            </a:pPr>
+            <a:r>
+              <a:t>スタンダードプラン</a:t>
+            </a:r>
+          </a:p>
+        </p:txBody>
+      </p:sp>
+      <p:sp>
+        <p:nvSpPr>
+          <p:cNvPr id="16" name="TextBox 15"/>
+          <p:cNvSpPr txBox="1"/>
+          <p:nvPr/>
+        </p:nvSpPr>
+        <p:spPr>
+          <a:xfrm>
+            <a:off x="4572000" y="2286000"/>
+            <a:ext cx="3108960" cy="457200"/>
+          </a:xfrm>
+          <a:prstGeom prst="rect">
+            <a:avLst/>
+          </a:prstGeom>
+          <a:noFill/>
+        </p:spPr>
+        <p:txBody>
+          <a:bodyPr wrap="square">
+            <a:spAutoFit/>
+          </a:bodyPr>
+          <a:lstStyle/>
+          <a:p>
+            <a:pPr algn="ctr">
+              <a:defRPr sz="2200" b="1">
+                <a:solidFill>
+                  <a:srgbClr val="428BCA"/>
+                </a:solidFill>
+                <a:latin typeface="Meiryo"/>
+              </a:defRPr>
+            </a:pPr>
+            <a:r>
+              <a:t>月額 ¥○○,○○○〜</a:t>
+            </a:r>
+          </a:p>
+        </p:txBody>
+      </p:sp>
+      <p:sp>
+        <p:nvSpPr>
+          <p:cNvPr id="17" name="Rectangle 16"/>
+          <p:cNvSpPr/>
+          <p:nvPr/>
+        </p:nvSpPr>
+        <p:spPr>
+          <a:xfrm>
+            <a:off x="4663440" y="2834640"/>
+            <a:ext cx="2926080" cy="18288"/>
+          </a:xfrm>
+          <a:prstGeom prst="rect">
+            <a:avLst/>
+          </a:prstGeom>
+          <a:solidFill>
+            <a:srgbClr val="999999"/>
+          </a:solidFill>
+          <a:ln>
+            <a:noFill/>
+          </a:ln>
+          <a:effectLst/>
+        </p:spPr>
+        <p:style>
+          <a:lnRef idx="1">
+            <a:schemeClr val="accent1"/>
+          </a:lnRef>
+          <a:fillRef idx="3">
+            <a:schemeClr val="accent1"/>
+          </a:fillRef>
+          <a:effectRef idx="2">
+            <a:schemeClr val="accent1"/>
+          </a:effectRef>
+          <a:fontRef idx="minor">
+            <a:schemeClr val="lt1"/>
+          </a:fontRef>
+        </p:style>
+        <p:txBody>
+          <a:bodyPr rtlCol="0" anchor="ctr"/>
+          <a:lstStyle/>
+          <a:p>
+            <a:pPr algn="ctr"/>
+          </a:p>
+        </p:txBody>
+      </p:sp>
+      <p:sp>
+        <p:nvSpPr>
+          <p:cNvPr id="18" name="TextBox 17"/>
+          <p:cNvSpPr txBox="1"/>
+          <p:nvPr/>
+        </p:nvSpPr>
+        <p:spPr>
+          <a:xfrm>
+            <a:off x="4572000" y="2926080"/>
+            <a:ext cx="3108960" cy="274320"/>
+          </a:xfrm>
+          <a:prstGeom prst="rect">
+            <a:avLst/>
+          </a:prstGeom>
+          <a:noFill/>
+        </p:spPr>
+        <p:txBody>
+          <a:bodyPr wrap="square">
+            <a:spAutoFit/>
+          </a:bodyPr>
+          <a:lstStyle/>
+          <a:p>
+            <a:pPr algn="ctr">
+              <a:defRPr sz="1100" b="0">
+                <a:solidFill>
+                  <a:srgbClr val="999999"/>
+                </a:solidFill>
+                <a:latin typeface="Meiryo"/>
+              </a:defRPr>
+            </a:pPr>
+            <a:r>
+              <a:t>中規模店舗向け</a:t>
+            </a:r>
+          </a:p>
+        </p:txBody>
+      </p:sp>
+      <p:sp>
+        <p:nvSpPr>
+          <p:cNvPr id="19" name="TextBox 18"/>
+          <p:cNvSpPr txBox="1"/>
+          <p:nvPr/>
+        </p:nvSpPr>
+        <p:spPr>
+          <a:xfrm>
+            <a:off x="4663440" y="3291840"/>
+            <a:ext cx="2926080" cy="2834640"/>
+          </a:xfrm>
+          <a:prstGeom prst="rect">
+            <a:avLst/>
+          </a:prstGeom>
+          <a:noFill/>
+        </p:spPr>
+        <p:txBody>
+          <a:bodyPr wrap="square">
+            <a:spAutoFit/>
+          </a:bodyPr>
+          <a:lstStyle/>
+          <a:p>
+            <a:pPr>
+              <a:spcAft>
+                <a:spcPts val="600"/>
+              </a:spcAft>
+              <a:defRPr sz="1200">
+                <a:solidFill>
+                  <a:srgbClr val="333333"/>
+                </a:solidFill>
+                <a:latin typeface="Meiryo"/>
+              </a:defRPr>
+            </a:pPr>
+            <a:r>
+              <a:t>  ✓  ライトプランの全機能</a:t>
+            </a:r>
+          </a:p>
+          <a:p>
+            <a:pPr>
+              <a:spcAft>
+                <a:spcPts val="600"/>
+              </a:spcAft>
+              <a:defRPr sz="1200">
+                <a:solidFill>
+                  <a:srgbClr val="333333"/>
+                </a:solidFill>
+                <a:latin typeface="Meiryo"/>
+              </a:defRPr>
+            </a:pPr>
+            <a:r>
+              <a:t>  ✓  QRテーブル注文</a:t>
+            </a:r>
+          </a:p>
+          <a:p>
+            <a:pPr>
+              <a:spcAft>
+                <a:spcPts val="600"/>
+              </a:spcAft>
+              <a:defRPr sz="1200">
+                <a:solidFill>
+                  <a:srgbClr val="333333"/>
+                </a:solidFill>
+                <a:latin typeface="Meiryo"/>
+              </a:defRPr>
+            </a:pPr>
+            <a:r>
+              <a:t>  ✓  在庫管理</a:t>
+            </a:r>
+          </a:p>
+          <a:p>
+            <a:pPr>
+              <a:spcAft>
+                <a:spcPts val="600"/>
+              </a:spcAft>
+              <a:defRPr sz="1200">
+                <a:solidFill>
+                  <a:srgbClr val="333333"/>
+                </a:solidFill>
+                <a:latin typeface="Meiryo"/>
+              </a:defRPr>
+            </a:pPr>
+            <a:r>
+              <a:t>  ✓  シフト管理</a:t>
+            </a:r>
+          </a:p>
+          <a:p>
+            <a:pPr>
+              <a:spcAft>
+                <a:spcPts val="600"/>
+              </a:spcAft>
+              <a:defRPr sz="1200">
+                <a:solidFill>
+                  <a:srgbClr val="333333"/>
+                </a:solidFill>
+                <a:latin typeface="Meiryo"/>
+              </a:defRPr>
+            </a:pPr>
+            <a:r>
+              <a:t>  ✓  スタッフ無制限</a:t>
+            </a:r>
+          </a:p>
+          <a:p>
+            <a:pPr>
+              <a:spcAft>
+                <a:spcPts val="600"/>
+              </a:spcAft>
+              <a:defRPr sz="1200">
+                <a:solidFill>
+                  <a:srgbClr val="333333"/>
+                </a:solidFill>
+                <a:latin typeface="Meiryo"/>
+              </a:defRPr>
+            </a:pPr>
+            <a:r>
+              <a:t>  ✓  電話サポート</a:t>
+            </a:r>
+          </a:p>
+        </p:txBody>
+      </p:sp>
+      <p:sp>
+        <p:nvSpPr>
+          <p:cNvPr id="20" name="Rounded Rectangle 19"/>
+          <p:cNvSpPr/>
+          <p:nvPr/>
+        </p:nvSpPr>
+        <p:spPr>
+          <a:xfrm>
+            <a:off x="8229600" y="1554480"/>
+            <a:ext cx="3474720" cy="4754880"/>
+          </a:xfrm>
+          <a:prstGeom prst="roundRect">
+            <a:avLst/>
+          </a:prstGeom>
+          <a:solidFill>
+            <a:srgbClr val="F5F5F5"/>
+          </a:solidFill>
+          <a:ln>
+            <a:noFill/>
+          </a:ln>
+          <a:effectLst/>
+        </p:spPr>
+        <p:style>
+          <a:lnRef idx="1">
+            <a:schemeClr val="accent1"/>
+          </a:lnRef>
+          <a:fillRef idx="3">
+            <a:schemeClr val="accent1"/>
+          </a:fillRef>
+          <a:effectRef idx="2">
+            <a:schemeClr val="accent1"/>
+          </a:effectRef>
+          <a:fontRef idx="minor">
+            <a:schemeClr val="lt1"/>
+          </a:fontRef>
+        </p:style>
+        <p:txBody>
+          <a:bodyPr rtlCol="0" anchor="ctr"/>
+          <a:lstStyle/>
+          <a:p>
+            <a:pPr algn="ctr"/>
+          </a:p>
+        </p:txBody>
+      </p:sp>
+      <p:sp>
+        <p:nvSpPr>
+          <p:cNvPr id="21" name="Rectangle 20"/>
+          <p:cNvSpPr/>
+          <p:nvPr/>
+        </p:nvSpPr>
+        <p:spPr>
+          <a:xfrm>
+            <a:off x="8229600" y="1554480"/>
+            <a:ext cx="3474720" cy="73152"/>
+          </a:xfrm>
+          <a:prstGeom prst="rect">
+            <a:avLst/>
+          </a:prstGeom>
+          <a:solidFill>
+            <a:srgbClr val="8C876C"/>
+          </a:solidFill>
+          <a:ln>
+            <a:noFill/>
+          </a:ln>
+          <a:effectLst/>
+        </p:spPr>
+        <p:style>
+          <a:lnRef idx="1">
+            <a:schemeClr val="accent1"/>
+          </a:lnRef>
+          <a:fillRef idx="3">
+            <a:schemeClr val="accent1"/>
+          </a:fillRef>
+          <a:effectRef idx="2">
+            <a:schemeClr val="accent1"/>
+          </a:effectRef>
+          <a:fontRef idx="minor">
+            <a:schemeClr val="lt1"/>
+          </a:fontRef>
+        </p:style>
+        <p:txBody>
+          <a:bodyPr rtlCol="0" anchor="ctr"/>
+          <a:lstStyle/>
+          <a:p>
+            <a:pPr algn="ctr"/>
+          </a:p>
+        </p:txBody>
+      </p:sp>
+      <p:sp>
+        <p:nvSpPr>
+          <p:cNvPr id="22" name="TextBox 21"/>
+          <p:cNvSpPr txBox="1"/>
+          <p:nvPr/>
+        </p:nvSpPr>
+        <p:spPr>
+          <a:xfrm>
+            <a:off x="8412480" y="1828800"/>
+            <a:ext cx="3108960" cy="365760"/>
+          </a:xfrm>
+          <a:prstGeom prst="rect">
+            <a:avLst/>
+          </a:prstGeom>
+          <a:noFill/>
+        </p:spPr>
+        <p:txBody>
+          <a:bodyPr wrap="square">
+            <a:spAutoFit/>
+          </a:bodyPr>
+          <a:lstStyle/>
+          <a:p>
+            <a:pPr algn="ctr">
+              <a:defRPr sz="1800" b="1">
+                <a:solidFill>
+                  <a:srgbClr val="333333"/>
+                </a:solidFill>
+                <a:latin typeface="Meiryo"/>
+              </a:defRPr>
+            </a:pPr>
+            <a:r>
+              <a:t>プレミアムプラン</a:t>
+            </a:r>
+          </a:p>
+        </p:txBody>
+      </p:sp>
+      <p:sp>
+        <p:nvSpPr>
+          <p:cNvPr id="23" name="TextBox 22"/>
+          <p:cNvSpPr txBox="1"/>
+          <p:nvPr/>
+        </p:nvSpPr>
+        <p:spPr>
+          <a:xfrm>
+            <a:off x="8412480" y="2286000"/>
+            <a:ext cx="3108960" cy="457200"/>
+          </a:xfrm>
+          <a:prstGeom prst="rect">
+            <a:avLst/>
+          </a:prstGeom>
+          <a:noFill/>
+        </p:spPr>
+        <p:txBody>
+          <a:bodyPr wrap="square">
+            <a:spAutoFit/>
+          </a:bodyPr>
+          <a:lstStyle/>
+          <a:p>
+            <a:pPr algn="ctr">
+              <a:defRPr sz="2200" b="1">
+                <a:solidFill>
+                  <a:srgbClr val="8C876C"/>
+                </a:solidFill>
+                <a:latin typeface="Meiryo"/>
+              </a:defRPr>
+            </a:pPr>
+            <a:r>
+              <a:t>月額 ¥○○,○○○〜</a:t>
+            </a:r>
+          </a:p>
+        </p:txBody>
+      </p:sp>
+      <p:sp>
+        <p:nvSpPr>
+          <p:cNvPr id="24" name="Rectangle 23"/>
+          <p:cNvSpPr/>
+          <p:nvPr/>
+        </p:nvSpPr>
+        <p:spPr>
+          <a:xfrm>
+            <a:off x="8503920" y="2834640"/>
+            <a:ext cx="2926080" cy="18288"/>
+          </a:xfrm>
+          <a:prstGeom prst="rect">
+            <a:avLst/>
+          </a:prstGeom>
+          <a:solidFill>
+            <a:srgbClr val="999999"/>
+          </a:solidFill>
+          <a:ln>
+            <a:noFill/>
+          </a:ln>
+          <a:effectLst/>
+        </p:spPr>
+        <p:style>
+          <a:lnRef idx="1">
+            <a:schemeClr val="accent1"/>
+          </a:lnRef>
+          <a:fillRef idx="3">
+            <a:schemeClr val="accent1"/>
+          </a:fillRef>
+          <a:effectRef idx="2">
+            <a:schemeClr val="accent1"/>
+          </a:effectRef>
+          <a:fontRef idx="minor">
+            <a:schemeClr val="lt1"/>
+          </a:fontRef>
+        </p:style>
+        <p:txBody>
+          <a:bodyPr rtlCol="0" anchor="ctr"/>
+          <a:lstStyle/>
+          <a:p>
+            <a:pPr algn="ctr"/>
+          </a:p>
+        </p:txBody>
+      </p:sp>
+      <p:sp>
+        <p:nvSpPr>
+          <p:cNvPr id="25" name="TextBox 24"/>
+          <p:cNvSpPr txBox="1"/>
+          <p:nvPr/>
+        </p:nvSpPr>
+        <p:spPr>
+          <a:xfrm>
+            <a:off x="8412480" y="2926080"/>
+            <a:ext cx="3108960" cy="274320"/>
+          </a:xfrm>
+          <a:prstGeom prst="rect">
+            <a:avLst/>
+          </a:prstGeom>
+          <a:noFill/>
+        </p:spPr>
+        <p:txBody>
+          <a:bodyPr wrap="square">
+            <a:spAutoFit/>
+          </a:bodyPr>
+          <a:lstStyle/>
+          <a:p>
+            <a:pPr algn="ctr">
+              <a:defRPr sz="1100" b="0">
+                <a:solidFill>
+                  <a:srgbClr val="999999"/>
+                </a:solidFill>
+                <a:latin typeface="Meiryo"/>
+              </a:defRPr>
+            </a:pPr>
+            <a:r>
+              <a:t>複数店舗・フル機能</a:t>
+            </a:r>
+          </a:p>
+        </p:txBody>
+      </p:sp>
+      <p:sp>
+        <p:nvSpPr>
+          <p:cNvPr id="26" name="TextBox 25"/>
+          <p:cNvSpPr txBox="1"/>
+          <p:nvPr/>
+        </p:nvSpPr>
+        <p:spPr>
+          <a:xfrm>
+            <a:off x="8503920" y="3291840"/>
+            <a:ext cx="2926080" cy="2834640"/>
+          </a:xfrm>
+          <a:prstGeom prst="rect">
+            <a:avLst/>
+          </a:prstGeom>
+          <a:noFill/>
+        </p:spPr>
+        <p:txBody>
+          <a:bodyPr wrap="square">
+            <a:spAutoFit/>
+          </a:bodyPr>
+          <a:lstStyle/>
+          <a:p>
+            <a:pPr>
+              <a:spcAft>
+                <a:spcPts val="600"/>
+              </a:spcAft>
+              <a:defRPr sz="1200">
+                <a:solidFill>
+                  <a:srgbClr val="333333"/>
+                </a:solidFill>
+                <a:latin typeface="Meiryo"/>
+              </a:defRPr>
+            </a:pPr>
+            <a:r>
+              <a:t>  ✓  スタンダードの全機能</a:t>
+            </a:r>
+          </a:p>
+          <a:p>
+            <a:pPr>
+              <a:spcAft>
+                <a:spcPts val="600"/>
+              </a:spcAft>
+              <a:defRPr sz="1200">
+                <a:solidFill>
+                  <a:srgbClr val="333333"/>
+                </a:solidFill>
+                <a:latin typeface="Meiryo"/>
+              </a:defRPr>
+            </a:pPr>
+            <a:r>
+              <a:t>  ✓  給与計算・勤怠管理</a:t>
+            </a:r>
+          </a:p>
+          <a:p>
+            <a:pPr>
+              <a:spcAft>
+                <a:spcPts val="600"/>
+              </a:spcAft>
+              <a:defRPr sz="1200">
+                <a:solidFill>
+                  <a:srgbClr val="333333"/>
+                </a:solidFill>
+                <a:latin typeface="Meiryo"/>
+              </a:defRPr>
+            </a:pPr>
+            <a:r>
+              <a:t>  ✓  売上ダッシュボード</a:t>
+            </a:r>
+          </a:p>
+          <a:p>
+            <a:pPr>
+              <a:spcAft>
+                <a:spcPts val="600"/>
+              </a:spcAft>
+              <a:defRPr sz="1200">
+                <a:solidFill>
+                  <a:srgbClr val="333333"/>
+                </a:solidFill>
+                <a:latin typeface="Meiryo"/>
+              </a:defRPr>
+            </a:pPr>
+            <a:r>
+              <a:t>  ✓  多言語対応（7言語）</a:t>
+            </a:r>
+          </a:p>
+          <a:p>
+            <a:pPr>
+              <a:spcAft>
+                <a:spcPts val="600"/>
+              </a:spcAft>
+              <a:defRPr sz="1200">
+                <a:solidFill>
+                  <a:srgbClr val="333333"/>
+                </a:solidFill>
+                <a:latin typeface="Meiryo"/>
+              </a:defRPr>
+            </a:pPr>
+            <a:r>
+              <a:t>  ✓  複数店舗管理</a:t>
+            </a:r>
+          </a:p>
+          <a:p>
+            <a:pPr>
+              <a:spcAft>
+                <a:spcPts val="600"/>
+              </a:spcAft>
+              <a:defRPr sz="1200">
+                <a:solidFill>
+                  <a:srgbClr val="333333"/>
+                </a:solidFill>
+                <a:latin typeface="Meiryo"/>
+              </a:defRPr>
+            </a:pPr>
+            <a:r>
+              <a:t>  ✓  優先サポート</a:t>
+            </a:r>
+          </a:p>
+          <a:p>
+            <a:pPr>
+              <a:spcAft>
+                <a:spcPts val="600"/>
+              </a:spcAft>
+              <a:defRPr sz="1200">
+                <a:solidFill>
+                  <a:srgbClr val="333333"/>
+                </a:solidFill>
+                <a:latin typeface="Meiryo"/>
+              </a:defRPr>
+            </a:pPr>
+            <a:r>
+              <a:t>  ✓  カスタマイズ対応</a:t>
+            </a:r>
+          </a:p>
+        </p:txBody>
+      </p:sp>
+      <p:sp>
+        <p:nvSpPr>
+          <p:cNvPr id="27" name="TextBox 26"/>
+          <p:cNvSpPr txBox="1"/>
+          <p:nvPr/>
+        </p:nvSpPr>
+        <p:spPr>
+          <a:xfrm>
+            <a:off x="731520" y="6400800"/>
+            <a:ext cx="10058400" cy="274320"/>
+          </a:xfrm>
+          <a:prstGeom prst="rect">
+            <a:avLst/>
+          </a:prstGeom>
+          <a:noFill/>
+        </p:spPr>
+        <p:txBody>
+          <a:bodyPr wrap="square">
+            <a:spAutoFit/>
+          </a:bodyPr>
+          <a:lstStyle/>
+          <a:p>
+            <a:pPr algn="l">
+              <a:defRPr sz="1000" b="0">
+                <a:solidFill>
+                  <a:srgbClr val="999999"/>
+                </a:solidFill>
+                <a:latin typeface="Meiryo"/>
+              </a:defRPr>
+            </a:pPr>
+            <a:r>
+              <a:t>※ 初期費用・カスタマイズ費用は別途お見積りとなります。  ※ 表示価格は税別です。</a:t>
+            </a:r>
+          </a:p>
+        </p:txBody>
+      </p:sp>
+    </p:spTree>
+  </p:cSld>
+  <p:clrMapOvr>
+    <a:masterClrMapping/>
+  </p:clrMapOvr>
+</p:sld>
+</file>
+
+<file path=ppt/slides/slide27.xml><?xml version="1.0" encoding="utf-8"?>
+<p:sld xmlns:a="http://schemas.openxmlformats.org/drawingml/2006/main" xmlns:p="http://schemas.openxmlformats.org/presentationml/2006/main" xmlns:r="http://schemas.openxmlformats.org/officeDocument/2006/relationships">
+  <p:cSld>
+    <p:bg>
+      <p:bgPr>
+        <a:solidFill>
+          <a:srgbClr val="F1F0EC"/>
+        </a:solidFill>
+        <a:effectLst/>
+      </p:bgPr>
+    </p:bg>
+    <p:spTree>
+      <p:nvGrpSpPr>
+        <p:cNvPr id="1" name=""/>
+        <p:cNvGrpSpPr/>
+        <p:nvPr/>
+      </p:nvGrpSpPr>
+      <p:grpSpPr/>
+      <p:sp>
+        <p:nvSpPr>
+          <p:cNvPr id="2" name="TextBox 1"/>
+          <p:cNvSpPr txBox="1"/>
+          <p:nvPr/>
+        </p:nvSpPr>
+        <p:spPr>
+          <a:xfrm>
+            <a:off x="731520" y="274320"/>
+            <a:ext cx="10058400" cy="457200"/>
+          </a:xfrm>
+          <a:prstGeom prst="rect">
+            <a:avLst/>
+          </a:prstGeom>
+          <a:noFill/>
+        </p:spPr>
+        <p:txBody>
+          <a:bodyPr wrap="square">
+            <a:spAutoFit/>
+          </a:bodyPr>
+          <a:lstStyle/>
+          <a:p>
+            <a:pPr algn="l">
+              <a:defRPr sz="3200" b="1">
+                <a:solidFill>
+                  <a:srgbClr val="8C876C"/>
+                </a:solidFill>
+                <a:latin typeface="Meiryo"/>
+              </a:defRPr>
+            </a:pPr>
+            <a:r>
+              <a:t>よくあるご質問</a:t>
+            </a:r>
+          </a:p>
+        </p:txBody>
+      </p:sp>
+      <p:sp>
+        <p:nvSpPr>
+          <p:cNvPr id="3" name="Rectangle 2"/>
+          <p:cNvSpPr/>
+          <p:nvPr/>
+        </p:nvSpPr>
+        <p:spPr>
+          <a:xfrm>
+            <a:off x="731520" y="822960"/>
+            <a:ext cx="1828800" cy="36576"/>
+          </a:xfrm>
+          <a:prstGeom prst="rect">
+            <a:avLst/>
+          </a:prstGeom>
+          <a:solidFill>
+            <a:srgbClr val="8C876C"/>
+          </a:solidFill>
+          <a:ln>
+            <a:noFill/>
+          </a:ln>
+          <a:effectLst/>
+        </p:spPr>
+        <p:style>
+          <a:lnRef idx="1">
+            <a:schemeClr val="accent1"/>
+          </a:lnRef>
+          <a:fillRef idx="3">
+            <a:schemeClr val="accent1"/>
+          </a:fillRef>
+          <a:effectRef idx="2">
+            <a:schemeClr val="accent1"/>
+          </a:effectRef>
+          <a:fontRef idx="minor">
+            <a:schemeClr val="lt1"/>
+          </a:fontRef>
+        </p:style>
+        <p:txBody>
+          <a:bodyPr rtlCol="0" anchor="ctr"/>
+          <a:lstStyle/>
+          <a:p>
+            <a:pPr algn="ctr"/>
+          </a:p>
+        </p:txBody>
+      </p:sp>
+      <p:sp>
+        <p:nvSpPr>
+          <p:cNvPr id="4" name="Rounded Rectangle 3"/>
+          <p:cNvSpPr/>
+          <p:nvPr/>
+        </p:nvSpPr>
+        <p:spPr>
+          <a:xfrm>
+            <a:off x="457200" y="1097280"/>
+            <a:ext cx="11274552" cy="960120"/>
+          </a:xfrm>
+          <a:prstGeom prst="roundRect">
+            <a:avLst/>
+          </a:prstGeom>
+          <a:solidFill>
+            <a:srgbClr val="FFFFFF"/>
+          </a:solidFill>
+          <a:ln>
+            <a:noFill/>
+          </a:ln>
+          <a:effectLst/>
+        </p:spPr>
+        <p:style>
+          <a:lnRef idx="1">
+            <a:schemeClr val="accent1"/>
+          </a:lnRef>
+          <a:fillRef idx="3">
+            <a:schemeClr val="accent1"/>
+          </a:fillRef>
+          <a:effectRef idx="2">
+            <a:schemeClr val="accent1"/>
+          </a:effectRef>
+          <a:fontRef idx="minor">
+            <a:schemeClr val="lt1"/>
+          </a:fontRef>
+        </p:style>
+        <p:txBody>
+          <a:bodyPr rtlCol="0" anchor="ctr"/>
+          <a:lstStyle/>
+          <a:p>
+            <a:pPr algn="ctr"/>
+          </a:p>
+        </p:txBody>
+      </p:sp>
+      <p:sp>
+        <p:nvSpPr>
+          <p:cNvPr id="5" name="TextBox 4"/>
+          <p:cNvSpPr txBox="1"/>
+          <p:nvPr/>
+        </p:nvSpPr>
+        <p:spPr>
+          <a:xfrm>
+            <a:off x="731520" y="1170432"/>
+            <a:ext cx="10725912" cy="274320"/>
+          </a:xfrm>
+          <a:prstGeom prst="rect">
+            <a:avLst/>
+          </a:prstGeom>
+          <a:noFill/>
+        </p:spPr>
+        <p:txBody>
+          <a:bodyPr wrap="square">
+            <a:spAutoFit/>
+          </a:bodyPr>
+          <a:lstStyle/>
+          <a:p>
+            <a:pPr algn="l">
+              <a:defRPr sz="1300" b="1">
+                <a:solidFill>
+                  <a:srgbClr val="8C876C"/>
+                </a:solidFill>
+                <a:latin typeface="Meiryo"/>
+              </a:defRPr>
+            </a:pPr>
+            <a:r>
+              <a:t>Q. 導入に必要な機器はありますか？</a:t>
+            </a:r>
+          </a:p>
+        </p:txBody>
+      </p:sp>
+      <p:sp>
+        <p:nvSpPr>
+          <p:cNvPr id="6" name="TextBox 5"/>
+          <p:cNvSpPr txBox="1"/>
+          <p:nvPr/>
+        </p:nvSpPr>
+        <p:spPr>
+          <a:xfrm>
+            <a:off x="731520" y="1463040"/>
+            <a:ext cx="10725912" cy="548640"/>
+          </a:xfrm>
+          <a:prstGeom prst="rect">
+            <a:avLst/>
+          </a:prstGeom>
+          <a:noFill/>
+        </p:spPr>
+        <p:txBody>
+          <a:bodyPr wrap="square">
+            <a:spAutoFit/>
+          </a:bodyPr>
+          <a:lstStyle/>
+          <a:p>
+            <a:pPr algn="l">
+              <a:defRPr sz="1100" b="0">
+                <a:solidFill>
+                  <a:srgbClr val="333333"/>
+                </a:solidFill>
+                <a:latin typeface="Meiryo"/>
+              </a:defRPr>
+            </a:pPr>
+            <a:r>
+              <a:t>A. いいえ、専用機器は不要です。お手持ちのスマートフォン、タブレット、PCからすぐにご利用いただけます。</a:t>
+            </a:r>
+            <a:br/>
+            <a:r>
+              <a:t>　 テーブル注文のQRコードは、管理画面から生成して印刷するだけです。</a:t>
+            </a:r>
+          </a:p>
+        </p:txBody>
+      </p:sp>
+      <p:sp>
+        <p:nvSpPr>
+          <p:cNvPr id="7" name="Rounded Rectangle 6"/>
+          <p:cNvSpPr/>
+          <p:nvPr/>
+        </p:nvSpPr>
+        <p:spPr>
+          <a:xfrm>
+            <a:off x="457200" y="2194560"/>
+            <a:ext cx="11274552" cy="960120"/>
+          </a:xfrm>
+          <a:prstGeom prst="roundRect">
+            <a:avLst/>
+          </a:prstGeom>
+          <a:solidFill>
+            <a:srgbClr val="FFFFFF"/>
+          </a:solidFill>
+          <a:ln>
+            <a:noFill/>
+          </a:ln>
+          <a:effectLst/>
+        </p:spPr>
+        <p:style>
+          <a:lnRef idx="1">
+            <a:schemeClr val="accent1"/>
+          </a:lnRef>
+          <a:fillRef idx="3">
+            <a:schemeClr val="accent1"/>
+          </a:fillRef>
+          <a:effectRef idx="2">
+            <a:schemeClr val="accent1"/>
+          </a:effectRef>
+          <a:fontRef idx="minor">
+            <a:schemeClr val="lt1"/>
+          </a:fontRef>
+        </p:style>
+        <p:txBody>
+          <a:bodyPr rtlCol="0" anchor="ctr"/>
+          <a:lstStyle/>
+          <a:p>
+            <a:pPr algn="ctr"/>
+          </a:p>
+        </p:txBody>
+      </p:sp>
+      <p:sp>
+        <p:nvSpPr>
+          <p:cNvPr id="8" name="TextBox 7"/>
+          <p:cNvSpPr txBox="1"/>
+          <p:nvPr/>
+        </p:nvSpPr>
+        <p:spPr>
+          <a:xfrm>
+            <a:off x="731520" y="2267712"/>
+            <a:ext cx="10725912" cy="274320"/>
+          </a:xfrm>
+          <a:prstGeom prst="rect">
+            <a:avLst/>
+          </a:prstGeom>
+          <a:noFill/>
+        </p:spPr>
+        <p:txBody>
+          <a:bodyPr wrap="square">
+            <a:spAutoFit/>
+          </a:bodyPr>
+          <a:lstStyle/>
+          <a:p>
+            <a:pPr algn="l">
+              <a:defRPr sz="1300" b="1">
+                <a:solidFill>
+                  <a:srgbClr val="8C876C"/>
+                </a:solidFill>
+                <a:latin typeface="Meiryo"/>
+              </a:defRPr>
+            </a:pPr>
+            <a:r>
+              <a:t>Q. ITに詳しくないスタッフでも使えますか？</a:t>
+            </a:r>
+          </a:p>
+        </p:txBody>
+      </p:sp>
+      <p:sp>
+        <p:nvSpPr>
+          <p:cNvPr id="9" name="TextBox 8"/>
+          <p:cNvSpPr txBox="1"/>
+          <p:nvPr/>
+        </p:nvSpPr>
+        <p:spPr>
+          <a:xfrm>
+            <a:off x="731520" y="2560320"/>
+            <a:ext cx="10725912" cy="548640"/>
+          </a:xfrm>
+          <a:prstGeom prst="rect">
+            <a:avLst/>
+          </a:prstGeom>
+          <a:noFill/>
+        </p:spPr>
+        <p:txBody>
+          <a:bodyPr wrap="square">
+            <a:spAutoFit/>
+          </a:bodyPr>
+          <a:lstStyle/>
+          <a:p>
+            <a:pPr algn="l">
+              <a:defRPr sz="1100" b="0">
+                <a:solidFill>
+                  <a:srgbClr val="333333"/>
+                </a:solidFill>
+                <a:latin typeface="Meiryo"/>
+              </a:defRPr>
+            </a:pPr>
+            <a:r>
+              <a:t>A. はい。スマホが使える方なら直感的に操作できるシンプルな画面設計です。</a:t>
+            </a:r>
+            <a:br/>
+            <a:r>
+              <a:t>　 導入時には操作レクチャーも実施いたします。</a:t>
+            </a:r>
+          </a:p>
+        </p:txBody>
+      </p:sp>
+      <p:sp>
+        <p:nvSpPr>
+          <p:cNvPr id="10" name="Rounded Rectangle 9"/>
+          <p:cNvSpPr/>
+          <p:nvPr/>
+        </p:nvSpPr>
+        <p:spPr>
+          <a:xfrm>
+            <a:off x="457200" y="3291840"/>
+            <a:ext cx="11274552" cy="960120"/>
+          </a:xfrm>
+          <a:prstGeom prst="roundRect">
+            <a:avLst/>
+          </a:prstGeom>
+          <a:solidFill>
+            <a:srgbClr val="FFFFFF"/>
+          </a:solidFill>
+          <a:ln>
+            <a:noFill/>
+          </a:ln>
+          <a:effectLst/>
+        </p:spPr>
+        <p:style>
+          <a:lnRef idx="1">
+            <a:schemeClr val="accent1"/>
+          </a:lnRef>
+          <a:fillRef idx="3">
+            <a:schemeClr val="accent1"/>
+          </a:fillRef>
+          <a:effectRef idx="2">
+            <a:schemeClr val="accent1"/>
+          </a:effectRef>
+          <a:fontRef idx="minor">
+            <a:schemeClr val="lt1"/>
+          </a:fontRef>
+        </p:style>
+        <p:txBody>
+          <a:bodyPr rtlCol="0" anchor="ctr"/>
+          <a:lstStyle/>
+          <a:p>
+            <a:pPr algn="ctr"/>
+          </a:p>
+        </p:txBody>
+      </p:sp>
+      <p:sp>
+        <p:nvSpPr>
+          <p:cNvPr id="11" name="TextBox 10"/>
+          <p:cNvSpPr txBox="1"/>
+          <p:nvPr/>
+        </p:nvSpPr>
+        <p:spPr>
+          <a:xfrm>
+            <a:off x="731520" y="3364992"/>
+            <a:ext cx="10725912" cy="274320"/>
+          </a:xfrm>
+          <a:prstGeom prst="rect">
+            <a:avLst/>
+          </a:prstGeom>
+          <a:noFill/>
+        </p:spPr>
+        <p:txBody>
+          <a:bodyPr wrap="square">
+            <a:spAutoFit/>
+          </a:bodyPr>
+          <a:lstStyle/>
+          <a:p>
+            <a:pPr algn="l">
+              <a:defRPr sz="1300" b="1">
+                <a:solidFill>
+                  <a:srgbClr val="8C876C"/>
+                </a:solidFill>
+                <a:latin typeface="Meiryo"/>
+              </a:defRPr>
+            </a:pPr>
+            <a:r>
+              <a:t>Q. 途中で機能を追加・変更できますか？</a:t>
+            </a:r>
+          </a:p>
+        </p:txBody>
+      </p:sp>
+      <p:sp>
+        <p:nvSpPr>
+          <p:cNvPr id="12" name="TextBox 11"/>
+          <p:cNvSpPr txBox="1"/>
+          <p:nvPr/>
+        </p:nvSpPr>
+        <p:spPr>
+          <a:xfrm>
+            <a:off x="731520" y="3657600"/>
+            <a:ext cx="10725912" cy="548640"/>
+          </a:xfrm>
+          <a:prstGeom prst="rect">
+            <a:avLst/>
+          </a:prstGeom>
+          <a:noFill/>
+        </p:spPr>
+        <p:txBody>
+          <a:bodyPr wrap="square">
+            <a:spAutoFit/>
+          </a:bodyPr>
+          <a:lstStyle/>
+          <a:p>
+            <a:pPr algn="l">
+              <a:defRPr sz="1100" b="0">
+                <a:solidFill>
+                  <a:srgbClr val="333333"/>
+                </a:solidFill>
+                <a:latin typeface="Meiryo"/>
+              </a:defRPr>
+            </a:pPr>
+            <a:r>
+              <a:t>A. はい。プランの変更はいつでも可能です。</a:t>
+            </a:r>
+            <a:br/>
+            <a:r>
+              <a:t>　 まずは基本機能からスタートして、必要に応じて機能を追加していくことをおすすめしています。</a:t>
+            </a:r>
+          </a:p>
+        </p:txBody>
+      </p:sp>
+      <p:sp>
+        <p:nvSpPr>
+          <p:cNvPr id="13" name="Rounded Rectangle 12"/>
+          <p:cNvSpPr/>
+          <p:nvPr/>
+        </p:nvSpPr>
+        <p:spPr>
+          <a:xfrm>
+            <a:off x="457200" y="4389120"/>
+            <a:ext cx="11274552" cy="960120"/>
+          </a:xfrm>
+          <a:prstGeom prst="roundRect">
+            <a:avLst/>
+          </a:prstGeom>
+          <a:solidFill>
+            <a:srgbClr val="FFFFFF"/>
+          </a:solidFill>
+          <a:ln>
+            <a:noFill/>
+          </a:ln>
+          <a:effectLst/>
+        </p:spPr>
+        <p:style>
+          <a:lnRef idx="1">
+            <a:schemeClr val="accent1"/>
+          </a:lnRef>
+          <a:fillRef idx="3">
+            <a:schemeClr val="accent1"/>
+          </a:fillRef>
+          <a:effectRef idx="2">
+            <a:schemeClr val="accent1"/>
+          </a:effectRef>
+          <a:fontRef idx="minor">
+            <a:schemeClr val="lt1"/>
+          </a:fontRef>
+        </p:style>
+        <p:txBody>
+          <a:bodyPr rtlCol="0" anchor="ctr"/>
+          <a:lstStyle/>
+          <a:p>
+            <a:pPr algn="ctr"/>
+          </a:p>
+        </p:txBody>
+      </p:sp>
+      <p:sp>
+        <p:nvSpPr>
+          <p:cNvPr id="14" name="TextBox 13"/>
+          <p:cNvSpPr txBox="1"/>
+          <p:nvPr/>
+        </p:nvSpPr>
+        <p:spPr>
+          <a:xfrm>
+            <a:off x="731520" y="4462272"/>
+            <a:ext cx="10725912" cy="274320"/>
+          </a:xfrm>
+          <a:prstGeom prst="rect">
+            <a:avLst/>
+          </a:prstGeom>
+          <a:noFill/>
+        </p:spPr>
+        <p:txBody>
+          <a:bodyPr wrap="square">
+            <a:spAutoFit/>
+          </a:bodyPr>
+          <a:lstStyle/>
+          <a:p>
+            <a:pPr algn="l">
+              <a:defRPr sz="1300" b="1">
+                <a:solidFill>
+                  <a:srgbClr val="8C876C"/>
+                </a:solidFill>
+                <a:latin typeface="Meiryo"/>
+              </a:defRPr>
+            </a:pPr>
+            <a:r>
+              <a:t>Q. データのセキュリティは大丈夫ですか？</a:t>
+            </a:r>
+          </a:p>
+        </p:txBody>
+      </p:sp>
+      <p:sp>
+        <p:nvSpPr>
+          <p:cNvPr id="15" name="TextBox 14"/>
+          <p:cNvSpPr txBox="1"/>
+          <p:nvPr/>
+        </p:nvSpPr>
+        <p:spPr>
+          <a:xfrm>
+            <a:off x="731520" y="4754880"/>
+            <a:ext cx="10725912" cy="548640"/>
+          </a:xfrm>
+          <a:prstGeom prst="rect">
+            <a:avLst/>
+          </a:prstGeom>
+          <a:noFill/>
+        </p:spPr>
+        <p:txBody>
+          <a:bodyPr wrap="square">
+            <a:spAutoFit/>
+          </a:bodyPr>
+          <a:lstStyle/>
+          <a:p>
+            <a:pPr algn="l">
+              <a:defRPr sz="1100" b="0">
+                <a:solidFill>
+                  <a:srgbClr val="333333"/>
+                </a:solidFill>
+                <a:latin typeface="Meiryo"/>
+              </a:defRPr>
+            </a:pPr>
+            <a:r>
+              <a:t>A. お客様の個人情報は暗号化して保管しています。通信はすべてSSL暗号化で保護されており、</a:t>
+            </a:r>
+            <a:br/>
+            <a:r>
+              <a:t>　 クレジットカード情報は外部の決済サービス（PCI DSS準拠）で処理するため、店舗側にカード情報は残りません。</a:t>
+            </a:r>
+          </a:p>
+        </p:txBody>
+      </p:sp>
+      <p:sp>
+        <p:nvSpPr>
+          <p:cNvPr id="16" name="Rounded Rectangle 15"/>
+          <p:cNvSpPr/>
+          <p:nvPr/>
+        </p:nvSpPr>
+        <p:spPr>
+          <a:xfrm>
+            <a:off x="457200" y="5486400"/>
+            <a:ext cx="11274552" cy="960120"/>
+          </a:xfrm>
+          <a:prstGeom prst="roundRect">
+            <a:avLst/>
+          </a:prstGeom>
+          <a:solidFill>
+            <a:srgbClr val="FFFFFF"/>
+          </a:solidFill>
+          <a:ln>
+            <a:noFill/>
+          </a:ln>
+          <a:effectLst/>
+        </p:spPr>
+        <p:style>
+          <a:lnRef idx="1">
+            <a:schemeClr val="accent1"/>
+          </a:lnRef>
+          <a:fillRef idx="3">
+            <a:schemeClr val="accent1"/>
+          </a:fillRef>
+          <a:effectRef idx="2">
+            <a:schemeClr val="accent1"/>
+          </a:effectRef>
+          <a:fontRef idx="minor">
+            <a:schemeClr val="lt1"/>
+          </a:fontRef>
+        </p:style>
+        <p:txBody>
+          <a:bodyPr rtlCol="0" anchor="ctr"/>
+          <a:lstStyle/>
+          <a:p>
+            <a:pPr algn="ctr"/>
+          </a:p>
+        </p:txBody>
+      </p:sp>
+      <p:sp>
+        <p:nvSpPr>
+          <p:cNvPr id="17" name="TextBox 16"/>
+          <p:cNvSpPr txBox="1"/>
+          <p:nvPr/>
+        </p:nvSpPr>
+        <p:spPr>
+          <a:xfrm>
+            <a:off x="731520" y="5559552"/>
+            <a:ext cx="10725912" cy="274320"/>
+          </a:xfrm>
+          <a:prstGeom prst="rect">
+            <a:avLst/>
+          </a:prstGeom>
+          <a:noFill/>
+        </p:spPr>
+        <p:txBody>
+          <a:bodyPr wrap="square">
+            <a:spAutoFit/>
+          </a:bodyPr>
+          <a:lstStyle/>
+          <a:p>
+            <a:pPr algn="l">
+              <a:defRPr sz="1300" b="1">
+                <a:solidFill>
+                  <a:srgbClr val="8C876C"/>
+                </a:solidFill>
+                <a:latin typeface="Meiryo"/>
+              </a:defRPr>
+            </a:pPr>
+            <a:r>
+              <a:t>Q. 複数店舗で使えますか？</a:t>
+            </a:r>
+          </a:p>
+        </p:txBody>
+      </p:sp>
+      <p:sp>
+        <p:nvSpPr>
+          <p:cNvPr id="18" name="TextBox 17"/>
+          <p:cNvSpPr txBox="1"/>
+          <p:nvPr/>
+        </p:nvSpPr>
+        <p:spPr>
+          <a:xfrm>
+            <a:off x="731520" y="5852160"/>
+            <a:ext cx="10725912" cy="548640"/>
+          </a:xfrm>
+          <a:prstGeom prst="rect">
+            <a:avLst/>
+          </a:prstGeom>
+          <a:noFill/>
+        </p:spPr>
+        <p:txBody>
+          <a:bodyPr wrap="square">
+            <a:spAutoFit/>
+          </a:bodyPr>
+          <a:lstStyle/>
+          <a:p>
+            <a:pPr algn="l">
+              <a:defRPr sz="1100" b="0">
+                <a:solidFill>
+                  <a:srgbClr val="333333"/>
+                </a:solidFill>
+                <a:latin typeface="Meiryo"/>
+              </a:defRPr>
+            </a:pPr>
+            <a:r>
+              <a:t>A. はい。プレミアムプランでは複数店舗を一元管理できます。</a:t>
+            </a:r>
+            <a:br/>
+            <a:r>
+              <a:t>　 店舗ごとにスタッフや在庫を分けて管理しながら、全体の売上をまとめて確認できます。</a:t>
+            </a:r>
+          </a:p>
+        </p:txBody>
+      </p:sp>
+    </p:spTree>
+  </p:cSld>
+  <p:clrMapOvr>
+    <a:masterClrMapping/>
+  </p:clrMapOvr>
+</p:sld>
+</file>
+
+<file path=ppt/slides/slide28.xml><?xml version="1.0" encoding="utf-8"?>
 <p:sld xmlns:a="http://schemas.openxmlformats.org/drawingml/2006/main" xmlns:p="http://schemas.openxmlformats.org/presentationml/2006/main" xmlns:r="http://schemas.openxmlformats.org/officeDocument/2006/relationships">
   <p:cSld>
     <p:bg>

--- a/docs/TimeBaiBai_サービス紹介資料.pptx
+++ b/docs/TimeBaiBai_サービス紹介資料.pptx
@@ -4420,8 +4420,8 @@
         </p:blipFill>
         <p:spPr>
           <a:xfrm>
-            <a:off x="473456" y="1188720"/>
-            <a:ext cx="7282688" cy="5120640"/>
+            <a:off x="1683635" y="1188720"/>
+            <a:ext cx="4862328" cy="5120640"/>
           </a:xfrm>
           <a:prstGeom prst="rect">
             <a:avLst/>

--- a/docs/TimeBaiBai_サービス紹介資料.pptx
+++ b/docs/TimeBaiBai_サービス紹介資料.pptx
@@ -8957,7 +8957,7 @@
               </a:defRPr>
             </a:pPr>
             <a:r>
-              <a:t>📈</a:t>
+              <a:t>🌐</a:t>
             </a:r>
           </a:p>
         </p:txBody>
@@ -8993,7 +8993,7 @@
               </a:defRPr>
             </a:pPr>
             <a:r>
-              <a:t>売上アップに貢献</a:t>
+              <a:t>既存HPにそのまま設置</a:t>
             </a:r>
           </a:p>
         </p:txBody>
@@ -9029,11 +9029,11 @@
               </a:defRPr>
             </a:pPr>
             <a:r>
-              <a:t>QR注文で追加オーダー率UP。</a:t>
+              <a:t>iframe埋め込みで既存のWordPress等のサイトに</a:t>
             </a:r>
             <a:br/>
             <a:r>
-              <a:t>多言語対応でインバウンド客も取りこぼしません。</a:t>
+              <a:t>予約カレンダーをそのまま設置。サイト移行不要です。</a:t>
             </a:r>
           </a:p>
         </p:txBody>
@@ -9113,7 +9113,7 @@
               </a:defRPr>
             </a:pPr>
             <a:r>
-              <a:t>⏱</a:t>
+              <a:t>🎫</a:t>
             </a:r>
           </a:p>
         </p:txBody>
@@ -9149,7 +9149,7 @@
               </a:defRPr>
             </a:pPr>
             <a:r>
-              <a:t>業務時間を大幅削減</a:t>
+              <a:t>無料予約にも対応</a:t>
             </a:r>
           </a:p>
         </p:txBody>
@@ -9185,11 +9185,11 @@
               </a:defRPr>
             </a:pPr>
             <a:r>
-              <a:t>予約受付・注文・シフト管理・給与計算を自動化。</a:t>
+              <a:t>イベントや体験予約など決済不要なシーンにも対応。</a:t>
             </a:r>
             <a:br/>
             <a:r>
-              <a:t>スタッフが接客に集中できる環境を作ります。</a:t>
+              <a:t>管理画面からワンクリックで有料/無料を切替可能。</a:t>
             </a:r>
           </a:p>
         </p:txBody>
@@ -9269,7 +9269,7 @@
               </a:defRPr>
             </a:pPr>
             <a:r>
-              <a:t>💰</a:t>
+              <a:t>⏱</a:t>
             </a:r>
           </a:p>
         </p:txBody>
@@ -9305,7 +9305,7 @@
               </a:defRPr>
             </a:pPr>
             <a:r>
-              <a:t>コスト削減</a:t>
+              <a:t>業務時間を大幅削減</a:t>
             </a:r>
           </a:p>
         </p:txBody>
@@ -9341,11 +9341,11 @@
               </a:defRPr>
             </a:pPr>
             <a:r>
-              <a:t>予約台帳・注文伝票・タイムカード…</a:t>
+              <a:t>予約受付・注文・シフト管理・給与計算を自動化。</a:t>
             </a:r>
             <a:br/>
             <a:r>
-              <a:t>紙のコストと手間をゼロにします。</a:t>
+              <a:t>スタッフが接客に集中できる環境を作ります。</a:t>
             </a:r>
           </a:p>
         </p:txBody>
@@ -12488,6 +12488,126 @@
           </a:p>
         </p:txBody>
       </p:sp>
+      <p:sp>
+        <p:nvSpPr>
+          <p:cNvPr id="19" name="Rounded Rectangle 18"/>
+          <p:cNvSpPr/>
+          <p:nvPr/>
+        </p:nvSpPr>
+        <p:spPr>
+          <a:xfrm>
+            <a:off x="457200" y="6583680"/>
+            <a:ext cx="11274552" cy="960120"/>
+          </a:xfrm>
+          <a:prstGeom prst="roundRect">
+            <a:avLst/>
+          </a:prstGeom>
+          <a:solidFill>
+            <a:srgbClr val="FFFFFF"/>
+          </a:solidFill>
+          <a:ln>
+            <a:noFill/>
+          </a:ln>
+          <a:effectLst/>
+        </p:spPr>
+        <p:style>
+          <a:lnRef idx="1">
+            <a:schemeClr val="accent1"/>
+          </a:lnRef>
+          <a:fillRef idx="3">
+            <a:schemeClr val="accent1"/>
+          </a:fillRef>
+          <a:effectRef idx="2">
+            <a:schemeClr val="accent1"/>
+          </a:effectRef>
+          <a:fontRef idx="minor">
+            <a:schemeClr val="lt1"/>
+          </a:fontRef>
+        </p:style>
+        <p:txBody>
+          <a:bodyPr rtlCol="0" anchor="ctr"/>
+          <a:lstStyle/>
+          <a:p>
+            <a:pPr algn="ctr"/>
+          </a:p>
+        </p:txBody>
+      </p:sp>
+      <p:sp>
+        <p:nvSpPr>
+          <p:cNvPr id="20" name="TextBox 19"/>
+          <p:cNvSpPr txBox="1"/>
+          <p:nvPr/>
+        </p:nvSpPr>
+        <p:spPr>
+          <a:xfrm>
+            <a:off x="731520" y="6656832"/>
+            <a:ext cx="10725912" cy="274320"/>
+          </a:xfrm>
+          <a:prstGeom prst="rect">
+            <a:avLst/>
+          </a:prstGeom>
+          <a:noFill/>
+        </p:spPr>
+        <p:txBody>
+          <a:bodyPr wrap="square">
+            <a:spAutoFit/>
+          </a:bodyPr>
+          <a:lstStyle/>
+          <a:p>
+            <a:pPr algn="l">
+              <a:defRPr sz="1300" b="1">
+                <a:solidFill>
+                  <a:srgbClr val="8C876C"/>
+                </a:solidFill>
+                <a:latin typeface="Meiryo"/>
+              </a:defRPr>
+            </a:pPr>
+            <a:r>
+              <a:t>Q. 既存のホームページに予約機能だけ追加できますか？</a:t>
+            </a:r>
+          </a:p>
+        </p:txBody>
+      </p:sp>
+      <p:sp>
+        <p:nvSpPr>
+          <p:cNvPr id="21" name="TextBox 20"/>
+          <p:cNvSpPr txBox="1"/>
+          <p:nvPr/>
+        </p:nvSpPr>
+        <p:spPr>
+          <a:xfrm>
+            <a:off x="731520" y="6949440"/>
+            <a:ext cx="10725912" cy="548640"/>
+          </a:xfrm>
+          <a:prstGeom prst="rect">
+            <a:avLst/>
+          </a:prstGeom>
+          <a:noFill/>
+        </p:spPr>
+        <p:txBody>
+          <a:bodyPr wrap="square">
+            <a:spAutoFit/>
+          </a:bodyPr>
+          <a:lstStyle/>
+          <a:p>
+            <a:pPr algn="l">
+              <a:defRPr sz="1100" b="0">
+                <a:solidFill>
+                  <a:srgbClr val="333333"/>
+                </a:solidFill>
+                <a:latin typeface="Meiryo"/>
+              </a:defRPr>
+            </a:pPr>
+            <a:r>
+              <a:t>A. はい。iframe埋め込み機能で、既存のWordPressサイト等に予約カレンダーをそのまま設置できます。</a:t>
+            </a:r>
+            <a:br/>
+            <a:r>
+              <a:t>　 サイトの移行やリニューアルは不要です。無料予約モードにも対応しており、イベント等にもご利用いただけます。</a:t>
+            </a:r>
+          </a:p>
+        </p:txBody>
+      </p:sp>
     </p:spTree>
   </p:cSld>
   <p:clrMapOvr>
@@ -13874,7 +13994,7 @@
               </a:defRPr>
             </a:pPr>
             <a:r>
-              <a:t>  ●  前払い予約確定制 — 決済完了で自動確定（ドタキャン防止）</a:t>
+              <a:t>  ●  外部サイト埋め込み対応 — 既存HPにiframeで予約カレンダーを設置可能</a:t>
             </a:r>
           </a:p>
           <a:p>
@@ -13890,7 +14010,23 @@
               </a:defRPr>
             </a:pPr>
             <a:r>
-              <a:t>  ●  前払い/後払いは管理画面からワンクリックで切替可能</a:t>
+              <a:t>  ●  無料予約モード — 管理画面からワンクリックで決済スキップ・即確定に切替</a:t>
+            </a:r>
+          </a:p>
+          <a:p>
+            <a:pPr>
+              <a:spcAft>
+                <a:spcPts val="600"/>
+              </a:spcAft>
+              <a:defRPr sz="1100">
+                <a:solidFill>
+                  <a:srgbClr val="333333"/>
+                </a:solidFill>
+                <a:latin typeface="Meiryo"/>
+              </a:defRPr>
+            </a:pPr>
+            <a:r>
+              <a:t>  ●  前払い予約確定制 — 決済完了で自動確定（ドタキャン防止）</a:t>
             </a:r>
           </a:p>
           <a:p>
